--- a/Supply_Chain_Risk_Console.pptx
+++ b/Supply_Chain_Risk_Console.pptx
@@ -2624,7 +2624,7 @@
         </p:nvSpPr>
         <p:spPr>
           <a:xfrm>
-            <a:off x="731520" y="5212080"/>
+            <a:off x="731520" y="5120640"/>
             <a:ext cx="10972800" cy="365760"/>
           </a:xfrm>
           <a:prstGeom prst="rect">
@@ -2666,6 +2666,59 @@
               <a:t>    ·    github.com/cmiebach/agentic_ai</a:t>
             </a:r>
             <a:endParaRPr lang="en-US" sz="1300" dirty="0"/>
+          </a:p>
+        </p:txBody>
+      </p:sp>
+      <p:sp>
+        <p:nvSpPr>
+          <p:cNvPr id="13" name="Text 11"/>
+          <p:cNvSpPr/>
+          <p:nvPr/>
+        </p:nvSpPr>
+        <p:spPr>
+          <a:xfrm>
+            <a:off x="731520" y="5669280"/>
+            <a:ext cx="10972800" cy="365760"/>
+          </a:xfrm>
+          <a:prstGeom prst="rect">
+            <a:avLst/>
+          </a:prstGeom>
+          <a:noFill/>
+          <a:ln/>
+        </p:spPr>
+        <p:txBody>
+          <a:bodyPr wrap="square" rtlCol="0" anchor="ctr"/>
+          <a:lstStyle/>
+          <a:p>
+            <a:pPr indent="0" marL="0">
+              <a:buNone/>
+            </a:pPr>
+            <a:r>
+              <a:rPr lang="en-US" sz="1400" b="1" spc="200" kern="0" dirty="0">
+                <a:solidFill>
+                  <a:srgbClr val="8B8DFF"/>
+                </a:solidFill>
+                <a:latin typeface="Arial" pitchFamily="34" charset="0"/>
+                <a:ea typeface="Arial" pitchFamily="34" charset="-122"/>
+                <a:cs typeface="Arial" pitchFamily="34" charset="-120"/>
+              </a:rPr>
+              <a:t>TEAM   </a:t>
+            </a:r>
+            <a:pPr indent="0" marL="0">
+              <a:buNone/>
+            </a:pPr>
+            <a:r>
+              <a:rPr lang="en-US" sz="1400" dirty="0">
+                <a:solidFill>
+                  <a:srgbClr val="ECEAF6"/>
+                </a:solidFill>
+                <a:latin typeface="Arial" pitchFamily="34" charset="0"/>
+                <a:ea typeface="Arial" pitchFamily="34" charset="-122"/>
+                <a:cs typeface="Arial" pitchFamily="34" charset="-120"/>
+              </a:rPr>
+              <a:t>Ricardo · Antonio · Max · Caspar · Nicklas</a:t>
+            </a:r>
+            <a:endParaRPr lang="en-US" sz="1400" dirty="0"/>
           </a:p>
         </p:txBody>
       </p:sp>

--- a/Supply_Chain_Risk_Console.pptx
+++ b/Supply_Chain_Risk_Console.pptx
@@ -19,9 +19,10 @@
     <p:sldId id="267" r:id="rId13"/>
     <p:sldId id="268" r:id="rId14"/>
     <p:sldId id="269" r:id="rId15"/>
+    <p:sldId id="270" r:id="rId16"/>
   </p:sldIdLst>
   <p:notesMasterIdLst>
-    <p:notesMasterId r:id="rId16"/>
+    <p:notesMasterId r:id="rId17"/>
   </p:notesMasterIdLst>
   <p:sldSz cx="12192000" cy="6858000"/>
   <p:notesSz cx="6858000" cy="12192000"/>
@@ -1225,6 +1226,94 @@
             <a:fld id="{F7021451-1387-4CA6-816F-3879F97B5CBC}" type="slidenum">
               <a:rPr lang="en-US"/>
               <a:t>14</a:t>
+            </a:fld>
+            <a:endParaRPr lang="en-US"/>
+          </a:p>
+        </p:txBody>
+      </p:sp>
+    </p:spTree>
+    <p:extLst>
+      <p:ext uri="{BB962C8B-B14F-4D97-AF65-F5344CB8AC3E}">
+        <p14:creationId xmlns:p14="http://schemas.microsoft.com/office/powerpoint/2010/main" val="1024086991"/>
+      </p:ext>
+    </p:extLst>
+  </p:cSld>
+  <p:clrMapOvr>
+    <a:masterClrMapping/>
+  </p:clrMapOvr>
+</p:notes>
+</file>
+
+<file path=ppt/notesSlides/notesSlide15.xml><?xml version="1.0" encoding="utf-8"?>
+<p:notes xmlns:a="http://schemas.openxmlformats.org/drawingml/2006/main" xmlns:r="http://schemas.openxmlformats.org/officeDocument/2006/relationships" xmlns:p="http://schemas.openxmlformats.org/presentationml/2006/main">
+  <p:cSld>
+    <p:spTree>
+      <p:nvGrpSpPr>
+        <p:cNvPr id="1" name=""/>
+        <p:cNvGrpSpPr/>
+        <p:nvPr/>
+      </p:nvGrpSpPr>
+      <p:grpSpPr>
+        <a:xfrm>
+          <a:off x="0" y="0"/>
+          <a:ext cx="0" cy="0"/>
+          <a:chOff x="0" y="0"/>
+          <a:chExt cx="0" cy="0"/>
+        </a:xfrm>
+      </p:grpSpPr>
+      <p:sp>
+        <p:nvSpPr>
+          <p:cNvPr id="2" name="Slide Image Placeholder 1"/>
+          <p:cNvSpPr>
+            <a:spLocks noGrp="1" noRot="1" noChangeAspect="1"/>
+          </p:cNvSpPr>
+          <p:nvPr>
+            <p:ph type="sldImg"/>
+          </p:nvPr>
+        </p:nvSpPr>
+        <p:spPr/>
+      </p:sp>
+      <p:sp>
+        <p:nvSpPr>
+          <p:cNvPr id="3" name="Notes Placeholder 2"/>
+          <p:cNvSpPr>
+            <a:spLocks noGrp="1"/>
+          </p:cNvSpPr>
+          <p:nvPr>
+            <p:ph type="body" idx="1"/>
+          </p:nvPr>
+        </p:nvSpPr>
+        <p:spPr/>
+        <p:txBody>
+          <a:bodyPr/>
+          <a:lstStyle/>
+          <a:p>
+            <a:r>
+              <a:rPr lang="en-US" dirty="0"/>
+              <a:t/>
+            </a:r>
+            <a:endParaRPr lang="en-US" dirty="0"/>
+          </a:p>
+        </p:txBody>
+      </p:sp>
+      <p:sp>
+        <p:nvSpPr>
+          <p:cNvPr id="4" name="Slide Number Placeholder 3"/>
+          <p:cNvSpPr>
+            <a:spLocks noGrp="1"/>
+          </p:cNvSpPr>
+          <p:nvPr>
+            <p:ph type="sldNum" sz="quarter" idx="10"/>
+          </p:nvPr>
+        </p:nvSpPr>
+        <p:spPr/>
+        <p:txBody>
+          <a:bodyPr/>
+          <a:lstStyle/>
+          <a:p>
+            <a:fld id="{F7021451-1387-4CA6-816F-3879F97B5CBC}" type="slidenum">
+              <a:rPr lang="en-US"/>
+              <a:t>15</a:t>
             </a:fld>
             <a:endParaRPr lang="en-US"/>
           </a:p>
@@ -2807,7 +2896,7 @@
                 <a:ea typeface="Arial" pitchFamily="34" charset="-122"/>
                 <a:cs typeface="Arial" pitchFamily="34" charset="-120"/>
               </a:rPr>
-              <a:t>THE DELIVERABLE</a:t>
+              <a:t>RISK ENGINE</a:t>
             </a:r>
             <a:endParaRPr lang="en-US" sz="1100" dirty="0"/>
           </a:p>
@@ -2846,7 +2935,7 @@
                 <a:ea typeface="Trebuchet MS" pitchFamily="34" charset="-122"/>
                 <a:cs typeface="Trebuchet MS" pitchFamily="34" charset="-120"/>
               </a:rPr>
-              <a:t>Three Agentic AI opportunities — mapped to cost</a:t>
+              <a:t>Logistics risk + a LightGBM late-delivery model</a:t>
             </a:r>
             <a:endParaRPr lang="en-US" sz="3000" dirty="0"/>
           </a:p>
@@ -2861,11 +2950,11 @@
         <p:spPr>
           <a:xfrm>
             <a:off x="548640" y="1783080"/>
-            <a:ext cx="11064240" cy="1152144"/>
+            <a:ext cx="4572000" cy="3886200"/>
           </a:xfrm>
           <a:prstGeom prst="roundRect">
             <a:avLst>
-              <a:gd name="adj" fmla="val 7143"/>
+              <a:gd name="adj" fmla="val 2118"/>
             </a:avLst>
           </a:prstGeom>
           <a:solidFill>
@@ -2888,34 +2977,14 @@
       </p:sp>
       <p:sp>
         <p:nvSpPr>
-          <p:cNvPr id="6" name="Shape 4"/>
-          <p:cNvSpPr/>
-          <p:nvPr/>
-        </p:nvSpPr>
-        <p:spPr>
-          <a:xfrm>
-            <a:off x="548640" y="1783080"/>
-            <a:ext cx="109728" cy="1152144"/>
-          </a:xfrm>
-          <a:prstGeom prst="rect">
-            <a:avLst/>
-          </a:prstGeom>
-          <a:solidFill>
-            <a:srgbClr val="8B8DFF"/>
-          </a:solidFill>
-          <a:ln/>
-        </p:spPr>
-      </p:sp>
-      <p:sp>
-        <p:nvSpPr>
-          <p:cNvPr id="7" name="Text 5"/>
-          <p:cNvSpPr/>
-          <p:nvPr/>
-        </p:nvSpPr>
-        <p:spPr>
-          <a:xfrm>
-            <a:off x="868680" y="1929384"/>
-            <a:ext cx="3931920" cy="932688"/>
+          <p:cNvPr id="6" name="Text 4"/>
+          <p:cNvSpPr/>
+          <p:nvPr/>
+        </p:nvSpPr>
+        <p:spPr>
+          <a:xfrm>
+            <a:off x="822960" y="1965960"/>
+            <a:ext cx="4114800" cy="365760"/>
           </a:xfrm>
           <a:prstGeom prst="rect">
             <a:avLst/>
@@ -2931,7 +3000,7 @@
               <a:buNone/>
             </a:pPr>
             <a:r>
-              <a:rPr lang="en-US" sz="1700" b="1" dirty="0">
+              <a:rPr lang="en-US" sz="1500" b="1" dirty="0">
                 <a:solidFill>
                   <a:srgbClr val="C0C1FF"/>
                 </a:solidFill>
@@ -2939,9 +3008,48 @@
                 <a:ea typeface="Trebuchet MS" pitchFamily="34" charset="-122"/>
                 <a:cs typeface="Trebuchet MS" pitchFamily="34" charset="-120"/>
               </a:rPr>
-              <a:t>Tier-2 Risk Sentinel</a:t>
-            </a:r>
-            <a:endParaRPr lang="en-US" sz="1700" dirty="0"/>
+              <a:t>Simulated in-transit shipments</a:t>
+            </a:r>
+            <a:endParaRPr lang="en-US" sz="1500" dirty="0"/>
+          </a:p>
+        </p:txBody>
+      </p:sp>
+      <p:sp>
+        <p:nvSpPr>
+          <p:cNvPr id="7" name="Text 5"/>
+          <p:cNvSpPr/>
+          <p:nvPr/>
+        </p:nvSpPr>
+        <p:spPr>
+          <a:xfrm>
+            <a:off x="822960" y="2423160"/>
+            <a:ext cx="1828800" cy="640080"/>
+          </a:xfrm>
+          <a:prstGeom prst="rect">
+            <a:avLst/>
+          </a:prstGeom>
+          <a:noFill/>
+          <a:ln/>
+        </p:spPr>
+        <p:txBody>
+          <a:bodyPr wrap="square" rtlCol="0" anchor="ctr"/>
+          <a:lstStyle/>
+          <a:p>
+            <a:pPr indent="0" marL="0">
+              <a:buNone/>
+            </a:pPr>
+            <a:r>
+              <a:rPr lang="en-US" sz="3000" b="1" dirty="0">
+                <a:solidFill>
+                  <a:srgbClr val="FFB783"/>
+                </a:solidFill>
+                <a:latin typeface="Trebuchet MS" pitchFamily="34" charset="0"/>
+                <a:ea typeface="Trebuchet MS" pitchFamily="34" charset="-122"/>
+                <a:cs typeface="Trebuchet MS" pitchFamily="34" charset="-120"/>
+              </a:rPr>
+              <a:t>$240K</a:t>
+            </a:r>
+            <a:endParaRPr lang="en-US" sz="3000" dirty="0"/>
           </a:p>
         </p:txBody>
       </p:sp>
@@ -2953,8 +3061,8 @@
         </p:nvSpPr>
         <p:spPr>
           <a:xfrm>
-            <a:off x="4892040" y="1947672"/>
-            <a:ext cx="4206240" cy="969264"/>
+            <a:off x="2697480" y="2532888"/>
+            <a:ext cx="2286000" cy="640080"/>
           </a:xfrm>
           <a:prstGeom prst="rect">
             <a:avLst/>
@@ -2967,21 +3075,18 @@
           <a:lstStyle/>
           <a:p>
             <a:pPr indent="0" marL="0">
-              <a:lnSpc>
-                <a:spcPts val="1600"/>
-              </a:lnSpc>
               <a:buNone/>
             </a:pPr>
             <a:r>
               <a:rPr lang="en-US" sz="1250" dirty="0">
                 <a:solidFill>
-                  <a:srgbClr val="ECEAF6"/>
+                  <a:srgbClr val="AAB4C8"/>
                 </a:solidFill>
                 <a:latin typeface="Arial" pitchFamily="34" charset="0"/>
                 <a:ea typeface="Arial" pitchFamily="34" charset="-122"/>
                 <a:cs typeface="Arial" pitchFamily="34" charset="-120"/>
               </a:rPr>
-              <a:t>Continuously maps sub-tier dependencies and flags single-source / high-risk-country exposure before it stalls production.</a:t>
+              <a:t>expected delay cost</a:t>
             </a:r>
             <a:endParaRPr lang="en-US" sz="1250" dirty="0"/>
           </a:p>
@@ -2989,30 +3094,42 @@
       </p:sp>
       <p:sp>
         <p:nvSpPr>
-          <p:cNvPr id="9" name="Shape 7"/>
-          <p:cNvSpPr/>
-          <p:nvPr/>
-        </p:nvSpPr>
-        <p:spPr>
-          <a:xfrm>
-            <a:off x="9235440" y="1984248"/>
-            <a:ext cx="2240280" cy="786384"/>
-          </a:xfrm>
-          <a:prstGeom prst="roundRect">
-            <a:avLst>
-              <a:gd name="adj" fmla="val 9302"/>
-            </a:avLst>
-          </a:prstGeom>
-          <a:solidFill>
-            <a:srgbClr val="1B2433"/>
-          </a:solidFill>
-          <a:ln w="12700">
-            <a:solidFill>
-              <a:srgbClr val="5BE08C"/>
-            </a:solidFill>
-            <a:prstDash val="solid"/>
-          </a:ln>
-        </p:spPr>
+          <p:cNvPr id="9" name="Text 7"/>
+          <p:cNvSpPr/>
+          <p:nvPr/>
+        </p:nvSpPr>
+        <p:spPr>
+          <a:xfrm>
+            <a:off x="822960" y="3447288"/>
+            <a:ext cx="1828800" cy="640080"/>
+          </a:xfrm>
+          <a:prstGeom prst="rect">
+            <a:avLst/>
+          </a:prstGeom>
+          <a:noFill/>
+          <a:ln/>
+        </p:spPr>
+        <p:txBody>
+          <a:bodyPr wrap="square" rtlCol="0" anchor="ctr"/>
+          <a:lstStyle/>
+          <a:p>
+            <a:pPr indent="0" marL="0">
+              <a:buNone/>
+            </a:pPr>
+            <a:r>
+              <a:rPr lang="en-US" sz="3000" b="1" dirty="0">
+                <a:solidFill>
+                  <a:srgbClr val="ECEAF6"/>
+                </a:solidFill>
+                <a:latin typeface="Trebuchet MS" pitchFamily="34" charset="0"/>
+                <a:ea typeface="Trebuchet MS" pitchFamily="34" charset="-122"/>
+                <a:cs typeface="Trebuchet MS" pitchFamily="34" charset="-120"/>
+              </a:rPr>
+              <a:t>$4.8M</a:t>
+            </a:r>
+            <a:endParaRPr lang="en-US" sz="3000" dirty="0"/>
+          </a:p>
+        </p:txBody>
       </p:sp>
       <p:sp>
         <p:nvSpPr>
@@ -3022,101 +3139,47 @@
         </p:nvSpPr>
         <p:spPr>
           <a:xfrm>
-            <a:off x="9326880" y="2020824"/>
-            <a:ext cx="2057400" cy="731520"/>
-          </a:xfrm>
-          <a:prstGeom prst="rect">
-            <a:avLst/>
-          </a:prstGeom>
-          <a:noFill/>
-          <a:ln/>
-        </p:spPr>
-        <p:txBody>
-          <a:bodyPr wrap="square" rtlCol="0" anchor="ctr"/>
-          <a:lstStyle/>
-          <a:p>
-            <a:pPr algn="ctr" indent="0" marL="0">
-              <a:buNone/>
-            </a:pPr>
-            <a:r>
-              <a:rPr lang="en-US" sz="1100" b="1" dirty="0">
-                <a:solidFill>
-                  <a:srgbClr val="5BE08C"/>
+            <a:off x="2697480" y="3557016"/>
+            <a:ext cx="2286000" cy="640080"/>
+          </a:xfrm>
+          <a:prstGeom prst="rect">
+            <a:avLst/>
+          </a:prstGeom>
+          <a:noFill/>
+          <a:ln/>
+        </p:spPr>
+        <p:txBody>
+          <a:bodyPr wrap="square" rtlCol="0" anchor="ctr"/>
+          <a:lstStyle/>
+          <a:p>
+            <a:pPr indent="0" marL="0">
+              <a:buNone/>
+            </a:pPr>
+            <a:r>
+              <a:rPr lang="en-US" sz="1250" dirty="0">
+                <a:solidFill>
+                  <a:srgbClr val="AAB4C8"/>
                 </a:solidFill>
                 <a:latin typeface="Arial" pitchFamily="34" charset="0"/>
                 <a:ea typeface="Arial" pitchFamily="34" charset="-122"/>
                 <a:cs typeface="Arial" pitchFamily="34" charset="-120"/>
               </a:rPr>
-              <a:t>De-risks the $21M single-source × Tier-2 exposure</a:t>
-            </a:r>
-            <a:endParaRPr lang="en-US" sz="1100" dirty="0"/>
-          </a:p>
-        </p:txBody>
-      </p:sp>
-      <p:sp>
-        <p:nvSpPr>
-          <p:cNvPr id="11" name="Shape 9"/>
-          <p:cNvSpPr/>
-          <p:nvPr/>
-        </p:nvSpPr>
-        <p:spPr>
-          <a:xfrm>
-            <a:off x="548640" y="3081528"/>
-            <a:ext cx="11064240" cy="1152144"/>
-          </a:xfrm>
-          <a:prstGeom prst="roundRect">
-            <a:avLst>
-              <a:gd name="adj" fmla="val 7143"/>
-            </a:avLst>
-          </a:prstGeom>
-          <a:solidFill>
-            <a:srgbClr val="131A26"/>
-          </a:solidFill>
-          <a:ln w="12700">
-            <a:solidFill>
-              <a:srgbClr val="2A3547"/>
-            </a:solidFill>
-            <a:prstDash val="solid"/>
-          </a:ln>
-          <a:effectLst>
-            <a:outerShdw sx="100000" sy="100000" kx="0" ky="0" algn="bl" rotWithShape="0" blurRad="114300" dist="38100" dir="5400000">
-              <a:srgbClr val="000000">
-                <a:alpha val="35000"/>
-              </a:srgbClr>
-            </a:outerShdw>
-          </a:effectLst>
-        </p:spPr>
-      </p:sp>
-      <p:sp>
-        <p:nvSpPr>
-          <p:cNvPr id="12" name="Shape 10"/>
-          <p:cNvSpPr/>
-          <p:nvPr/>
-        </p:nvSpPr>
-        <p:spPr>
-          <a:xfrm>
-            <a:off x="548640" y="3081528"/>
-            <a:ext cx="109728" cy="1152144"/>
-          </a:xfrm>
-          <a:prstGeom prst="rect">
-            <a:avLst/>
-          </a:prstGeom>
-          <a:solidFill>
-            <a:srgbClr val="8B8DFF"/>
-          </a:solidFill>
-          <a:ln/>
-        </p:spPr>
-      </p:sp>
-      <p:sp>
-        <p:nvSpPr>
-          <p:cNvPr id="13" name="Text 11"/>
-          <p:cNvSpPr/>
-          <p:nvPr/>
-        </p:nvSpPr>
-        <p:spPr>
-          <a:xfrm>
-            <a:off x="868680" y="3227832"/>
-            <a:ext cx="3931920" cy="932688"/>
+              <a:t>value in transit</a:t>
+            </a:r>
+            <a:endParaRPr lang="en-US" sz="1250" dirty="0"/>
+          </a:p>
+        </p:txBody>
+      </p:sp>
+      <p:sp>
+        <p:nvSpPr>
+          <p:cNvPr id="11" name="Text 9"/>
+          <p:cNvSpPr/>
+          <p:nvPr/>
+        </p:nvSpPr>
+        <p:spPr>
+          <a:xfrm>
+            <a:off x="822960" y="4471416"/>
+            <a:ext cx="1828800" cy="640080"/>
           </a:xfrm>
           <a:prstGeom prst="rect">
             <a:avLst/>
@@ -3132,30 +3195,30 @@
               <a:buNone/>
             </a:pPr>
             <a:r>
-              <a:rPr lang="en-US" sz="1700" b="1" dirty="0">
-                <a:solidFill>
-                  <a:srgbClr val="C0C1FF"/>
+              <a:rPr lang="en-US" sz="3000" b="1" dirty="0">
+                <a:solidFill>
+                  <a:srgbClr val="FF8A93"/>
                 </a:solidFill>
                 <a:latin typeface="Trebuchet MS" pitchFamily="34" charset="0"/>
                 <a:ea typeface="Trebuchet MS" pitchFamily="34" charset="-122"/>
                 <a:cs typeface="Trebuchet MS" pitchFamily="34" charset="-120"/>
               </a:rPr>
-              <a:t>Predictive Delivery &amp; Expediting</a:t>
-            </a:r>
-            <a:endParaRPr lang="en-US" sz="1700" dirty="0"/>
-          </a:p>
-        </p:txBody>
-      </p:sp>
-      <p:sp>
-        <p:nvSpPr>
-          <p:cNvPr id="14" name="Text 12"/>
-          <p:cNvSpPr/>
-          <p:nvPr/>
-        </p:nvSpPr>
-        <p:spPr>
-          <a:xfrm>
-            <a:off x="4892040" y="3246120"/>
-            <a:ext cx="4206240" cy="969264"/>
+              <a:t>3 / 14</a:t>
+            </a:r>
+            <a:endParaRPr lang="en-US" sz="3000" dirty="0"/>
+          </a:p>
+        </p:txBody>
+      </p:sp>
+      <p:sp>
+        <p:nvSpPr>
+          <p:cNvPr id="12" name="Text 10"/>
+          <p:cNvSpPr/>
+          <p:nvPr/>
+        </p:nvSpPr>
+        <p:spPr>
+          <a:xfrm>
+            <a:off x="2697480" y="4581144"/>
+            <a:ext cx="2286000" cy="640080"/>
           </a:xfrm>
           <a:prstGeom prst="rect">
             <a:avLst/>
@@ -3168,21 +3231,18 @@
           <a:lstStyle/>
           <a:p>
             <a:pPr indent="0" marL="0">
-              <a:lnSpc>
-                <a:spcPts val="1600"/>
-              </a:lnSpc>
               <a:buNone/>
             </a:pPr>
             <a:r>
               <a:rPr lang="en-US" sz="1250" dirty="0">
                 <a:solidFill>
-                  <a:srgbClr val="ECEAF6"/>
+                  <a:srgbClr val="AAB4C8"/>
                 </a:solidFill>
                 <a:latin typeface="Arial" pitchFamily="34" charset="0"/>
                 <a:ea typeface="Arial" pitchFamily="34" charset="-122"/>
                 <a:cs typeface="Arial" pitchFamily="34" charset="-120"/>
               </a:rPr>
-              <a:t>Watches delay signals per shipment; auto-triggers expediting &amp; safety-stock when delay probability spikes.</a:t>
+              <a:t>shipments ≥50% delay risk</a:t>
             </a:r>
             <a:endParaRPr lang="en-US" sz="1250" dirty="0"/>
           </a:p>
@@ -3190,134 +3250,53 @@
       </p:sp>
       <p:sp>
         <p:nvSpPr>
-          <p:cNvPr id="15" name="Shape 13"/>
-          <p:cNvSpPr/>
-          <p:nvPr/>
-        </p:nvSpPr>
-        <p:spPr>
-          <a:xfrm>
-            <a:off x="9235440" y="3282696"/>
-            <a:ext cx="2240280" cy="786384"/>
-          </a:xfrm>
-          <a:prstGeom prst="roundRect">
-            <a:avLst>
-              <a:gd name="adj" fmla="val 9302"/>
-            </a:avLst>
-          </a:prstGeom>
-          <a:solidFill>
-            <a:srgbClr val="1B2433"/>
-          </a:solidFill>
-          <a:ln w="12700">
-            <a:solidFill>
-              <a:srgbClr val="5BE08C"/>
-            </a:solidFill>
-            <a:prstDash val="solid"/>
-          </a:ln>
-        </p:spPr>
-      </p:sp>
-      <p:sp>
-        <p:nvSpPr>
-          <p:cNvPr id="16" name="Text 14"/>
-          <p:cNvSpPr/>
-          <p:nvPr/>
-        </p:nvSpPr>
-        <p:spPr>
-          <a:xfrm>
-            <a:off x="9326880" y="3319272"/>
-            <a:ext cx="2057400" cy="731520"/>
-          </a:xfrm>
-          <a:prstGeom prst="rect">
-            <a:avLst/>
-          </a:prstGeom>
-          <a:noFill/>
-          <a:ln/>
-        </p:spPr>
-        <p:txBody>
-          <a:bodyPr wrap="square" rtlCol="0" anchor="ctr"/>
-          <a:lstStyle/>
-          <a:p>
-            <a:pPr algn="ctr" indent="0" marL="0">
-              <a:buNone/>
-            </a:pPr>
-            <a:r>
-              <a:rPr lang="en-US" sz="1100" b="1" dirty="0">
-                <a:solidFill>
-                  <a:srgbClr val="5BE08C"/>
+          <p:cNvPr id="13" name="Text 11"/>
+          <p:cNvSpPr/>
+          <p:nvPr/>
+        </p:nvSpPr>
+        <p:spPr>
+          <a:xfrm>
+            <a:off x="822960" y="5120640"/>
+            <a:ext cx="4114800" cy="457200"/>
+          </a:xfrm>
+          <a:prstGeom prst="rect">
+            <a:avLst/>
+          </a:prstGeom>
+          <a:noFill/>
+          <a:ln/>
+        </p:spPr>
+        <p:txBody>
+          <a:bodyPr wrap="square" rtlCol="0" anchor="ctr"/>
+          <a:lstStyle/>
+          <a:p>
+            <a:pPr indent="0" marL="0">
+              <a:buNone/>
+            </a:pPr>
+            <a:r>
+              <a:rPr lang="en-US" sz="1150" i="1" dirty="0">
+                <a:solidFill>
+                  <a:srgbClr val="8694A8"/>
                 </a:solidFill>
                 <a:latin typeface="Arial" pitchFamily="34" charset="0"/>
                 <a:ea typeface="Arial" pitchFamily="34" charset="-122"/>
                 <a:cs typeface="Arial" pitchFamily="34" charset="-120"/>
               </a:rPr>
-              <a:t>Cuts the $240K expected delay cost</a:t>
-            </a:r>
-            <a:endParaRPr lang="en-US" sz="1100" dirty="0"/>
-          </a:p>
-        </p:txBody>
-      </p:sp>
-      <p:sp>
-        <p:nvSpPr>
-          <p:cNvPr id="17" name="Shape 15"/>
-          <p:cNvSpPr/>
-          <p:nvPr/>
-        </p:nvSpPr>
-        <p:spPr>
-          <a:xfrm>
-            <a:off x="548640" y="4379976"/>
-            <a:ext cx="11064240" cy="1152144"/>
-          </a:xfrm>
-          <a:prstGeom prst="roundRect">
-            <a:avLst>
-              <a:gd name="adj" fmla="val 7143"/>
-            </a:avLst>
-          </a:prstGeom>
-          <a:solidFill>
-            <a:srgbClr val="131A26"/>
-          </a:solidFill>
-          <a:ln w="12700">
-            <a:solidFill>
-              <a:srgbClr val="2A3547"/>
-            </a:solidFill>
-            <a:prstDash val="solid"/>
-          </a:ln>
-          <a:effectLst>
-            <a:outerShdw sx="100000" sy="100000" kx="0" ky="0" algn="bl" rotWithShape="0" blurRad="114300" dist="38100" dir="5400000">
-              <a:srgbClr val="000000">
-                <a:alpha val="35000"/>
-              </a:srgbClr>
-            </a:outerShdw>
-          </a:effectLst>
-        </p:spPr>
-      </p:sp>
-      <p:sp>
-        <p:nvSpPr>
-          <p:cNvPr id="18" name="Shape 16"/>
-          <p:cNvSpPr/>
-          <p:nvPr/>
-        </p:nvSpPr>
-        <p:spPr>
-          <a:xfrm>
-            <a:off x="548640" y="4379976"/>
-            <a:ext cx="109728" cy="1152144"/>
-          </a:xfrm>
-          <a:prstGeom prst="rect">
-            <a:avLst/>
-          </a:prstGeom>
-          <a:solidFill>
-            <a:srgbClr val="8B8DFF"/>
-          </a:solidFill>
-          <a:ln/>
-        </p:spPr>
-      </p:sp>
-      <p:sp>
-        <p:nvSpPr>
-          <p:cNvPr id="19" name="Text 17"/>
-          <p:cNvSpPr/>
-          <p:nvPr/>
-        </p:nvSpPr>
-        <p:spPr>
-          <a:xfrm>
-            <a:off x="868680" y="4526280"/>
-            <a:ext cx="3931920" cy="932688"/>
+              <a:t>Sea · Air · Road · Rail — each scored on weather, port congestion &amp; lane risk.</a:t>
+            </a:r>
+            <a:endParaRPr lang="en-US" sz="1150" dirty="0"/>
+          </a:p>
+        </p:txBody>
+      </p:sp>
+      <p:sp>
+        <p:nvSpPr>
+          <p:cNvPr id="14" name="Text 12"/>
+          <p:cNvSpPr/>
+          <p:nvPr/>
+        </p:nvSpPr>
+        <p:spPr>
+          <a:xfrm>
+            <a:off x="5577840" y="1783080"/>
+            <a:ext cx="5943600" cy="365760"/>
           </a:xfrm>
           <a:prstGeom prst="rect">
             <a:avLst/>
@@ -3333,7 +3312,7 @@
               <a:buNone/>
             </a:pPr>
             <a:r>
-              <a:rPr lang="en-US" sz="1700" b="1" dirty="0">
+              <a:rPr lang="en-US" sz="1500" b="1" dirty="0">
                 <a:solidFill>
                   <a:srgbClr val="C0C1FF"/>
                 </a:solidFill>
@@ -3341,22 +3320,38 @@
                 <a:ea typeface="Trebuchet MS" pitchFamily="34" charset="-122"/>
                 <a:cs typeface="Trebuchet MS" pitchFamily="34" charset="-120"/>
               </a:rPr>
-              <a:t>Dynamic Dual-Sourcing</a:t>
-            </a:r>
-            <a:endParaRPr lang="en-US" sz="1700" dirty="0"/>
-          </a:p>
-        </p:txBody>
-      </p:sp>
-      <p:sp>
-        <p:nvSpPr>
-          <p:cNvPr id="20" name="Text 18"/>
-          <p:cNvSpPr/>
-          <p:nvPr/>
-        </p:nvSpPr>
-        <p:spPr>
-          <a:xfrm>
-            <a:off x="4892040" y="4544568"/>
-            <a:ext cx="4206240" cy="969264"/>
+              <a:t>Feature importance — what drives late delivery</a:t>
+            </a:r>
+            <a:endParaRPr lang="en-US" sz="1500" dirty="0"/>
+          </a:p>
+        </p:txBody>
+      </p:sp>
+      <p:graphicFrame>
+        <p:nvGraphicFramePr>
+          <p:cNvPr id="15" name="Chart 0" descr=""/>
+          <p:cNvGraphicFramePr/>
+          <p:nvPr/>
+        </p:nvGraphicFramePr>
+        <p:xfrm>
+          <a:off x="5486400" y="2286000"/>
+          <a:ext cx="6126480" cy="3200400"/>
+        </p:xfrm>
+        <a:graphic xmlns:a="http://schemas.openxmlformats.org/drawingml/2006/main">
+          <a:graphicData uri="http://schemas.openxmlformats.org/drawingml/2006/chart">
+            <c:chart xmlns:c="http://schemas.openxmlformats.org/drawingml/2006/chart" r:id="rId1"/>
+          </a:graphicData>
+        </a:graphic>
+      </p:graphicFrame>
+      <p:sp>
+        <p:nvSpPr>
+          <p:cNvPr id="16" name="Text 13"/>
+          <p:cNvSpPr/>
+          <p:nvPr/>
+        </p:nvSpPr>
+        <p:spPr>
+          <a:xfrm>
+            <a:off x="5486400" y="5577840"/>
+            <a:ext cx="6217920" cy="457200"/>
           </a:xfrm>
           <a:prstGeom prst="rect">
             <a:avLst/>
@@ -3369,125 +3364,56 @@
           <a:lstStyle/>
           <a:p>
             <a:pPr indent="0" marL="0">
-              <a:lnSpc>
-                <a:spcPts val="1600"/>
-              </a:lnSpc>
-              <a:buNone/>
-            </a:pPr>
-            <a:r>
-              <a:rPr lang="en-US" sz="1250" dirty="0">
-                <a:solidFill>
-                  <a:srgbClr val="ECEAF6"/>
+              <a:buNone/>
+            </a:pPr>
+            <a:r>
+              <a:rPr lang="en-US" sz="1100" i="1" dirty="0">
+                <a:solidFill>
+                  <a:srgbClr val="8694A8"/>
                 </a:solidFill>
                 <a:latin typeface="Arial" pitchFamily="34" charset="0"/>
                 <a:ea typeface="Arial" pitchFamily="34" charset="-122"/>
                 <a:cs typeface="Arial" pitchFamily="34" charset="-120"/>
               </a:rPr>
-              <a:t>Proposes &amp; qualifies alternate suppliers when concentration or OTD thresholds are breached.</a:t>
-            </a:r>
-            <a:endParaRPr lang="en-US" sz="1250" dirty="0"/>
-          </a:p>
-        </p:txBody>
-      </p:sp>
-      <p:sp>
-        <p:nvSpPr>
-          <p:cNvPr id="21" name="Shape 19"/>
-          <p:cNvSpPr/>
-          <p:nvPr/>
-        </p:nvSpPr>
-        <p:spPr>
-          <a:xfrm>
-            <a:off x="9235440" y="4581144"/>
-            <a:ext cx="2240280" cy="786384"/>
-          </a:xfrm>
-          <a:prstGeom prst="roundRect">
-            <a:avLst>
-              <a:gd name="adj" fmla="val 9302"/>
-            </a:avLst>
-          </a:prstGeom>
-          <a:solidFill>
-            <a:srgbClr val="1B2433"/>
-          </a:solidFill>
-          <a:ln w="12700">
-            <a:solidFill>
-              <a:srgbClr val="5BE08C"/>
-            </a:solidFill>
-            <a:prstDash val="solid"/>
-          </a:ln>
-        </p:spPr>
-      </p:sp>
-      <p:sp>
-        <p:nvSpPr>
-          <p:cNvPr id="22" name="Text 20"/>
-          <p:cNvSpPr/>
-          <p:nvPr/>
-        </p:nvSpPr>
-        <p:spPr>
-          <a:xfrm>
-            <a:off x="9326880" y="4617720"/>
-            <a:ext cx="2057400" cy="731520"/>
-          </a:xfrm>
-          <a:prstGeom prst="rect">
-            <a:avLst/>
-          </a:prstGeom>
-          <a:noFill/>
-          <a:ln/>
-        </p:spPr>
-        <p:txBody>
-          <a:bodyPr wrap="square" rtlCol="0" anchor="ctr"/>
-          <a:lstStyle/>
-          <a:p>
-            <a:pPr algn="ctr" indent="0" marL="0">
-              <a:buNone/>
-            </a:pPr>
-            <a:r>
-              <a:rPr lang="en-US" sz="1100" b="1" dirty="0">
-                <a:solidFill>
-                  <a:srgbClr val="5BE08C"/>
+              <a:t>Trained on a simulated history — holdout AUC ≈ 0.7. The pipeline (features → train → predict → explain) is real.</a:t>
+            </a:r>
+            <a:endParaRPr lang="en-US" sz="1100" dirty="0"/>
+          </a:p>
+        </p:txBody>
+      </p:sp>
+      <p:sp>
+        <p:nvSpPr>
+          <p:cNvPr id="17" name="Text 14"/>
+          <p:cNvSpPr/>
+          <p:nvPr/>
+        </p:nvSpPr>
+        <p:spPr>
+          <a:xfrm>
+            <a:off x="11274552" y="6400800"/>
+            <a:ext cx="548640" cy="274320"/>
+          </a:xfrm>
+          <a:prstGeom prst="rect">
+            <a:avLst/>
+          </a:prstGeom>
+          <a:noFill/>
+          <a:ln/>
+        </p:spPr>
+        <p:txBody>
+          <a:bodyPr wrap="square" rtlCol="0" anchor="ctr"/>
+          <a:lstStyle/>
+          <a:p>
+            <a:pPr algn="r" indent="0" marL="0">
+              <a:buNone/>
+            </a:pPr>
+            <a:r>
+              <a:rPr lang="en-US" sz="900" dirty="0">
+                <a:solidFill>
+                  <a:srgbClr val="8694A8"/>
                 </a:solidFill>
                 <a:latin typeface="Arial" pitchFamily="34" charset="0"/>
                 <a:ea typeface="Arial" pitchFamily="34" charset="-122"/>
                 <a:cs typeface="Arial" pitchFamily="34" charset="-120"/>
               </a:rPr>
-              <a:t>Attacks the $14M line-stoppage losses</a:t>
-            </a:r>
-            <a:endParaRPr lang="en-US" sz="1100" dirty="0"/>
-          </a:p>
-        </p:txBody>
-      </p:sp>
-      <p:sp>
-        <p:nvSpPr>
-          <p:cNvPr id="23" name="Text 21"/>
-          <p:cNvSpPr/>
-          <p:nvPr/>
-        </p:nvSpPr>
-        <p:spPr>
-          <a:xfrm>
-            <a:off x="11274552" y="6400800"/>
-            <a:ext cx="548640" cy="274320"/>
-          </a:xfrm>
-          <a:prstGeom prst="rect">
-            <a:avLst/>
-          </a:prstGeom>
-          <a:noFill/>
-          <a:ln/>
-        </p:spPr>
-        <p:txBody>
-          <a:bodyPr wrap="square" rtlCol="0" anchor="ctr"/>
-          <a:lstStyle/>
-          <a:p>
-            <a:pPr algn="r" indent="0" marL="0">
-              <a:buNone/>
-            </a:pPr>
-            <a:r>
-              <a:rPr lang="en-US" sz="900" dirty="0">
-                <a:solidFill>
-                  <a:srgbClr val="8694A8"/>
-                </a:solidFill>
-                <a:latin typeface="Arial" pitchFamily="34" charset="0"/>
-                <a:ea typeface="Arial" pitchFamily="34" charset="-122"/>
-                <a:cs typeface="Arial" pitchFamily="34" charset="-120"/>
-              </a:rPr>
               <a:t>09</a:t>
             </a:r>
             <a:endParaRPr lang="en-US" sz="900" dirty="0"/>
@@ -3496,7 +3422,7 @@
       </p:sp>
       <p:sp>
         <p:nvSpPr>
-          <p:cNvPr id="24" name="Text 22"/>
+          <p:cNvPr id="18" name="Text 15"/>
           <p:cNvSpPr/>
           <p:nvPr/>
         </p:nvSpPr>
@@ -3573,8 +3499,8 @@
         </p:nvSpPr>
         <p:spPr>
           <a:xfrm>
-            <a:off x="0" y="0"/>
-            <a:ext cx="201168" cy="6858000"/>
+            <a:off x="548640" y="502920"/>
+            <a:ext cx="128016" cy="457200"/>
           </a:xfrm>
           <a:prstGeom prst="rect">
             <a:avLst/>
@@ -3593,24 +3519,24 @@
         </p:nvSpPr>
         <p:spPr>
           <a:xfrm>
-            <a:off x="731520" y="1280160"/>
-            <a:ext cx="7315200" cy="457200"/>
-          </a:xfrm>
-          <a:prstGeom prst="rect">
-            <a:avLst/>
-          </a:prstGeom>
-          <a:noFill/>
-          <a:ln/>
-        </p:spPr>
-        <p:txBody>
-          <a:bodyPr wrap="square" rtlCol="0" anchor="ctr"/>
+            <a:off x="804672" y="457200"/>
+            <a:ext cx="10058400" cy="274320"/>
+          </a:xfrm>
+          <a:prstGeom prst="rect">
+            <a:avLst/>
+          </a:prstGeom>
+          <a:noFill/>
+          <a:ln/>
+        </p:spPr>
+        <p:txBody>
+          <a:bodyPr wrap="square" lIns="0" tIns="0" rIns="0" bIns="0" rtlCol="0" anchor="ctr"/>
           <a:lstStyle/>
           <a:p>
             <a:pPr indent="0" marL="0">
               <a:buNone/>
             </a:pPr>
             <a:r>
-              <a:rPr lang="en-US" sz="1600" b="1" spc="400" kern="0" dirty="0">
+              <a:rPr lang="en-US" sz="1100" b="1" spc="300" kern="0" dirty="0">
                 <a:solidFill>
                   <a:srgbClr val="8B8DFF"/>
                 </a:solidFill>
@@ -3618,9 +3544,9 @@
                 <a:ea typeface="Arial" pitchFamily="34" charset="-122"/>
                 <a:cs typeface="Arial" pitchFamily="34" charset="-120"/>
               </a:rPr>
-              <a:t>LIVE DEMO</a:t>
-            </a:r>
-            <a:endParaRPr lang="en-US" sz="1600" dirty="0"/>
+              <a:t>THE DELIVERABLE</a:t>
+            </a:r>
+            <a:endParaRPr lang="en-US" sz="1100" dirty="0"/>
           </a:p>
         </p:txBody>
       </p:sp>
@@ -3632,24 +3558,24 @@
         </p:nvSpPr>
         <p:spPr>
           <a:xfrm>
-            <a:off x="685800" y="1737360"/>
-            <a:ext cx="9144000" cy="914400"/>
-          </a:xfrm>
-          <a:prstGeom prst="rect">
-            <a:avLst/>
-          </a:prstGeom>
-          <a:noFill/>
-          <a:ln/>
-        </p:spPr>
-        <p:txBody>
-          <a:bodyPr wrap="square" rtlCol="0" anchor="ctr"/>
+            <a:off x="786384" y="713232"/>
+            <a:ext cx="10972800" cy="640080"/>
+          </a:xfrm>
+          <a:prstGeom prst="rect">
+            <a:avLst/>
+          </a:prstGeom>
+          <a:noFill/>
+          <a:ln/>
+        </p:spPr>
+        <p:txBody>
+          <a:bodyPr wrap="square" lIns="0" tIns="0" rIns="0" bIns="0" rtlCol="0" anchor="ctr"/>
           <a:lstStyle/>
           <a:p>
             <a:pPr indent="0" marL="0">
               <a:buNone/>
             </a:pPr>
             <a:r>
-              <a:rPr lang="en-US" sz="4600" b="1" dirty="0">
+              <a:rPr lang="en-US" sz="3000" b="1" dirty="0">
                 <a:solidFill>
                   <a:srgbClr val="ECEAF6"/>
                 </a:solidFill>
@@ -3657,9 +3583,9 @@
                 <a:ea typeface="Trebuchet MS" pitchFamily="34" charset="-122"/>
                 <a:cs typeface="Trebuchet MS" pitchFamily="34" charset="-120"/>
               </a:rPr>
-              <a:t>See it run</a:t>
-            </a:r>
-            <a:endParaRPr lang="en-US" sz="4600" dirty="0"/>
+              <a:t>Three Agentic AI opportunities — mapped to cost</a:t>
+            </a:r>
+            <a:endParaRPr lang="en-US" sz="3000" dirty="0"/>
           </a:p>
         </p:txBody>
       </p:sp>
@@ -3671,16 +3597,16 @@
         </p:nvSpPr>
         <p:spPr>
           <a:xfrm>
-            <a:off x="731520" y="2880360"/>
-            <a:ext cx="6035040" cy="914400"/>
+            <a:off x="548640" y="1783080"/>
+            <a:ext cx="11064240" cy="1152144"/>
           </a:xfrm>
           <a:prstGeom prst="roundRect">
             <a:avLst>
-              <a:gd name="adj" fmla="val 9000"/>
+              <a:gd name="adj" fmla="val 7143"/>
             </a:avLst>
           </a:prstGeom>
           <a:solidFill>
-            <a:srgbClr val="1B2433"/>
+            <a:srgbClr val="131A26"/>
           </a:solidFill>
           <a:ln w="12700">
             <a:solidFill>
@@ -3699,14 +3625,34 @@
       </p:sp>
       <p:sp>
         <p:nvSpPr>
-          <p:cNvPr id="6" name="Text 4"/>
-          <p:cNvSpPr/>
-          <p:nvPr/>
-        </p:nvSpPr>
-        <p:spPr>
-          <a:xfrm>
-            <a:off x="1005840" y="2971800"/>
-            <a:ext cx="5669280" cy="731520"/>
+          <p:cNvPr id="6" name="Shape 4"/>
+          <p:cNvSpPr/>
+          <p:nvPr/>
+        </p:nvSpPr>
+        <p:spPr>
+          <a:xfrm>
+            <a:off x="548640" y="1783080"/>
+            <a:ext cx="109728" cy="1152144"/>
+          </a:xfrm>
+          <a:prstGeom prst="rect">
+            <a:avLst/>
+          </a:prstGeom>
+          <a:solidFill>
+            <a:srgbClr val="8B8DFF"/>
+          </a:solidFill>
+          <a:ln/>
+        </p:spPr>
+      </p:sp>
+      <p:sp>
+        <p:nvSpPr>
+          <p:cNvPr id="7" name="Text 5"/>
+          <p:cNvSpPr/>
+          <p:nvPr/>
+        </p:nvSpPr>
+        <p:spPr>
+          <a:xfrm>
+            <a:off x="868680" y="1929384"/>
+            <a:ext cx="3931920" cy="932688"/>
           </a:xfrm>
           <a:prstGeom prst="rect">
             <a:avLst/>
@@ -3725,29 +3671,213 @@
               <a:rPr lang="en-US" sz="1700" b="1" dirty="0">
                 <a:solidFill>
                   <a:srgbClr val="C0C1FF"/>
+                </a:solidFill>
+                <a:latin typeface="Trebuchet MS" pitchFamily="34" charset="0"/>
+                <a:ea typeface="Trebuchet MS" pitchFamily="34" charset="-122"/>
+                <a:cs typeface="Trebuchet MS" pitchFamily="34" charset="-120"/>
+              </a:rPr>
+              <a:t>Tier-2 Risk Sentinel</a:t>
+            </a:r>
+            <a:endParaRPr lang="en-US" sz="1700" dirty="0"/>
+          </a:p>
+        </p:txBody>
+      </p:sp>
+      <p:sp>
+        <p:nvSpPr>
+          <p:cNvPr id="8" name="Text 6"/>
+          <p:cNvSpPr/>
+          <p:nvPr/>
+        </p:nvSpPr>
+        <p:spPr>
+          <a:xfrm>
+            <a:off x="4892040" y="1947672"/>
+            <a:ext cx="4206240" cy="969264"/>
+          </a:xfrm>
+          <a:prstGeom prst="rect">
+            <a:avLst/>
+          </a:prstGeom>
+          <a:noFill/>
+          <a:ln/>
+        </p:spPr>
+        <p:txBody>
+          <a:bodyPr wrap="square" rtlCol="0" anchor="ctr"/>
+          <a:lstStyle/>
+          <a:p>
+            <a:pPr indent="0" marL="0">
+              <a:lnSpc>
+                <a:spcPts val="1600"/>
+              </a:lnSpc>
+              <a:buNone/>
+            </a:pPr>
+            <a:r>
+              <a:rPr lang="en-US" sz="1250" dirty="0">
+                <a:solidFill>
+                  <a:srgbClr val="ECEAF6"/>
                 </a:solidFill>
                 <a:latin typeface="Arial" pitchFamily="34" charset="0"/>
                 <a:ea typeface="Arial" pitchFamily="34" charset="-122"/>
                 <a:cs typeface="Arial" pitchFamily="34" charset="-120"/>
               </a:rPr>
-              <a:t>agenticai.srv1487908.hstgr.cloud</a:t>
-            </a:r>
-            <a:endParaRPr lang="en-US" sz="1700" dirty="0"/>
-          </a:p>
-          <a:p>
-            <a:pPr indent="0" marL="0">
-              <a:buNone/>
-            </a:pPr>
-            <a:r>
-              <a:rPr lang="en-US" sz="1300" dirty="0">
-                <a:solidFill>
-                  <a:srgbClr val="AAB4C8"/>
+              <a:t>Continuously maps sub-tier dependencies and flags single-source / high-risk-country exposure before it stalls production.</a:t>
+            </a:r>
+            <a:endParaRPr lang="en-US" sz="1250" dirty="0"/>
+          </a:p>
+        </p:txBody>
+      </p:sp>
+      <p:sp>
+        <p:nvSpPr>
+          <p:cNvPr id="9" name="Shape 7"/>
+          <p:cNvSpPr/>
+          <p:nvPr/>
+        </p:nvSpPr>
+        <p:spPr>
+          <a:xfrm>
+            <a:off x="9235440" y="1984248"/>
+            <a:ext cx="2240280" cy="786384"/>
+          </a:xfrm>
+          <a:prstGeom prst="roundRect">
+            <a:avLst>
+              <a:gd name="adj" fmla="val 9302"/>
+            </a:avLst>
+          </a:prstGeom>
+          <a:solidFill>
+            <a:srgbClr val="1B2433"/>
+          </a:solidFill>
+          <a:ln w="12700">
+            <a:solidFill>
+              <a:srgbClr val="5BE08C"/>
+            </a:solidFill>
+            <a:prstDash val="solid"/>
+          </a:ln>
+        </p:spPr>
+      </p:sp>
+      <p:sp>
+        <p:nvSpPr>
+          <p:cNvPr id="10" name="Text 8"/>
+          <p:cNvSpPr/>
+          <p:nvPr/>
+        </p:nvSpPr>
+        <p:spPr>
+          <a:xfrm>
+            <a:off x="9326880" y="2020824"/>
+            <a:ext cx="2057400" cy="731520"/>
+          </a:xfrm>
+          <a:prstGeom prst="rect">
+            <a:avLst/>
+          </a:prstGeom>
+          <a:noFill/>
+          <a:ln/>
+        </p:spPr>
+        <p:txBody>
+          <a:bodyPr wrap="square" rtlCol="0" anchor="ctr"/>
+          <a:lstStyle/>
+          <a:p>
+            <a:pPr algn="ctr" indent="0" marL="0">
+              <a:buNone/>
+            </a:pPr>
+            <a:r>
+              <a:rPr lang="en-US" sz="1100" b="1" dirty="0">
+                <a:solidFill>
+                  <a:srgbClr val="5BE08C"/>
                 </a:solidFill>
                 <a:latin typeface="Arial" pitchFamily="34" charset="0"/>
                 <a:ea typeface="Arial" pitchFamily="34" charset="-122"/>
                 <a:cs typeface="Arial" pitchFamily="34" charset="-120"/>
               </a:rPr>
-              <a:t>password: agenticai</a:t>
+              <a:t>De-risks the $21M single-source × Tier-2 exposure</a:t>
+            </a:r>
+            <a:endParaRPr lang="en-US" sz="1100" dirty="0"/>
+          </a:p>
+        </p:txBody>
+      </p:sp>
+      <p:sp>
+        <p:nvSpPr>
+          <p:cNvPr id="11" name="Shape 9"/>
+          <p:cNvSpPr/>
+          <p:nvPr/>
+        </p:nvSpPr>
+        <p:spPr>
+          <a:xfrm>
+            <a:off x="548640" y="3081528"/>
+            <a:ext cx="11064240" cy="1152144"/>
+          </a:xfrm>
+          <a:prstGeom prst="roundRect">
+            <a:avLst>
+              <a:gd name="adj" fmla="val 7143"/>
+            </a:avLst>
+          </a:prstGeom>
+          <a:solidFill>
+            <a:srgbClr val="131A26"/>
+          </a:solidFill>
+          <a:ln w="12700">
+            <a:solidFill>
+              <a:srgbClr val="2A3547"/>
+            </a:solidFill>
+            <a:prstDash val="solid"/>
+          </a:ln>
+          <a:effectLst>
+            <a:outerShdw sx="100000" sy="100000" kx="0" ky="0" algn="bl" rotWithShape="0" blurRad="114300" dist="38100" dir="5400000">
+              <a:srgbClr val="000000">
+                <a:alpha val="35000"/>
+              </a:srgbClr>
+            </a:outerShdw>
+          </a:effectLst>
+        </p:spPr>
+      </p:sp>
+      <p:sp>
+        <p:nvSpPr>
+          <p:cNvPr id="12" name="Shape 10"/>
+          <p:cNvSpPr/>
+          <p:nvPr/>
+        </p:nvSpPr>
+        <p:spPr>
+          <a:xfrm>
+            <a:off x="548640" y="3081528"/>
+            <a:ext cx="109728" cy="1152144"/>
+          </a:xfrm>
+          <a:prstGeom prst="rect">
+            <a:avLst/>
+          </a:prstGeom>
+          <a:solidFill>
+            <a:srgbClr val="8B8DFF"/>
+          </a:solidFill>
+          <a:ln/>
+        </p:spPr>
+      </p:sp>
+      <p:sp>
+        <p:nvSpPr>
+          <p:cNvPr id="13" name="Text 11"/>
+          <p:cNvSpPr/>
+          <p:nvPr/>
+        </p:nvSpPr>
+        <p:spPr>
+          <a:xfrm>
+            <a:off x="868680" y="3227832"/>
+            <a:ext cx="3931920" cy="932688"/>
+          </a:xfrm>
+          <a:prstGeom prst="rect">
+            <a:avLst/>
+          </a:prstGeom>
+          <a:noFill/>
+          <a:ln/>
+        </p:spPr>
+        <p:txBody>
+          <a:bodyPr wrap="square" rtlCol="0" anchor="ctr"/>
+          <a:lstStyle/>
+          <a:p>
+            <a:pPr indent="0" marL="0">
+              <a:buNone/>
+            </a:pPr>
+            <a:r>
+              <a:rPr lang="en-US" sz="1700" b="1" dirty="0">
+                <a:solidFill>
+                  <a:srgbClr val="C0C1FF"/>
+                </a:solidFill>
+                <a:latin typeface="Trebuchet MS" pitchFamily="34" charset="0"/>
+                <a:ea typeface="Trebuchet MS" pitchFamily="34" charset="-122"/>
+                <a:cs typeface="Trebuchet MS" pitchFamily="34" charset="-120"/>
+              </a:rPr>
+              <a:t>Predictive Delivery &amp; Expediting</a:t>
             </a:r>
             <a:endParaRPr lang="en-US" sz="1700" dirty="0"/>
           </a:p>
@@ -3755,14 +3885,14 @@
       </p:sp>
       <p:sp>
         <p:nvSpPr>
-          <p:cNvPr id="7" name="Text 5"/>
-          <p:cNvSpPr/>
-          <p:nvPr/>
-        </p:nvSpPr>
-        <p:spPr>
-          <a:xfrm>
-            <a:off x="731520" y="4114800"/>
-            <a:ext cx="10515600" cy="2011680"/>
+          <p:cNvPr id="14" name="Text 12"/>
+          <p:cNvSpPr/>
+          <p:nvPr/>
+        </p:nvSpPr>
+        <p:spPr>
+          <a:xfrm>
+            <a:off x="4892040" y="3246120"/>
+            <a:ext cx="4206240" cy="969264"/>
           </a:xfrm>
           <a:prstGeom prst="rect">
             <a:avLst/>
@@ -3776,15 +3906,12 @@
           <a:p>
             <a:pPr indent="0" marL="0">
               <a:lnSpc>
-                <a:spcPts val="2200"/>
+                <a:spcPts val="1600"/>
               </a:lnSpc>
-              <a:spcAft>
-                <a:spcPts val="1200"/>
-              </a:spcAft>
-              <a:buNone/>
-            </a:pPr>
-            <a:r>
-              <a:rPr lang="en-US" sz="1600" dirty="0">
+              <a:buNone/>
+            </a:pPr>
+            <a:r>
+              <a:rPr lang="en-US" sz="1250" dirty="0">
                 <a:solidFill>
                   <a:srgbClr val="ECEAF6"/>
                 </a:solidFill>
@@ -3792,45 +3919,200 @@
                 <a:ea typeface="Arial" pitchFamily="34" charset="-122"/>
                 <a:cs typeface="Arial" pitchFamily="34" charset="-120"/>
               </a:rPr>
-              <a:t>1.   Generate a synthetic dataset (or connect SAP)</a:t>
-            </a:r>
-            <a:endParaRPr lang="en-US" sz="1600" dirty="0"/>
-          </a:p>
-          <a:p>
-            <a:pPr indent="0" marL="0">
-              <a:lnSpc>
-                <a:spcPts val="2200"/>
-              </a:lnSpc>
-              <a:spcAft>
-                <a:spcPts val="1200"/>
-              </a:spcAft>
-              <a:buNone/>
-            </a:pPr>
-            <a:r>
-              <a:rPr lang="en-US" sz="1600" dirty="0">
-                <a:solidFill>
-                  <a:srgbClr val="ECEAF6"/>
+              <a:t>Watches delay signals per shipment; auto-triggers expediting &amp; safety-stock when delay probability spikes.</a:t>
+            </a:r>
+            <a:endParaRPr lang="en-US" sz="1250" dirty="0"/>
+          </a:p>
+        </p:txBody>
+      </p:sp>
+      <p:sp>
+        <p:nvSpPr>
+          <p:cNvPr id="15" name="Shape 13"/>
+          <p:cNvSpPr/>
+          <p:nvPr/>
+        </p:nvSpPr>
+        <p:spPr>
+          <a:xfrm>
+            <a:off x="9235440" y="3282696"/>
+            <a:ext cx="2240280" cy="786384"/>
+          </a:xfrm>
+          <a:prstGeom prst="roundRect">
+            <a:avLst>
+              <a:gd name="adj" fmla="val 9302"/>
+            </a:avLst>
+          </a:prstGeom>
+          <a:solidFill>
+            <a:srgbClr val="1B2433"/>
+          </a:solidFill>
+          <a:ln w="12700">
+            <a:solidFill>
+              <a:srgbClr val="5BE08C"/>
+            </a:solidFill>
+            <a:prstDash val="solid"/>
+          </a:ln>
+        </p:spPr>
+      </p:sp>
+      <p:sp>
+        <p:nvSpPr>
+          <p:cNvPr id="16" name="Text 14"/>
+          <p:cNvSpPr/>
+          <p:nvPr/>
+        </p:nvSpPr>
+        <p:spPr>
+          <a:xfrm>
+            <a:off x="9326880" y="3319272"/>
+            <a:ext cx="2057400" cy="731520"/>
+          </a:xfrm>
+          <a:prstGeom prst="rect">
+            <a:avLst/>
+          </a:prstGeom>
+          <a:noFill/>
+          <a:ln/>
+        </p:spPr>
+        <p:txBody>
+          <a:bodyPr wrap="square" rtlCol="0" anchor="ctr"/>
+          <a:lstStyle/>
+          <a:p>
+            <a:pPr algn="ctr" indent="0" marL="0">
+              <a:buNone/>
+            </a:pPr>
+            <a:r>
+              <a:rPr lang="en-US" sz="1100" b="1" dirty="0">
+                <a:solidFill>
+                  <a:srgbClr val="5BE08C"/>
                 </a:solidFill>
                 <a:latin typeface="Arial" pitchFamily="34" charset="0"/>
                 <a:ea typeface="Arial" pitchFamily="34" charset="-122"/>
                 <a:cs typeface="Arial" pitchFamily="34" charset="-120"/>
               </a:rPr>
-              <a:t>2.   Watch KPIs, the data table, logistics risk &amp; the ML card populate</a:t>
-            </a:r>
-            <a:endParaRPr lang="en-US" sz="1600" dirty="0"/>
-          </a:p>
+              <a:t>Cuts the $240K expected delay cost</a:t>
+            </a:r>
+            <a:endParaRPr lang="en-US" sz="1100" dirty="0"/>
+          </a:p>
+        </p:txBody>
+      </p:sp>
+      <p:sp>
+        <p:nvSpPr>
+          <p:cNvPr id="17" name="Shape 15"/>
+          <p:cNvSpPr/>
+          <p:nvPr/>
+        </p:nvSpPr>
+        <p:spPr>
+          <a:xfrm>
+            <a:off x="548640" y="4379976"/>
+            <a:ext cx="11064240" cy="1152144"/>
+          </a:xfrm>
+          <a:prstGeom prst="roundRect">
+            <a:avLst>
+              <a:gd name="adj" fmla="val 7143"/>
+            </a:avLst>
+          </a:prstGeom>
+          <a:solidFill>
+            <a:srgbClr val="131A26"/>
+          </a:solidFill>
+          <a:ln w="12700">
+            <a:solidFill>
+              <a:srgbClr val="2A3547"/>
+            </a:solidFill>
+            <a:prstDash val="solid"/>
+          </a:ln>
+          <a:effectLst>
+            <a:outerShdw sx="100000" sy="100000" kx="0" ky="0" algn="bl" rotWithShape="0" blurRad="114300" dist="38100" dir="5400000">
+              <a:srgbClr val="000000">
+                <a:alpha val="35000"/>
+              </a:srgbClr>
+            </a:outerShdw>
+          </a:effectLst>
+        </p:spPr>
+      </p:sp>
+      <p:sp>
+        <p:nvSpPr>
+          <p:cNvPr id="18" name="Shape 16"/>
+          <p:cNvSpPr/>
+          <p:nvPr/>
+        </p:nvSpPr>
+        <p:spPr>
+          <a:xfrm>
+            <a:off x="548640" y="4379976"/>
+            <a:ext cx="109728" cy="1152144"/>
+          </a:xfrm>
+          <a:prstGeom prst="rect">
+            <a:avLst/>
+          </a:prstGeom>
+          <a:solidFill>
+            <a:srgbClr val="8B8DFF"/>
+          </a:solidFill>
+          <a:ln/>
+        </p:spPr>
+      </p:sp>
+      <p:sp>
+        <p:nvSpPr>
+          <p:cNvPr id="19" name="Text 17"/>
+          <p:cNvSpPr/>
+          <p:nvPr/>
+        </p:nvSpPr>
+        <p:spPr>
+          <a:xfrm>
+            <a:off x="868680" y="4526280"/>
+            <a:ext cx="3931920" cy="932688"/>
+          </a:xfrm>
+          <a:prstGeom prst="rect">
+            <a:avLst/>
+          </a:prstGeom>
+          <a:noFill/>
+          <a:ln/>
+        </p:spPr>
+        <p:txBody>
+          <a:bodyPr wrap="square" rtlCol="0" anchor="ctr"/>
+          <a:lstStyle/>
+          <a:p>
+            <a:pPr indent="0" marL="0">
+              <a:buNone/>
+            </a:pPr>
+            <a:r>
+              <a:rPr lang="en-US" sz="1700" b="1" dirty="0">
+                <a:solidFill>
+                  <a:srgbClr val="C0C1FF"/>
+                </a:solidFill>
+                <a:latin typeface="Trebuchet MS" pitchFamily="34" charset="0"/>
+                <a:ea typeface="Trebuchet MS" pitchFamily="34" charset="-122"/>
+                <a:cs typeface="Trebuchet MS" pitchFamily="34" charset="-120"/>
+              </a:rPr>
+              <a:t>Dynamic Dual-Sourcing</a:t>
+            </a:r>
+            <a:endParaRPr lang="en-US" sz="1700" dirty="0"/>
+          </a:p>
+        </p:txBody>
+      </p:sp>
+      <p:sp>
+        <p:nvSpPr>
+          <p:cNvPr id="20" name="Text 18"/>
+          <p:cNvSpPr/>
+          <p:nvPr/>
+        </p:nvSpPr>
+        <p:spPr>
+          <a:xfrm>
+            <a:off x="4892040" y="4544568"/>
+            <a:ext cx="4206240" cy="969264"/>
+          </a:xfrm>
+          <a:prstGeom prst="rect">
+            <a:avLst/>
+          </a:prstGeom>
+          <a:noFill/>
+          <a:ln/>
+        </p:spPr>
+        <p:txBody>
+          <a:bodyPr wrap="square" rtlCol="0" anchor="ctr"/>
+          <a:lstStyle/>
           <a:p>
             <a:pPr indent="0" marL="0">
               <a:lnSpc>
-                <a:spcPts val="2200"/>
+                <a:spcPts val="1600"/>
               </a:lnSpc>
-              <a:spcAft>
-                <a:spcPts val="1200"/>
-              </a:spcAft>
-              <a:buNone/>
-            </a:pPr>
-            <a:r>
-              <a:rPr lang="en-US" sz="1600" dirty="0">
+              <a:buNone/>
+            </a:pPr>
+            <a:r>
+              <a:rPr lang="en-US" sz="1250" dirty="0">
                 <a:solidFill>
                   <a:srgbClr val="ECEAF6"/>
                 </a:solidFill>
@@ -3838,32 +4120,153 @@
                 <a:ea typeface="Arial" pitchFamily="34" charset="-122"/>
                 <a:cs typeface="Arial" pitchFamily="34" charset="-120"/>
               </a:rPr>
-              <a:t>3.   Run the risk analysis → a costed, board-ready briefing</a:t>
-            </a:r>
-            <a:endParaRPr lang="en-US" sz="1600" dirty="0"/>
-          </a:p>
-          <a:p>
-            <a:pPr indent="0" marL="0">
-              <a:lnSpc>
-                <a:spcPts val="2200"/>
-              </a:lnSpc>
-              <a:spcAft>
-                <a:spcPts val="1200"/>
-              </a:spcAft>
-              <a:buNone/>
-            </a:pPr>
-            <a:r>
-              <a:rPr lang="en-US" sz="1600" dirty="0">
-                <a:solidFill>
-                  <a:srgbClr val="ECEAF6"/>
+              <a:t>Proposes &amp; qualifies alternate suppliers when concentration or OTD thresholds are breached.</a:t>
+            </a:r>
+            <a:endParaRPr lang="en-US" sz="1250" dirty="0"/>
+          </a:p>
+        </p:txBody>
+      </p:sp>
+      <p:sp>
+        <p:nvSpPr>
+          <p:cNvPr id="21" name="Shape 19"/>
+          <p:cNvSpPr/>
+          <p:nvPr/>
+        </p:nvSpPr>
+        <p:spPr>
+          <a:xfrm>
+            <a:off x="9235440" y="4581144"/>
+            <a:ext cx="2240280" cy="786384"/>
+          </a:xfrm>
+          <a:prstGeom prst="roundRect">
+            <a:avLst>
+              <a:gd name="adj" fmla="val 9302"/>
+            </a:avLst>
+          </a:prstGeom>
+          <a:solidFill>
+            <a:srgbClr val="1B2433"/>
+          </a:solidFill>
+          <a:ln w="12700">
+            <a:solidFill>
+              <a:srgbClr val="5BE08C"/>
+            </a:solidFill>
+            <a:prstDash val="solid"/>
+          </a:ln>
+        </p:spPr>
+      </p:sp>
+      <p:sp>
+        <p:nvSpPr>
+          <p:cNvPr id="22" name="Text 20"/>
+          <p:cNvSpPr/>
+          <p:nvPr/>
+        </p:nvSpPr>
+        <p:spPr>
+          <a:xfrm>
+            <a:off x="9326880" y="4617720"/>
+            <a:ext cx="2057400" cy="731520"/>
+          </a:xfrm>
+          <a:prstGeom prst="rect">
+            <a:avLst/>
+          </a:prstGeom>
+          <a:noFill/>
+          <a:ln/>
+        </p:spPr>
+        <p:txBody>
+          <a:bodyPr wrap="square" rtlCol="0" anchor="ctr"/>
+          <a:lstStyle/>
+          <a:p>
+            <a:pPr algn="ctr" indent="0" marL="0">
+              <a:buNone/>
+            </a:pPr>
+            <a:r>
+              <a:rPr lang="en-US" sz="1100" b="1" dirty="0">
+                <a:solidFill>
+                  <a:srgbClr val="5BE08C"/>
                 </a:solidFill>
                 <a:latin typeface="Arial" pitchFamily="34" charset="0"/>
                 <a:ea typeface="Arial" pitchFamily="34" charset="-122"/>
                 <a:cs typeface="Arial" pitchFamily="34" charset="-120"/>
               </a:rPr>
-              <a:t>4.   Ask the chat: “which shipment has the highest delay cost?”</a:t>
-            </a:r>
-            <a:endParaRPr lang="en-US" sz="1600" dirty="0"/>
+              <a:t>Attacks the $14M line-stoppage losses</a:t>
+            </a:r>
+            <a:endParaRPr lang="en-US" sz="1100" dirty="0"/>
+          </a:p>
+        </p:txBody>
+      </p:sp>
+      <p:sp>
+        <p:nvSpPr>
+          <p:cNvPr id="23" name="Text 21"/>
+          <p:cNvSpPr/>
+          <p:nvPr/>
+        </p:nvSpPr>
+        <p:spPr>
+          <a:xfrm>
+            <a:off x="11274552" y="6400800"/>
+            <a:ext cx="548640" cy="274320"/>
+          </a:xfrm>
+          <a:prstGeom prst="rect">
+            <a:avLst/>
+          </a:prstGeom>
+          <a:noFill/>
+          <a:ln/>
+        </p:spPr>
+        <p:txBody>
+          <a:bodyPr wrap="square" rtlCol="0" anchor="ctr"/>
+          <a:lstStyle/>
+          <a:p>
+            <a:pPr algn="r" indent="0" marL="0">
+              <a:buNone/>
+            </a:pPr>
+            <a:r>
+              <a:rPr lang="en-US" sz="900" dirty="0">
+                <a:solidFill>
+                  <a:srgbClr val="8694A8"/>
+                </a:solidFill>
+                <a:latin typeface="Arial" pitchFamily="34" charset="0"/>
+                <a:ea typeface="Arial" pitchFamily="34" charset="-122"/>
+                <a:cs typeface="Arial" pitchFamily="34" charset="-120"/>
+              </a:rPr>
+              <a:t>10</a:t>
+            </a:r>
+            <a:endParaRPr lang="en-US" sz="900" dirty="0"/>
+          </a:p>
+        </p:txBody>
+      </p:sp>
+      <p:sp>
+        <p:nvSpPr>
+          <p:cNvPr id="24" name="Text 22"/>
+          <p:cNvSpPr/>
+          <p:nvPr/>
+        </p:nvSpPr>
+        <p:spPr>
+          <a:xfrm>
+            <a:off x="548640" y="6400800"/>
+            <a:ext cx="6400800" cy="274320"/>
+          </a:xfrm>
+          <a:prstGeom prst="rect">
+            <a:avLst/>
+          </a:prstGeom>
+          <a:noFill/>
+          <a:ln/>
+        </p:spPr>
+        <p:txBody>
+          <a:bodyPr wrap="square" rtlCol="0" anchor="ctr"/>
+          <a:lstStyle/>
+          <a:p>
+            <a:pPr indent="0" marL="0">
+              <a:buNone/>
+            </a:pPr>
+            <a:r>
+              <a:rPr lang="en-US" sz="900" dirty="0">
+                <a:solidFill>
+                  <a:srgbClr val="8694A8"/>
+                </a:solidFill>
+                <a:latin typeface="Arial" pitchFamily="34" charset="0"/>
+                <a:ea typeface="Arial" pitchFamily="34" charset="-122"/>
+                <a:cs typeface="Arial" pitchFamily="34" charset="-120"/>
+              </a:rPr>
+              <a:t>Supply Chain Risk Console · Agentic AI</a:t>
+            </a:r>
+            <a:endParaRPr lang="en-US" sz="900" dirty="0"/>
           </a:p>
         </p:txBody>
       </p:sp>
@@ -3907,8 +4310,8 @@
         </p:nvSpPr>
         <p:spPr>
           <a:xfrm>
-            <a:off x="548640" y="502920"/>
-            <a:ext cx="128016" cy="457200"/>
+            <a:off x="0" y="0"/>
+            <a:ext cx="201168" cy="6858000"/>
           </a:xfrm>
           <a:prstGeom prst="rect">
             <a:avLst/>
@@ -3927,24 +4330,24 @@
         </p:nvSpPr>
         <p:spPr>
           <a:xfrm>
-            <a:off x="804672" y="457200"/>
-            <a:ext cx="10058400" cy="274320"/>
-          </a:xfrm>
-          <a:prstGeom prst="rect">
-            <a:avLst/>
-          </a:prstGeom>
-          <a:noFill/>
-          <a:ln/>
-        </p:spPr>
-        <p:txBody>
-          <a:bodyPr wrap="square" lIns="0" tIns="0" rIns="0" bIns="0" rtlCol="0" anchor="ctr"/>
+            <a:off x="731520" y="1280160"/>
+            <a:ext cx="7315200" cy="457200"/>
+          </a:xfrm>
+          <a:prstGeom prst="rect">
+            <a:avLst/>
+          </a:prstGeom>
+          <a:noFill/>
+          <a:ln/>
+        </p:spPr>
+        <p:txBody>
+          <a:bodyPr wrap="square" rtlCol="0" anchor="ctr"/>
           <a:lstStyle/>
           <a:p>
             <a:pPr indent="0" marL="0">
               <a:buNone/>
             </a:pPr>
             <a:r>
-              <a:rPr lang="en-US" sz="1100" b="1" spc="300" kern="0" dirty="0">
+              <a:rPr lang="en-US" sz="1600" b="1" spc="400" kern="0" dirty="0">
                 <a:solidFill>
                   <a:srgbClr val="8B8DFF"/>
                 </a:solidFill>
@@ -3952,9 +4355,9 @@
                 <a:ea typeface="Arial" pitchFamily="34" charset="-122"/>
                 <a:cs typeface="Arial" pitchFamily="34" charset="-120"/>
               </a:rPr>
-              <a:t>ENGINEERING</a:t>
-            </a:r>
-            <a:endParaRPr lang="en-US" sz="1100" dirty="0"/>
+              <a:t>LIVE DEMO</a:t>
+            </a:r>
+            <a:endParaRPr lang="en-US" sz="1600" dirty="0"/>
           </a:p>
         </p:txBody>
       </p:sp>
@@ -3966,24 +4369,24 @@
         </p:nvSpPr>
         <p:spPr>
           <a:xfrm>
-            <a:off x="786384" y="713232"/>
-            <a:ext cx="10972800" cy="640080"/>
-          </a:xfrm>
-          <a:prstGeom prst="rect">
-            <a:avLst/>
-          </a:prstGeom>
-          <a:noFill/>
-          <a:ln/>
-        </p:spPr>
-        <p:txBody>
-          <a:bodyPr wrap="square" lIns="0" tIns="0" rIns="0" bIns="0" rtlCol="0" anchor="ctr"/>
+            <a:off x="685800" y="1737360"/>
+            <a:ext cx="9144000" cy="914400"/>
+          </a:xfrm>
+          <a:prstGeom prst="rect">
+            <a:avLst/>
+          </a:prstGeom>
+          <a:noFill/>
+          <a:ln/>
+        </p:spPr>
+        <p:txBody>
+          <a:bodyPr wrap="square" rtlCol="0" anchor="ctr"/>
           <a:lstStyle/>
           <a:p>
             <a:pPr indent="0" marL="0">
               <a:buNone/>
             </a:pPr>
             <a:r>
-              <a:rPr lang="en-US" sz="3000" b="1" dirty="0">
+              <a:rPr lang="en-US" sz="4600" b="1" dirty="0">
                 <a:solidFill>
                   <a:srgbClr val="ECEAF6"/>
                 </a:solidFill>
@@ -3991,9 +4394,9 @@
                 <a:ea typeface="Trebuchet MS" pitchFamily="34" charset="-122"/>
                 <a:cs typeface="Trebuchet MS" pitchFamily="34" charset="-120"/>
               </a:rPr>
-              <a:t>Built to run autonomously &amp; securely</a:t>
-            </a:r>
-            <a:endParaRPr lang="en-US" sz="3000" dirty="0"/>
+              <a:t>See it run</a:t>
+            </a:r>
+            <a:endParaRPr lang="en-US" sz="4600" dirty="0"/>
           </a:p>
         </p:txBody>
       </p:sp>
@@ -4005,12 +4408,12 @@
         </p:nvSpPr>
         <p:spPr>
           <a:xfrm>
-            <a:off x="548640" y="1920240"/>
-            <a:ext cx="3529584" cy="3017520"/>
+            <a:off x="731520" y="2880360"/>
+            <a:ext cx="6035040" cy="914400"/>
           </a:xfrm>
           <a:prstGeom prst="roundRect">
             <a:avLst>
-              <a:gd name="adj" fmla="val 2727"/>
+              <a:gd name="adj" fmla="val 9000"/>
             </a:avLst>
           </a:prstGeom>
           <a:solidFill>
@@ -4033,23 +4436,59 @@
       </p:sp>
       <p:sp>
         <p:nvSpPr>
-          <p:cNvPr id="6" name="Shape 4"/>
-          <p:cNvSpPr/>
-          <p:nvPr/>
-        </p:nvSpPr>
-        <p:spPr>
-          <a:xfrm>
-            <a:off x="548640" y="1920240"/>
-            <a:ext cx="3529584" cy="91440"/>
-          </a:xfrm>
-          <a:prstGeom prst="rect">
-            <a:avLst/>
-          </a:prstGeom>
-          <a:solidFill>
-            <a:srgbClr val="8B8DFF"/>
-          </a:solidFill>
-          <a:ln/>
-        </p:spPr>
+          <p:cNvPr id="6" name="Text 4"/>
+          <p:cNvSpPr/>
+          <p:nvPr/>
+        </p:nvSpPr>
+        <p:spPr>
+          <a:xfrm>
+            <a:off x="1005840" y="2971800"/>
+            <a:ext cx="5669280" cy="731520"/>
+          </a:xfrm>
+          <a:prstGeom prst="rect">
+            <a:avLst/>
+          </a:prstGeom>
+          <a:noFill/>
+          <a:ln/>
+        </p:spPr>
+        <p:txBody>
+          <a:bodyPr wrap="square" rtlCol="0" anchor="ctr"/>
+          <a:lstStyle/>
+          <a:p>
+            <a:pPr indent="0" marL="0">
+              <a:buNone/>
+            </a:pPr>
+            <a:r>
+              <a:rPr lang="en-US" sz="1700" b="1" dirty="0">
+                <a:solidFill>
+                  <a:srgbClr val="C0C1FF"/>
+                </a:solidFill>
+                <a:latin typeface="Arial" pitchFamily="34" charset="0"/>
+                <a:ea typeface="Arial" pitchFamily="34" charset="-122"/>
+                <a:cs typeface="Arial" pitchFamily="34" charset="-120"/>
+              </a:rPr>
+              <a:t>agenticai.srv1487908.hstgr.cloud</a:t>
+            </a:r>
+            <a:endParaRPr lang="en-US" sz="1700" dirty="0"/>
+          </a:p>
+          <a:p>
+            <a:pPr indent="0" marL="0">
+              <a:buNone/>
+            </a:pPr>
+            <a:r>
+              <a:rPr lang="en-US" sz="1300" dirty="0">
+                <a:solidFill>
+                  <a:srgbClr val="AAB4C8"/>
+                </a:solidFill>
+                <a:latin typeface="Arial" pitchFamily="34" charset="0"/>
+                <a:ea typeface="Arial" pitchFamily="34" charset="-122"/>
+                <a:cs typeface="Arial" pitchFamily="34" charset="-120"/>
+              </a:rPr>
+              <a:t>password: agenticai</a:t>
+            </a:r>
+            <a:endParaRPr lang="en-US" sz="1700" dirty="0"/>
+          </a:p>
+        </p:txBody>
       </p:sp>
       <p:sp>
         <p:nvSpPr>
@@ -4059,8 +4498,8 @@
         </p:nvSpPr>
         <p:spPr>
           <a:xfrm>
-            <a:off x="822960" y="2240280"/>
-            <a:ext cx="2980944" cy="457200"/>
+            <a:off x="731520" y="4114800"/>
+            <a:ext cx="10515600" cy="2011680"/>
           </a:xfrm>
           <a:prstGeom prst="rect">
             <a:avLst/>
@@ -4073,566 +4512,95 @@
           <a:lstStyle/>
           <a:p>
             <a:pPr indent="0" marL="0">
-              <a:buNone/>
-            </a:pPr>
-            <a:r>
-              <a:rPr lang="en-US" sz="1900" b="1" dirty="0">
-                <a:solidFill>
-                  <a:srgbClr val="ECEAF6"/>
-                </a:solidFill>
-                <a:latin typeface="Trebuchet MS" pitchFamily="34" charset="0"/>
-                <a:ea typeface="Trebuchet MS" pitchFamily="34" charset="-122"/>
-                <a:cs typeface="Trebuchet MS" pitchFamily="34" charset="-120"/>
-              </a:rPr>
-              <a:t>Stack</a:t>
-            </a:r>
-            <a:endParaRPr lang="en-US" sz="1900" dirty="0"/>
-          </a:p>
-        </p:txBody>
-      </p:sp>
-      <p:sp>
-        <p:nvSpPr>
-          <p:cNvPr id="8" name="Text 6"/>
-          <p:cNvSpPr/>
-          <p:nvPr/>
-        </p:nvSpPr>
-        <p:spPr>
-          <a:xfrm>
-            <a:off x="822960" y="2834640"/>
-            <a:ext cx="2980944" cy="1920240"/>
-          </a:xfrm>
-          <a:prstGeom prst="rect">
-            <a:avLst/>
-          </a:prstGeom>
-          <a:noFill/>
-          <a:ln/>
-        </p:spPr>
-        <p:txBody>
-          <a:bodyPr wrap="square" rtlCol="0" anchor="t"/>
-          <a:lstStyle/>
-          <a:p>
-            <a:pPr marL="342900" indent="-342900">
               <a:lnSpc>
-                <a:spcPts val="1900"/>
+                <a:spcPts val="2200"/>
               </a:lnSpc>
               <a:spcAft>
                 <a:spcPts val="1200"/>
               </a:spcAft>
-              <a:buSzPct val="100000"/>
-              <a:buChar char="•"/>
-            </a:pPr>
-            <a:r>
-              <a:rPr lang="en-US" sz="1350" dirty="0">
-                <a:solidFill>
-                  <a:srgbClr val="AAB4C8"/>
+              <a:buNone/>
+            </a:pPr>
+            <a:r>
+              <a:rPr lang="en-US" sz="1600" dirty="0">
+                <a:solidFill>
+                  <a:srgbClr val="ECEAF6"/>
                 </a:solidFill>
                 <a:latin typeface="Arial" pitchFamily="34" charset="0"/>
                 <a:ea typeface="Arial" pitchFamily="34" charset="-122"/>
                 <a:cs typeface="Arial" pitchFamily="34" charset="-120"/>
               </a:rPr>
-              <a:t>FastAPI + CrewAI backend</a:t>
-            </a:r>
-            <a:endParaRPr lang="en-US" sz="1350" dirty="0"/>
-          </a:p>
-          <a:p>
-            <a:pPr marL="342900" indent="-342900">
+              <a:t>1.   Generate a synthetic dataset (or connect SAP)</a:t>
+            </a:r>
+            <a:endParaRPr lang="en-US" sz="1600" dirty="0"/>
+          </a:p>
+          <a:p>
+            <a:pPr indent="0" marL="0">
               <a:lnSpc>
-                <a:spcPts val="1900"/>
+                <a:spcPts val="2200"/>
               </a:lnSpc>
               <a:spcAft>
                 <a:spcPts val="1200"/>
               </a:spcAft>
-              <a:buSzPct val="100000"/>
-              <a:buChar char="•"/>
-            </a:pPr>
-            <a:r>
-              <a:rPr lang="en-US" sz="1350" dirty="0">
-                <a:solidFill>
-                  <a:srgbClr val="AAB4C8"/>
+              <a:buNone/>
+            </a:pPr>
+            <a:r>
+              <a:rPr lang="en-US" sz="1600" dirty="0">
+                <a:solidFill>
+                  <a:srgbClr val="ECEAF6"/>
                 </a:solidFill>
                 <a:latin typeface="Arial" pitchFamily="34" charset="0"/>
                 <a:ea typeface="Arial" pitchFamily="34" charset="-122"/>
                 <a:cs typeface="Arial" pitchFamily="34" charset="-120"/>
               </a:rPr>
-              <a:t>Tailwind dashboard (buildless)</a:t>
-            </a:r>
-            <a:endParaRPr lang="en-US" sz="1350" dirty="0"/>
-          </a:p>
-          <a:p>
-            <a:pPr marL="342900" indent="-342900">
+              <a:t>2.   Watch KPIs, the data table, logistics risk &amp; the ML card populate</a:t>
+            </a:r>
+            <a:endParaRPr lang="en-US" sz="1600" dirty="0"/>
+          </a:p>
+          <a:p>
+            <a:pPr indent="0" marL="0">
               <a:lnSpc>
-                <a:spcPts val="1900"/>
+                <a:spcPts val="2200"/>
               </a:lnSpc>
               <a:spcAft>
                 <a:spcPts val="1200"/>
               </a:spcAft>
-              <a:buSzPct val="100000"/>
-              <a:buChar char="•"/>
-            </a:pPr>
-            <a:r>
-              <a:rPr lang="en-US" sz="1350" dirty="0">
-                <a:solidFill>
-                  <a:srgbClr val="AAB4C8"/>
+              <a:buNone/>
+            </a:pPr>
+            <a:r>
+              <a:rPr lang="en-US" sz="1600" dirty="0">
+                <a:solidFill>
+                  <a:srgbClr val="ECEAF6"/>
                 </a:solidFill>
                 <a:latin typeface="Arial" pitchFamily="34" charset="0"/>
                 <a:ea typeface="Arial" pitchFamily="34" charset="-122"/>
                 <a:cs typeface="Arial" pitchFamily="34" charset="-120"/>
               </a:rPr>
-              <a:t>One Docker container behind Traefik (auto-TLS)</a:t>
-            </a:r>
-            <a:endParaRPr lang="en-US" sz="1350" dirty="0"/>
-          </a:p>
-        </p:txBody>
-      </p:sp>
-      <p:sp>
-        <p:nvSpPr>
-          <p:cNvPr id="9" name="Shape 7"/>
-          <p:cNvSpPr/>
-          <p:nvPr/>
-        </p:nvSpPr>
-        <p:spPr>
-          <a:xfrm>
-            <a:off x="4352544" y="1920240"/>
-            <a:ext cx="3529584" cy="3017520"/>
-          </a:xfrm>
-          <a:prstGeom prst="roundRect">
-            <a:avLst>
-              <a:gd name="adj" fmla="val 2727"/>
-            </a:avLst>
-          </a:prstGeom>
-          <a:solidFill>
-            <a:srgbClr val="1B2433"/>
-          </a:solidFill>
-          <a:ln w="12700">
-            <a:solidFill>
-              <a:srgbClr val="2A3547"/>
-            </a:solidFill>
-            <a:prstDash val="solid"/>
-          </a:ln>
-          <a:effectLst>
-            <a:outerShdw sx="100000" sy="100000" kx="0" ky="0" algn="bl" rotWithShape="0" blurRad="114300" dist="38100" dir="5400000">
-              <a:srgbClr val="000000">
-                <a:alpha val="35000"/>
-              </a:srgbClr>
-            </a:outerShdw>
-          </a:effectLst>
-        </p:spPr>
-      </p:sp>
-      <p:sp>
-        <p:nvSpPr>
-          <p:cNvPr id="10" name="Shape 8"/>
-          <p:cNvSpPr/>
-          <p:nvPr/>
-        </p:nvSpPr>
-        <p:spPr>
-          <a:xfrm>
-            <a:off x="4352544" y="1920240"/>
-            <a:ext cx="3529584" cy="91440"/>
-          </a:xfrm>
-          <a:prstGeom prst="rect">
-            <a:avLst/>
-          </a:prstGeom>
-          <a:solidFill>
-            <a:srgbClr val="FFB783"/>
-          </a:solidFill>
-          <a:ln/>
-        </p:spPr>
-      </p:sp>
-      <p:sp>
-        <p:nvSpPr>
-          <p:cNvPr id="11" name="Text 9"/>
-          <p:cNvSpPr/>
-          <p:nvPr/>
-        </p:nvSpPr>
-        <p:spPr>
-          <a:xfrm>
-            <a:off x="4626864" y="2240280"/>
-            <a:ext cx="2980944" cy="457200"/>
-          </a:xfrm>
-          <a:prstGeom prst="rect">
-            <a:avLst/>
-          </a:prstGeom>
-          <a:noFill/>
-          <a:ln/>
-        </p:spPr>
-        <p:txBody>
-          <a:bodyPr wrap="square" rtlCol="0" anchor="ctr"/>
-          <a:lstStyle/>
+              <a:t>3.   Run the risk analysis → a costed, board-ready briefing</a:t>
+            </a:r>
+            <a:endParaRPr lang="en-US" sz="1600" dirty="0"/>
+          </a:p>
           <a:p>
             <a:pPr indent="0" marL="0">
-              <a:buNone/>
-            </a:pPr>
-            <a:r>
-              <a:rPr lang="en-US" sz="1900" b="1" dirty="0">
-                <a:solidFill>
-                  <a:srgbClr val="ECEAF6"/>
-                </a:solidFill>
-                <a:latin typeface="Trebuchet MS" pitchFamily="34" charset="0"/>
-                <a:ea typeface="Trebuchet MS" pitchFamily="34" charset="-122"/>
-                <a:cs typeface="Trebuchet MS" pitchFamily="34" charset="-120"/>
-              </a:rPr>
-              <a:t>Autonomous</a:t>
-            </a:r>
-            <a:endParaRPr lang="en-US" sz="1900" dirty="0"/>
-          </a:p>
-        </p:txBody>
-      </p:sp>
-      <p:sp>
-        <p:nvSpPr>
-          <p:cNvPr id="12" name="Text 10"/>
-          <p:cNvSpPr/>
-          <p:nvPr/>
-        </p:nvSpPr>
-        <p:spPr>
-          <a:xfrm>
-            <a:off x="4626864" y="2834640"/>
-            <a:ext cx="2980944" cy="1920240"/>
-          </a:xfrm>
-          <a:prstGeom prst="rect">
-            <a:avLst/>
-          </a:prstGeom>
-          <a:noFill/>
-          <a:ln/>
-        </p:spPr>
-        <p:txBody>
-          <a:bodyPr wrap="square" rtlCol="0" anchor="t"/>
-          <a:lstStyle/>
-          <a:p>
-            <a:pPr marL="342900" indent="-342900">
               <a:lnSpc>
-                <a:spcPts val="1900"/>
+                <a:spcPts val="2200"/>
               </a:lnSpc>
               <a:spcAft>
                 <a:spcPts val="1200"/>
               </a:spcAft>
-              <a:buSzPct val="100000"/>
-              <a:buChar char="•"/>
-            </a:pPr>
-            <a:r>
-              <a:rPr lang="en-US" sz="1350" dirty="0">
-                <a:solidFill>
-                  <a:srgbClr val="AAB4C8"/>
+              <a:buNone/>
+            </a:pPr>
+            <a:r>
+              <a:rPr lang="en-US" sz="1600" dirty="0">
+                <a:solidFill>
+                  <a:srgbClr val="ECEAF6"/>
                 </a:solidFill>
                 <a:latin typeface="Arial" pitchFamily="34" charset="0"/>
                 <a:ea typeface="Arial" pitchFamily="34" charset="-122"/>
                 <a:cs typeface="Arial" pitchFamily="34" charset="-120"/>
               </a:rPr>
-              <a:t>Auto-restarts on crash</a:t>
-            </a:r>
-            <a:endParaRPr lang="en-US" sz="1350" dirty="0"/>
-          </a:p>
-          <a:p>
-            <a:pPr marL="342900" indent="-342900">
-              <a:lnSpc>
-                <a:spcPts val="1900"/>
-              </a:lnSpc>
-              <a:spcAft>
-                <a:spcPts val="1200"/>
-              </a:spcAft>
-              <a:buSzPct val="100000"/>
-              <a:buChar char="•"/>
-            </a:pPr>
-            <a:r>
-              <a:rPr lang="en-US" sz="1350" dirty="0">
-                <a:solidFill>
-                  <a:srgbClr val="AAB4C8"/>
-                </a:solidFill>
-                <a:latin typeface="Arial" pitchFamily="34" charset="0"/>
-                <a:ea typeface="Arial" pitchFamily="34" charset="-122"/>
-                <a:cs typeface="Arial" pitchFamily="34" charset="-120"/>
-              </a:rPr>
-              <a:t>Survives VPS reboots</a:t>
-            </a:r>
-            <a:endParaRPr lang="en-US" sz="1350" dirty="0"/>
-          </a:p>
-          <a:p>
-            <a:pPr marL="342900" indent="-342900">
-              <a:lnSpc>
-                <a:spcPts val="1900"/>
-              </a:lnSpc>
-              <a:spcAft>
-                <a:spcPts val="1200"/>
-              </a:spcAft>
-              <a:buSzPct val="100000"/>
-              <a:buChar char="•"/>
-            </a:pPr>
-            <a:r>
-              <a:rPr lang="en-US" sz="1350" dirty="0">
-                <a:solidFill>
-                  <a:srgbClr val="AAB4C8"/>
-                </a:solidFill>
-                <a:latin typeface="Arial" pitchFamily="34" charset="0"/>
-                <a:ea typeface="Arial" pitchFamily="34" charset="-122"/>
-                <a:cs typeface="Arial" pitchFamily="34" charset="-120"/>
-              </a:rPr>
-              <a:t>Health-checked every 30s</a:t>
-            </a:r>
-            <a:endParaRPr lang="en-US" sz="1350" dirty="0"/>
-          </a:p>
-        </p:txBody>
-      </p:sp>
-      <p:sp>
-        <p:nvSpPr>
-          <p:cNvPr id="13" name="Shape 11"/>
-          <p:cNvSpPr/>
-          <p:nvPr/>
-        </p:nvSpPr>
-        <p:spPr>
-          <a:xfrm>
-            <a:off x="8156448" y="1920240"/>
-            <a:ext cx="3529584" cy="3017520"/>
-          </a:xfrm>
-          <a:prstGeom prst="roundRect">
-            <a:avLst>
-              <a:gd name="adj" fmla="val 2727"/>
-            </a:avLst>
-          </a:prstGeom>
-          <a:solidFill>
-            <a:srgbClr val="1B2433"/>
-          </a:solidFill>
-          <a:ln w="12700">
-            <a:solidFill>
-              <a:srgbClr val="2A3547"/>
-            </a:solidFill>
-            <a:prstDash val="solid"/>
-          </a:ln>
-          <a:effectLst>
-            <a:outerShdw sx="100000" sy="100000" kx="0" ky="0" algn="bl" rotWithShape="0" blurRad="114300" dist="38100" dir="5400000">
-              <a:srgbClr val="000000">
-                <a:alpha val="35000"/>
-              </a:srgbClr>
-            </a:outerShdw>
-          </a:effectLst>
-        </p:spPr>
-      </p:sp>
-      <p:sp>
-        <p:nvSpPr>
-          <p:cNvPr id="14" name="Shape 12"/>
-          <p:cNvSpPr/>
-          <p:nvPr/>
-        </p:nvSpPr>
-        <p:spPr>
-          <a:xfrm>
-            <a:off x="8156448" y="1920240"/>
-            <a:ext cx="3529584" cy="91440"/>
-          </a:xfrm>
-          <a:prstGeom prst="rect">
-            <a:avLst/>
-          </a:prstGeom>
-          <a:solidFill>
-            <a:srgbClr val="5BE08C"/>
-          </a:solidFill>
-          <a:ln/>
-        </p:spPr>
-      </p:sp>
-      <p:sp>
-        <p:nvSpPr>
-          <p:cNvPr id="15" name="Text 13"/>
-          <p:cNvSpPr/>
-          <p:nvPr/>
-        </p:nvSpPr>
-        <p:spPr>
-          <a:xfrm>
-            <a:off x="8430768" y="2240280"/>
-            <a:ext cx="2980944" cy="457200"/>
-          </a:xfrm>
-          <a:prstGeom prst="rect">
-            <a:avLst/>
-          </a:prstGeom>
-          <a:noFill/>
-          <a:ln/>
-        </p:spPr>
-        <p:txBody>
-          <a:bodyPr wrap="square" rtlCol="0" anchor="ctr"/>
-          <a:lstStyle/>
-          <a:p>
-            <a:pPr indent="0" marL="0">
-              <a:buNone/>
-            </a:pPr>
-            <a:r>
-              <a:rPr lang="en-US" sz="1900" b="1" dirty="0">
-                <a:solidFill>
-                  <a:srgbClr val="ECEAF6"/>
-                </a:solidFill>
-                <a:latin typeface="Trebuchet MS" pitchFamily="34" charset="0"/>
-                <a:ea typeface="Trebuchet MS" pitchFamily="34" charset="-122"/>
-                <a:cs typeface="Trebuchet MS" pitchFamily="34" charset="-120"/>
-              </a:rPr>
-              <a:t>Secure</a:t>
-            </a:r>
-            <a:endParaRPr lang="en-US" sz="1900" dirty="0"/>
-          </a:p>
-        </p:txBody>
-      </p:sp>
-      <p:sp>
-        <p:nvSpPr>
-          <p:cNvPr id="16" name="Text 14"/>
-          <p:cNvSpPr/>
-          <p:nvPr/>
-        </p:nvSpPr>
-        <p:spPr>
-          <a:xfrm>
-            <a:off x="8430768" y="2834640"/>
-            <a:ext cx="2980944" cy="1920240"/>
-          </a:xfrm>
-          <a:prstGeom prst="rect">
-            <a:avLst/>
-          </a:prstGeom>
-          <a:noFill/>
-          <a:ln/>
-        </p:spPr>
-        <p:txBody>
-          <a:bodyPr wrap="square" rtlCol="0" anchor="t"/>
-          <a:lstStyle/>
-          <a:p>
-            <a:pPr marL="342900" indent="-342900">
-              <a:lnSpc>
-                <a:spcPts val="1900"/>
-              </a:lnSpc>
-              <a:spcAft>
-                <a:spcPts val="1200"/>
-              </a:spcAft>
-              <a:buSzPct val="100000"/>
-              <a:buChar char="•"/>
-            </a:pPr>
-            <a:r>
-              <a:rPr lang="en-US" sz="1350" dirty="0">
-                <a:solidFill>
-                  <a:srgbClr val="AAB4C8"/>
-                </a:solidFill>
-                <a:latin typeface="Arial" pitchFamily="34" charset="0"/>
-                <a:ea typeface="Arial" pitchFamily="34" charset="-122"/>
-                <a:cs typeface="Arial" pitchFamily="34" charset="-120"/>
-              </a:rPr>
-              <a:t>Password + brute-force lockout</a:t>
-            </a:r>
-            <a:endParaRPr lang="en-US" sz="1350" dirty="0"/>
-          </a:p>
-          <a:p>
-            <a:pPr marL="342900" indent="-342900">
-              <a:lnSpc>
-                <a:spcPts val="1900"/>
-              </a:lnSpc>
-              <a:spcAft>
-                <a:spcPts val="1200"/>
-              </a:spcAft>
-              <a:buSzPct val="100000"/>
-              <a:buChar char="•"/>
-            </a:pPr>
-            <a:r>
-              <a:rPr lang="en-US" sz="1350" dirty="0">
-                <a:solidFill>
-                  <a:srgbClr val="AAB4C8"/>
-                </a:solidFill>
-                <a:latin typeface="Arial" pitchFamily="34" charset="0"/>
-                <a:ea typeface="Arial" pitchFamily="34" charset="-122"/>
-                <a:cs typeface="Arial" pitchFamily="34" charset="-120"/>
-              </a:rPr>
-              <a:t>Rate limiting + input caps</a:t>
-            </a:r>
-            <a:endParaRPr lang="en-US" sz="1350" dirty="0"/>
-          </a:p>
-          <a:p>
-            <a:pPr marL="342900" indent="-342900">
-              <a:lnSpc>
-                <a:spcPts val="1900"/>
-              </a:lnSpc>
-              <a:spcAft>
-                <a:spcPts val="1200"/>
-              </a:spcAft>
-              <a:buSzPct val="100000"/>
-              <a:buChar char="•"/>
-            </a:pPr>
-            <a:r>
-              <a:rPr lang="en-US" sz="1350" dirty="0">
-                <a:solidFill>
-                  <a:srgbClr val="AAB4C8"/>
-                </a:solidFill>
-                <a:latin typeface="Arial" pitchFamily="34" charset="0"/>
-                <a:ea typeface="Arial" pitchFamily="34" charset="-122"/>
-                <a:cs typeface="Arial" pitchFamily="34" charset="-120"/>
-              </a:rPr>
-              <a:t>Prompt-injection / scope guard</a:t>
-            </a:r>
-            <a:endParaRPr lang="en-US" sz="1350" dirty="0"/>
-          </a:p>
-        </p:txBody>
-      </p:sp>
-      <p:sp>
-        <p:nvSpPr>
-          <p:cNvPr id="17" name="Text 15"/>
-          <p:cNvSpPr/>
-          <p:nvPr/>
-        </p:nvSpPr>
-        <p:spPr>
-          <a:xfrm>
-            <a:off x="11274552" y="6400800"/>
-            <a:ext cx="548640" cy="274320"/>
-          </a:xfrm>
-          <a:prstGeom prst="rect">
-            <a:avLst/>
-          </a:prstGeom>
-          <a:noFill/>
-          <a:ln/>
-        </p:spPr>
-        <p:txBody>
-          <a:bodyPr wrap="square" rtlCol="0" anchor="ctr"/>
-          <a:lstStyle/>
-          <a:p>
-            <a:pPr algn="r" indent="0" marL="0">
-              <a:buNone/>
-            </a:pPr>
-            <a:r>
-              <a:rPr lang="en-US" sz="900" dirty="0">
-                <a:solidFill>
-                  <a:srgbClr val="8694A8"/>
-                </a:solidFill>
-                <a:latin typeface="Arial" pitchFamily="34" charset="0"/>
-                <a:ea typeface="Arial" pitchFamily="34" charset="-122"/>
-                <a:cs typeface="Arial" pitchFamily="34" charset="-120"/>
-              </a:rPr>
-              <a:t>10</a:t>
-            </a:r>
-            <a:endParaRPr lang="en-US" sz="900" dirty="0"/>
-          </a:p>
-        </p:txBody>
-      </p:sp>
-      <p:sp>
-        <p:nvSpPr>
-          <p:cNvPr id="18" name="Text 16"/>
-          <p:cNvSpPr/>
-          <p:nvPr/>
-        </p:nvSpPr>
-        <p:spPr>
-          <a:xfrm>
-            <a:off x="548640" y="6400800"/>
-            <a:ext cx="6400800" cy="274320"/>
-          </a:xfrm>
-          <a:prstGeom prst="rect">
-            <a:avLst/>
-          </a:prstGeom>
-          <a:noFill/>
-          <a:ln/>
-        </p:spPr>
-        <p:txBody>
-          <a:bodyPr wrap="square" rtlCol="0" anchor="ctr"/>
-          <a:lstStyle/>
-          <a:p>
-            <a:pPr indent="0" marL="0">
-              <a:buNone/>
-            </a:pPr>
-            <a:r>
-              <a:rPr lang="en-US" sz="900" dirty="0">
-                <a:solidFill>
-                  <a:srgbClr val="8694A8"/>
-                </a:solidFill>
-                <a:latin typeface="Arial" pitchFamily="34" charset="0"/>
-                <a:ea typeface="Arial" pitchFamily="34" charset="-122"/>
-                <a:cs typeface="Arial" pitchFamily="34" charset="-120"/>
-              </a:rPr>
-              <a:t>Supply Chain Risk Console · Agentic AI</a:t>
-            </a:r>
-            <a:endParaRPr lang="en-US" sz="900" dirty="0"/>
+              <a:t>4.   Ask the chat: “which shipment has the highest delay cost?”</a:t>
+            </a:r>
+            <a:endParaRPr lang="en-US" sz="1600" dirty="0"/>
           </a:p>
         </p:txBody>
       </p:sp>
@@ -4721,7 +4689,7 @@
                 <a:ea typeface="Arial" pitchFamily="34" charset="-122"/>
                 <a:cs typeface="Arial" pitchFamily="34" charset="-120"/>
               </a:rPr>
-              <a:t>HONEST SCOPE</a:t>
+              <a:t>ENGINEERING</a:t>
             </a:r>
             <a:endParaRPr lang="en-US" sz="1100" dirty="0"/>
           </a:p>
@@ -4760,7 +4728,7 @@
                 <a:ea typeface="Trebuchet MS" pitchFamily="34" charset="-122"/>
                 <a:cs typeface="Trebuchet MS" pitchFamily="34" charset="-120"/>
               </a:rPr>
-              <a:t>What’s real, what’s simulated</a:t>
+              <a:t>Built to run autonomously &amp; securely</a:t>
             </a:r>
             <a:endParaRPr lang="en-US" sz="3000" dirty="0"/>
           </a:p>
@@ -4774,12 +4742,12 @@
         </p:nvSpPr>
         <p:spPr>
           <a:xfrm>
-            <a:off x="548640" y="1828800"/>
-            <a:ext cx="5394960" cy="3657600"/>
+            <a:off x="548640" y="1920240"/>
+            <a:ext cx="3529584" cy="3017520"/>
           </a:xfrm>
           <a:prstGeom prst="roundRect">
             <a:avLst>
-              <a:gd name="adj" fmla="val 2250"/>
+              <a:gd name="adj" fmla="val 2727"/>
             </a:avLst>
           </a:prstGeom>
           <a:solidFill>
@@ -4808,14 +4776,14 @@
         </p:nvSpPr>
         <p:spPr>
           <a:xfrm>
-            <a:off x="548640" y="1828800"/>
-            <a:ext cx="109728" cy="3657600"/>
+            <a:off x="548640" y="1920240"/>
+            <a:ext cx="3529584" cy="91440"/>
           </a:xfrm>
           <a:prstGeom prst="rect">
             <a:avLst/>
           </a:prstGeom>
           <a:solidFill>
-            <a:srgbClr val="FFB783"/>
+            <a:srgbClr val="8B8DFF"/>
           </a:solidFill>
           <a:ln/>
         </p:spPr>
@@ -4828,8 +4796,8 @@
         </p:nvSpPr>
         <p:spPr>
           <a:xfrm>
-            <a:off x="914400" y="2057400"/>
-            <a:ext cx="4754880" cy="365760"/>
+            <a:off x="822960" y="2240280"/>
+            <a:ext cx="2980944" cy="457200"/>
           </a:xfrm>
           <a:prstGeom prst="rect">
             <a:avLst/>
@@ -4845,17 +4813,17 @@
               <a:buNone/>
             </a:pPr>
             <a:r>
-              <a:rPr lang="en-US" sz="1600" b="1" dirty="0">
-                <a:solidFill>
-                  <a:srgbClr val="FFB783"/>
+              <a:rPr lang="en-US" sz="1900" b="1" dirty="0">
+                <a:solidFill>
+                  <a:srgbClr val="ECEAF6"/>
                 </a:solidFill>
                 <a:latin typeface="Trebuchet MS" pitchFamily="34" charset="0"/>
                 <a:ea typeface="Trebuchet MS" pitchFamily="34" charset="-122"/>
                 <a:cs typeface="Trebuchet MS" pitchFamily="34" charset="-120"/>
               </a:rPr>
-              <a:t>Simulated (clearly labelled)</a:t>
-            </a:r>
-            <a:endParaRPr lang="en-US" sz="1600" dirty="0"/>
+              <a:t>Stack</a:t>
+            </a:r>
+            <a:endParaRPr lang="en-US" sz="1900" dirty="0"/>
           </a:p>
         </p:txBody>
       </p:sp>
@@ -4867,8 +4835,8 @@
         </p:nvSpPr>
         <p:spPr>
           <a:xfrm>
-            <a:off x="914400" y="2606040"/>
-            <a:ext cx="4754880" cy="2743200"/>
+            <a:off x="822960" y="2834640"/>
+            <a:ext cx="2980944" cy="1920240"/>
           </a:xfrm>
           <a:prstGeom prst="rect">
             <a:avLst/>
@@ -4891,17 +4859,17 @@
               <a:buChar char="•"/>
             </a:pPr>
             <a:r>
-              <a:rPr lang="en-US" sz="1400" dirty="0">
-                <a:solidFill>
-                  <a:srgbClr val="ECEAF6"/>
+              <a:rPr lang="en-US" sz="1350" dirty="0">
+                <a:solidFill>
+                  <a:srgbClr val="AAB4C8"/>
                 </a:solidFill>
                 <a:latin typeface="Arial" pitchFamily="34" charset="0"/>
                 <a:ea typeface="Arial" pitchFamily="34" charset="-122"/>
                 <a:cs typeface="Arial" pitchFamily="34" charset="-120"/>
               </a:rPr>
-              <a:t>ERP connections (SAP / Odoo / Dynamics)</a:t>
-            </a:r>
-            <a:endParaRPr lang="en-US" sz="1400" dirty="0"/>
+              <a:t>FastAPI + CrewAI backend</a:t>
+            </a:r>
+            <a:endParaRPr lang="en-US" sz="1350" dirty="0"/>
           </a:p>
           <a:p>
             <a:pPr marL="342900" indent="-342900">
@@ -4915,17 +4883,17 @@
               <a:buChar char="•"/>
             </a:pPr>
             <a:r>
-              <a:rPr lang="en-US" sz="1400" dirty="0">
-                <a:solidFill>
-                  <a:srgbClr val="ECEAF6"/>
+              <a:rPr lang="en-US" sz="1350" dirty="0">
+                <a:solidFill>
+                  <a:srgbClr val="AAB4C8"/>
                 </a:solidFill>
                 <a:latin typeface="Arial" pitchFamily="34" charset="0"/>
                 <a:ea typeface="Arial" pitchFamily="34" charset="-122"/>
                 <a:cs typeface="Arial" pitchFamily="34" charset="-120"/>
               </a:rPr>
-              <a:t>Logistics / weather / port signals</a:t>
-            </a:r>
-            <a:endParaRPr lang="en-US" sz="1400" dirty="0"/>
+              <a:t>Tailwind dashboard (buildless)</a:t>
+            </a:r>
+            <a:endParaRPr lang="en-US" sz="1350" dirty="0"/>
           </a:p>
           <a:p>
             <a:pPr marL="342900" indent="-342900">
@@ -4939,41 +4907,17 @@
               <a:buChar char="•"/>
             </a:pPr>
             <a:r>
-              <a:rPr lang="en-US" sz="1400" dirty="0">
-                <a:solidFill>
-                  <a:srgbClr val="ECEAF6"/>
+              <a:rPr lang="en-US" sz="1350" dirty="0">
+                <a:solidFill>
+                  <a:srgbClr val="AAB4C8"/>
                 </a:solidFill>
                 <a:latin typeface="Arial" pitchFamily="34" charset="0"/>
                 <a:ea typeface="Arial" pitchFamily="34" charset="-122"/>
                 <a:cs typeface="Arial" pitchFamily="34" charset="-120"/>
               </a:rPr>
-              <a:t>ML model trained on a simulated history</a:t>
-            </a:r>
-            <a:endParaRPr lang="en-US" sz="1400" dirty="0"/>
-          </a:p>
-          <a:p>
-            <a:pPr marL="342900" indent="-342900">
-              <a:lnSpc>
-                <a:spcPts val="1900"/>
-              </a:lnSpc>
-              <a:spcAft>
-                <a:spcPts val="1200"/>
-              </a:spcAft>
-              <a:buSzPct val="100000"/>
-              <a:buChar char="•"/>
-            </a:pPr>
-            <a:r>
-              <a:rPr lang="en-US" sz="1400" dirty="0">
-                <a:solidFill>
-                  <a:srgbClr val="ECEAF6"/>
-                </a:solidFill>
-                <a:latin typeface="Arial" pitchFamily="34" charset="0"/>
-                <a:ea typeface="Arial" pitchFamily="34" charset="-122"/>
-                <a:cs typeface="Arial" pitchFamily="34" charset="-120"/>
-              </a:rPr>
-              <a:t>No paid APIs used</a:t>
-            </a:r>
-            <a:endParaRPr lang="en-US" sz="1400" dirty="0"/>
+              <a:t>One Docker container behind Traefik (auto-TLS)</a:t>
+            </a:r>
+            <a:endParaRPr lang="en-US" sz="1350" dirty="0"/>
           </a:p>
         </p:txBody>
       </p:sp>
@@ -4985,16 +4929,16 @@
         </p:nvSpPr>
         <p:spPr>
           <a:xfrm>
-            <a:off x="6217920" y="1828800"/>
-            <a:ext cx="5394960" cy="3657600"/>
+            <a:off x="4352544" y="1920240"/>
+            <a:ext cx="3529584" cy="3017520"/>
           </a:xfrm>
           <a:prstGeom prst="roundRect">
             <a:avLst>
-              <a:gd name="adj" fmla="val 2250"/>
+              <a:gd name="adj" fmla="val 2727"/>
             </a:avLst>
           </a:prstGeom>
           <a:solidFill>
-            <a:srgbClr val="131A26"/>
+            <a:srgbClr val="1B2433"/>
           </a:solidFill>
           <a:ln w="12700">
             <a:solidFill>
@@ -5019,14 +4963,14 @@
         </p:nvSpPr>
         <p:spPr>
           <a:xfrm>
-            <a:off x="6217920" y="1828800"/>
-            <a:ext cx="109728" cy="3657600"/>
+            <a:off x="4352544" y="1920240"/>
+            <a:ext cx="3529584" cy="91440"/>
           </a:xfrm>
           <a:prstGeom prst="rect">
             <a:avLst/>
           </a:prstGeom>
           <a:solidFill>
-            <a:srgbClr val="5BE08C"/>
+            <a:srgbClr val="FFB783"/>
           </a:solidFill>
           <a:ln/>
         </p:spPr>
@@ -5039,8 +4983,8 @@
         </p:nvSpPr>
         <p:spPr>
           <a:xfrm>
-            <a:off x="6583680" y="2057400"/>
-            <a:ext cx="4846320" cy="365760"/>
+            <a:off x="4626864" y="2240280"/>
+            <a:ext cx="2980944" cy="457200"/>
           </a:xfrm>
           <a:prstGeom prst="rect">
             <a:avLst/>
@@ -5056,17 +5000,17 @@
               <a:buNone/>
             </a:pPr>
             <a:r>
-              <a:rPr lang="en-US" sz="1600" b="1" dirty="0">
-                <a:solidFill>
-                  <a:srgbClr val="5BE08C"/>
+              <a:rPr lang="en-US" sz="1900" b="1" dirty="0">
+                <a:solidFill>
+                  <a:srgbClr val="ECEAF6"/>
                 </a:solidFill>
                 <a:latin typeface="Trebuchet MS" pitchFamily="34" charset="0"/>
                 <a:ea typeface="Trebuchet MS" pitchFamily="34" charset="-122"/>
                 <a:cs typeface="Trebuchet MS" pitchFamily="34" charset="-120"/>
               </a:rPr>
-              <a:t>Real &amp; production-ready</a:t>
-            </a:r>
-            <a:endParaRPr lang="en-US" sz="1600" dirty="0"/>
+              <a:t>Autonomous</a:t>
+            </a:r>
+            <a:endParaRPr lang="en-US" sz="1900" dirty="0"/>
           </a:p>
         </p:txBody>
       </p:sp>
@@ -5078,8 +5022,8 @@
         </p:nvSpPr>
         <p:spPr>
           <a:xfrm>
-            <a:off x="6583680" y="2606040"/>
-            <a:ext cx="4846320" cy="2743200"/>
+            <a:off x="4626864" y="2834640"/>
+            <a:ext cx="2980944" cy="1920240"/>
           </a:xfrm>
           <a:prstGeom prst="rect">
             <a:avLst/>
@@ -5102,17 +5046,17 @@
               <a:buChar char="•"/>
             </a:pPr>
             <a:r>
-              <a:rPr lang="en-US" sz="1400" dirty="0">
-                <a:solidFill>
-                  <a:srgbClr val="ECEAF6"/>
+              <a:rPr lang="en-US" sz="1350" dirty="0">
+                <a:solidFill>
+                  <a:srgbClr val="AAB4C8"/>
                 </a:solidFill>
                 <a:latin typeface="Arial" pitchFamily="34" charset="0"/>
                 <a:ea typeface="Arial" pitchFamily="34" charset="-122"/>
                 <a:cs typeface="Arial" pitchFamily="34" charset="-120"/>
               </a:rPr>
-              <a:t>The full app, pipeline &amp; multi-agent crew</a:t>
-            </a:r>
-            <a:endParaRPr lang="en-US" sz="1400" dirty="0"/>
+              <a:t>Auto-restarts on crash</a:t>
+            </a:r>
+            <a:endParaRPr lang="en-US" sz="1350" dirty="0"/>
           </a:p>
           <a:p>
             <a:pPr marL="342900" indent="-342900">
@@ -5126,17 +5070,17 @@
               <a:buChar char="•"/>
             </a:pPr>
             <a:r>
-              <a:rPr lang="en-US" sz="1400" dirty="0">
-                <a:solidFill>
-                  <a:srgbClr val="ECEAF6"/>
+              <a:rPr lang="en-US" sz="1350" dirty="0">
+                <a:solidFill>
+                  <a:srgbClr val="AAB4C8"/>
                 </a:solidFill>
                 <a:latin typeface="Arial" pitchFamily="34" charset="0"/>
                 <a:ea typeface="Arial" pitchFamily="34" charset="-122"/>
                 <a:cs typeface="Arial" pitchFamily="34" charset="-120"/>
               </a:rPr>
-              <a:t>The connector code (point env at a real system)</a:t>
-            </a:r>
-            <a:endParaRPr lang="en-US" sz="1400" dirty="0"/>
+              <a:t>Survives VPS reboots</a:t>
+            </a:r>
+            <a:endParaRPr lang="en-US" sz="1350" dirty="0"/>
           </a:p>
           <a:p>
             <a:pPr marL="342900" indent="-342900">
@@ -5150,18 +5094,133 @@
               <a:buChar char="•"/>
             </a:pPr>
             <a:r>
-              <a:rPr lang="en-US" sz="1400" dirty="0">
-                <a:solidFill>
-                  <a:srgbClr val="ECEAF6"/>
+              <a:rPr lang="en-US" sz="1350" dirty="0">
+                <a:solidFill>
+                  <a:srgbClr val="AAB4C8"/>
                 </a:solidFill>
                 <a:latin typeface="Arial" pitchFamily="34" charset="0"/>
                 <a:ea typeface="Arial" pitchFamily="34" charset="-122"/>
                 <a:cs typeface="Arial" pitchFamily="34" charset="-120"/>
               </a:rPr>
-              <a:t>The ML pipeline (features → train → predict → explain)</a:t>
-            </a:r>
-            <a:endParaRPr lang="en-US" sz="1400" dirty="0"/>
-          </a:p>
+              <a:t>Health-checked every 30s</a:t>
+            </a:r>
+            <a:endParaRPr lang="en-US" sz="1350" dirty="0"/>
+          </a:p>
+        </p:txBody>
+      </p:sp>
+      <p:sp>
+        <p:nvSpPr>
+          <p:cNvPr id="13" name="Shape 11"/>
+          <p:cNvSpPr/>
+          <p:nvPr/>
+        </p:nvSpPr>
+        <p:spPr>
+          <a:xfrm>
+            <a:off x="8156448" y="1920240"/>
+            <a:ext cx="3529584" cy="3017520"/>
+          </a:xfrm>
+          <a:prstGeom prst="roundRect">
+            <a:avLst>
+              <a:gd name="adj" fmla="val 2727"/>
+            </a:avLst>
+          </a:prstGeom>
+          <a:solidFill>
+            <a:srgbClr val="1B2433"/>
+          </a:solidFill>
+          <a:ln w="12700">
+            <a:solidFill>
+              <a:srgbClr val="2A3547"/>
+            </a:solidFill>
+            <a:prstDash val="solid"/>
+          </a:ln>
+          <a:effectLst>
+            <a:outerShdw sx="100000" sy="100000" kx="0" ky="0" algn="bl" rotWithShape="0" blurRad="114300" dist="38100" dir="5400000">
+              <a:srgbClr val="000000">
+                <a:alpha val="35000"/>
+              </a:srgbClr>
+            </a:outerShdw>
+          </a:effectLst>
+        </p:spPr>
+      </p:sp>
+      <p:sp>
+        <p:nvSpPr>
+          <p:cNvPr id="14" name="Shape 12"/>
+          <p:cNvSpPr/>
+          <p:nvPr/>
+        </p:nvSpPr>
+        <p:spPr>
+          <a:xfrm>
+            <a:off x="8156448" y="1920240"/>
+            <a:ext cx="3529584" cy="91440"/>
+          </a:xfrm>
+          <a:prstGeom prst="rect">
+            <a:avLst/>
+          </a:prstGeom>
+          <a:solidFill>
+            <a:srgbClr val="5BE08C"/>
+          </a:solidFill>
+          <a:ln/>
+        </p:spPr>
+      </p:sp>
+      <p:sp>
+        <p:nvSpPr>
+          <p:cNvPr id="15" name="Text 13"/>
+          <p:cNvSpPr/>
+          <p:nvPr/>
+        </p:nvSpPr>
+        <p:spPr>
+          <a:xfrm>
+            <a:off x="8430768" y="2240280"/>
+            <a:ext cx="2980944" cy="457200"/>
+          </a:xfrm>
+          <a:prstGeom prst="rect">
+            <a:avLst/>
+          </a:prstGeom>
+          <a:noFill/>
+          <a:ln/>
+        </p:spPr>
+        <p:txBody>
+          <a:bodyPr wrap="square" rtlCol="0" anchor="ctr"/>
+          <a:lstStyle/>
+          <a:p>
+            <a:pPr indent="0" marL="0">
+              <a:buNone/>
+            </a:pPr>
+            <a:r>
+              <a:rPr lang="en-US" sz="1900" b="1" dirty="0">
+                <a:solidFill>
+                  <a:srgbClr val="ECEAF6"/>
+                </a:solidFill>
+                <a:latin typeface="Trebuchet MS" pitchFamily="34" charset="0"/>
+                <a:ea typeface="Trebuchet MS" pitchFamily="34" charset="-122"/>
+                <a:cs typeface="Trebuchet MS" pitchFamily="34" charset="-120"/>
+              </a:rPr>
+              <a:t>Secure</a:t>
+            </a:r>
+            <a:endParaRPr lang="en-US" sz="1900" dirty="0"/>
+          </a:p>
+        </p:txBody>
+      </p:sp>
+      <p:sp>
+        <p:nvSpPr>
+          <p:cNvPr id="16" name="Text 14"/>
+          <p:cNvSpPr/>
+          <p:nvPr/>
+        </p:nvSpPr>
+        <p:spPr>
+          <a:xfrm>
+            <a:off x="8430768" y="2834640"/>
+            <a:ext cx="2980944" cy="1920240"/>
+          </a:xfrm>
+          <a:prstGeom prst="rect">
+            <a:avLst/>
+          </a:prstGeom>
+          <a:noFill/>
+          <a:ln/>
+        </p:spPr>
+        <p:txBody>
+          <a:bodyPr wrap="square" rtlCol="0" anchor="t"/>
+          <a:lstStyle/>
           <a:p>
             <a:pPr marL="342900" indent="-342900">
               <a:lnSpc>
@@ -5174,53 +5233,101 @@
               <a:buChar char="•"/>
             </a:pPr>
             <a:r>
-              <a:rPr lang="en-US" sz="1400" dirty="0">
-                <a:solidFill>
-                  <a:srgbClr val="ECEAF6"/>
+              <a:rPr lang="en-US" sz="1350" dirty="0">
+                <a:solidFill>
+                  <a:srgbClr val="AAB4C8"/>
                 </a:solidFill>
                 <a:latin typeface="Arial" pitchFamily="34" charset="0"/>
                 <a:ea typeface="Arial" pitchFamily="34" charset="-122"/>
                 <a:cs typeface="Arial" pitchFamily="34" charset="-120"/>
               </a:rPr>
-              <a:t>Deployed, autonomous &amp; secured on a live VPS</a:t>
-            </a:r>
-            <a:endParaRPr lang="en-US" sz="1400" dirty="0"/>
-          </a:p>
-        </p:txBody>
-      </p:sp>
-      <p:sp>
-        <p:nvSpPr>
-          <p:cNvPr id="13" name="Text 11"/>
-          <p:cNvSpPr/>
-          <p:nvPr/>
-        </p:nvSpPr>
-        <p:spPr>
-          <a:xfrm>
-            <a:off x="11274552" y="6400800"/>
-            <a:ext cx="548640" cy="274320"/>
-          </a:xfrm>
-          <a:prstGeom prst="rect">
-            <a:avLst/>
-          </a:prstGeom>
-          <a:noFill/>
-          <a:ln/>
-        </p:spPr>
-        <p:txBody>
-          <a:bodyPr wrap="square" rtlCol="0" anchor="ctr"/>
-          <a:lstStyle/>
-          <a:p>
-            <a:pPr algn="r" indent="0" marL="0">
-              <a:buNone/>
-            </a:pPr>
-            <a:r>
-              <a:rPr lang="en-US" sz="900" dirty="0">
-                <a:solidFill>
-                  <a:srgbClr val="8694A8"/>
+              <a:t>Password + brute-force lockout</a:t>
+            </a:r>
+            <a:endParaRPr lang="en-US" sz="1350" dirty="0"/>
+          </a:p>
+          <a:p>
+            <a:pPr marL="342900" indent="-342900">
+              <a:lnSpc>
+                <a:spcPts val="1900"/>
+              </a:lnSpc>
+              <a:spcAft>
+                <a:spcPts val="1200"/>
+              </a:spcAft>
+              <a:buSzPct val="100000"/>
+              <a:buChar char="•"/>
+            </a:pPr>
+            <a:r>
+              <a:rPr lang="en-US" sz="1350" dirty="0">
+                <a:solidFill>
+                  <a:srgbClr val="AAB4C8"/>
                 </a:solidFill>
                 <a:latin typeface="Arial" pitchFamily="34" charset="0"/>
                 <a:ea typeface="Arial" pitchFamily="34" charset="-122"/>
                 <a:cs typeface="Arial" pitchFamily="34" charset="-120"/>
               </a:rPr>
+              <a:t>Rate limiting + input caps</a:t>
+            </a:r>
+            <a:endParaRPr lang="en-US" sz="1350" dirty="0"/>
+          </a:p>
+          <a:p>
+            <a:pPr marL="342900" indent="-342900">
+              <a:lnSpc>
+                <a:spcPts val="1900"/>
+              </a:lnSpc>
+              <a:spcAft>
+                <a:spcPts val="1200"/>
+              </a:spcAft>
+              <a:buSzPct val="100000"/>
+              <a:buChar char="•"/>
+            </a:pPr>
+            <a:r>
+              <a:rPr lang="en-US" sz="1350" dirty="0">
+                <a:solidFill>
+                  <a:srgbClr val="AAB4C8"/>
+                </a:solidFill>
+                <a:latin typeface="Arial" pitchFamily="34" charset="0"/>
+                <a:ea typeface="Arial" pitchFamily="34" charset="-122"/>
+                <a:cs typeface="Arial" pitchFamily="34" charset="-120"/>
+              </a:rPr>
+              <a:t>Prompt-injection / scope guard</a:t>
+            </a:r>
+            <a:endParaRPr lang="en-US" sz="1350" dirty="0"/>
+          </a:p>
+        </p:txBody>
+      </p:sp>
+      <p:sp>
+        <p:nvSpPr>
+          <p:cNvPr id="17" name="Text 15"/>
+          <p:cNvSpPr/>
+          <p:nvPr/>
+        </p:nvSpPr>
+        <p:spPr>
+          <a:xfrm>
+            <a:off x="11274552" y="6400800"/>
+            <a:ext cx="548640" cy="274320"/>
+          </a:xfrm>
+          <a:prstGeom prst="rect">
+            <a:avLst/>
+          </a:prstGeom>
+          <a:noFill/>
+          <a:ln/>
+        </p:spPr>
+        <p:txBody>
+          <a:bodyPr wrap="square" rtlCol="0" anchor="ctr"/>
+          <a:lstStyle/>
+          <a:p>
+            <a:pPr algn="r" indent="0" marL="0">
+              <a:buNone/>
+            </a:pPr>
+            <a:r>
+              <a:rPr lang="en-US" sz="900" dirty="0">
+                <a:solidFill>
+                  <a:srgbClr val="8694A8"/>
+                </a:solidFill>
+                <a:latin typeface="Arial" pitchFamily="34" charset="0"/>
+                <a:ea typeface="Arial" pitchFamily="34" charset="-122"/>
+                <a:cs typeface="Arial" pitchFamily="34" charset="-120"/>
+              </a:rPr>
               <a:t>11</a:t>
             </a:r>
             <a:endParaRPr lang="en-US" sz="900" dirty="0"/>
@@ -5229,7 +5336,7 @@
       </p:sp>
       <p:sp>
         <p:nvSpPr>
-          <p:cNvPr id="14" name="Text 12"/>
+          <p:cNvPr id="18" name="Text 16"/>
           <p:cNvSpPr/>
           <p:nvPr/>
         </p:nvSpPr>
@@ -5306,6 +5413,636 @@
         </p:nvSpPr>
         <p:spPr>
           <a:xfrm>
+            <a:off x="548640" y="502920"/>
+            <a:ext cx="128016" cy="457200"/>
+          </a:xfrm>
+          <a:prstGeom prst="rect">
+            <a:avLst/>
+          </a:prstGeom>
+          <a:solidFill>
+            <a:srgbClr val="8B8DFF"/>
+          </a:solidFill>
+          <a:ln/>
+        </p:spPr>
+      </p:sp>
+      <p:sp>
+        <p:nvSpPr>
+          <p:cNvPr id="3" name="Text 1"/>
+          <p:cNvSpPr/>
+          <p:nvPr/>
+        </p:nvSpPr>
+        <p:spPr>
+          <a:xfrm>
+            <a:off x="804672" y="457200"/>
+            <a:ext cx="10058400" cy="274320"/>
+          </a:xfrm>
+          <a:prstGeom prst="rect">
+            <a:avLst/>
+          </a:prstGeom>
+          <a:noFill/>
+          <a:ln/>
+        </p:spPr>
+        <p:txBody>
+          <a:bodyPr wrap="square" lIns="0" tIns="0" rIns="0" bIns="0" rtlCol="0" anchor="ctr"/>
+          <a:lstStyle/>
+          <a:p>
+            <a:pPr indent="0" marL="0">
+              <a:buNone/>
+            </a:pPr>
+            <a:r>
+              <a:rPr lang="en-US" sz="1100" b="1" spc="300" kern="0" dirty="0">
+                <a:solidFill>
+                  <a:srgbClr val="8B8DFF"/>
+                </a:solidFill>
+                <a:latin typeface="Arial" pitchFamily="34" charset="0"/>
+                <a:ea typeface="Arial" pitchFamily="34" charset="-122"/>
+                <a:cs typeface="Arial" pitchFamily="34" charset="-120"/>
+              </a:rPr>
+              <a:t>HONEST SCOPE</a:t>
+            </a:r>
+            <a:endParaRPr lang="en-US" sz="1100" dirty="0"/>
+          </a:p>
+        </p:txBody>
+      </p:sp>
+      <p:sp>
+        <p:nvSpPr>
+          <p:cNvPr id="4" name="Text 2"/>
+          <p:cNvSpPr/>
+          <p:nvPr/>
+        </p:nvSpPr>
+        <p:spPr>
+          <a:xfrm>
+            <a:off x="786384" y="713232"/>
+            <a:ext cx="10972800" cy="640080"/>
+          </a:xfrm>
+          <a:prstGeom prst="rect">
+            <a:avLst/>
+          </a:prstGeom>
+          <a:noFill/>
+          <a:ln/>
+        </p:spPr>
+        <p:txBody>
+          <a:bodyPr wrap="square" lIns="0" tIns="0" rIns="0" bIns="0" rtlCol="0" anchor="ctr"/>
+          <a:lstStyle/>
+          <a:p>
+            <a:pPr indent="0" marL="0">
+              <a:buNone/>
+            </a:pPr>
+            <a:r>
+              <a:rPr lang="en-US" sz="3000" b="1" dirty="0">
+                <a:solidFill>
+                  <a:srgbClr val="ECEAF6"/>
+                </a:solidFill>
+                <a:latin typeface="Trebuchet MS" pitchFamily="34" charset="0"/>
+                <a:ea typeface="Trebuchet MS" pitchFamily="34" charset="-122"/>
+                <a:cs typeface="Trebuchet MS" pitchFamily="34" charset="-120"/>
+              </a:rPr>
+              <a:t>What’s real, what’s simulated</a:t>
+            </a:r>
+            <a:endParaRPr lang="en-US" sz="3000" dirty="0"/>
+          </a:p>
+        </p:txBody>
+      </p:sp>
+      <p:sp>
+        <p:nvSpPr>
+          <p:cNvPr id="5" name="Shape 3"/>
+          <p:cNvSpPr/>
+          <p:nvPr/>
+        </p:nvSpPr>
+        <p:spPr>
+          <a:xfrm>
+            <a:off x="548640" y="1828800"/>
+            <a:ext cx="5394960" cy="3657600"/>
+          </a:xfrm>
+          <a:prstGeom prst="roundRect">
+            <a:avLst>
+              <a:gd name="adj" fmla="val 2250"/>
+            </a:avLst>
+          </a:prstGeom>
+          <a:solidFill>
+            <a:srgbClr val="1B2433"/>
+          </a:solidFill>
+          <a:ln w="12700">
+            <a:solidFill>
+              <a:srgbClr val="2A3547"/>
+            </a:solidFill>
+            <a:prstDash val="solid"/>
+          </a:ln>
+          <a:effectLst>
+            <a:outerShdw sx="100000" sy="100000" kx="0" ky="0" algn="bl" rotWithShape="0" blurRad="114300" dist="38100" dir="5400000">
+              <a:srgbClr val="000000">
+                <a:alpha val="35000"/>
+              </a:srgbClr>
+            </a:outerShdw>
+          </a:effectLst>
+        </p:spPr>
+      </p:sp>
+      <p:sp>
+        <p:nvSpPr>
+          <p:cNvPr id="6" name="Shape 4"/>
+          <p:cNvSpPr/>
+          <p:nvPr/>
+        </p:nvSpPr>
+        <p:spPr>
+          <a:xfrm>
+            <a:off x="548640" y="1828800"/>
+            <a:ext cx="109728" cy="3657600"/>
+          </a:xfrm>
+          <a:prstGeom prst="rect">
+            <a:avLst/>
+          </a:prstGeom>
+          <a:solidFill>
+            <a:srgbClr val="FFB783"/>
+          </a:solidFill>
+          <a:ln/>
+        </p:spPr>
+      </p:sp>
+      <p:sp>
+        <p:nvSpPr>
+          <p:cNvPr id="7" name="Text 5"/>
+          <p:cNvSpPr/>
+          <p:nvPr/>
+        </p:nvSpPr>
+        <p:spPr>
+          <a:xfrm>
+            <a:off x="914400" y="2057400"/>
+            <a:ext cx="4754880" cy="365760"/>
+          </a:xfrm>
+          <a:prstGeom prst="rect">
+            <a:avLst/>
+          </a:prstGeom>
+          <a:noFill/>
+          <a:ln/>
+        </p:spPr>
+        <p:txBody>
+          <a:bodyPr wrap="square" rtlCol="0" anchor="ctr"/>
+          <a:lstStyle/>
+          <a:p>
+            <a:pPr indent="0" marL="0">
+              <a:buNone/>
+            </a:pPr>
+            <a:r>
+              <a:rPr lang="en-US" sz="1600" b="1" dirty="0">
+                <a:solidFill>
+                  <a:srgbClr val="FFB783"/>
+                </a:solidFill>
+                <a:latin typeface="Trebuchet MS" pitchFamily="34" charset="0"/>
+                <a:ea typeface="Trebuchet MS" pitchFamily="34" charset="-122"/>
+                <a:cs typeface="Trebuchet MS" pitchFamily="34" charset="-120"/>
+              </a:rPr>
+              <a:t>Simulated (clearly labelled)</a:t>
+            </a:r>
+            <a:endParaRPr lang="en-US" sz="1600" dirty="0"/>
+          </a:p>
+        </p:txBody>
+      </p:sp>
+      <p:sp>
+        <p:nvSpPr>
+          <p:cNvPr id="8" name="Text 6"/>
+          <p:cNvSpPr/>
+          <p:nvPr/>
+        </p:nvSpPr>
+        <p:spPr>
+          <a:xfrm>
+            <a:off x="914400" y="2606040"/>
+            <a:ext cx="4754880" cy="2743200"/>
+          </a:xfrm>
+          <a:prstGeom prst="rect">
+            <a:avLst/>
+          </a:prstGeom>
+          <a:noFill/>
+          <a:ln/>
+        </p:spPr>
+        <p:txBody>
+          <a:bodyPr wrap="square" rtlCol="0" anchor="t"/>
+          <a:lstStyle/>
+          <a:p>
+            <a:pPr marL="342900" indent="-342900">
+              <a:lnSpc>
+                <a:spcPts val="1900"/>
+              </a:lnSpc>
+              <a:spcAft>
+                <a:spcPts val="1200"/>
+              </a:spcAft>
+              <a:buSzPct val="100000"/>
+              <a:buChar char="•"/>
+            </a:pPr>
+            <a:r>
+              <a:rPr lang="en-US" sz="1400" dirty="0">
+                <a:solidFill>
+                  <a:srgbClr val="ECEAF6"/>
+                </a:solidFill>
+                <a:latin typeface="Arial" pitchFamily="34" charset="0"/>
+                <a:ea typeface="Arial" pitchFamily="34" charset="-122"/>
+                <a:cs typeface="Arial" pitchFamily="34" charset="-120"/>
+              </a:rPr>
+              <a:t>ERP connections (SAP / Odoo / Dynamics)</a:t>
+            </a:r>
+            <a:endParaRPr lang="en-US" sz="1400" dirty="0"/>
+          </a:p>
+          <a:p>
+            <a:pPr marL="342900" indent="-342900">
+              <a:lnSpc>
+                <a:spcPts val="1900"/>
+              </a:lnSpc>
+              <a:spcAft>
+                <a:spcPts val="1200"/>
+              </a:spcAft>
+              <a:buSzPct val="100000"/>
+              <a:buChar char="•"/>
+            </a:pPr>
+            <a:r>
+              <a:rPr lang="en-US" sz="1400" dirty="0">
+                <a:solidFill>
+                  <a:srgbClr val="ECEAF6"/>
+                </a:solidFill>
+                <a:latin typeface="Arial" pitchFamily="34" charset="0"/>
+                <a:ea typeface="Arial" pitchFamily="34" charset="-122"/>
+                <a:cs typeface="Arial" pitchFamily="34" charset="-120"/>
+              </a:rPr>
+              <a:t>Logistics / weather / port signals</a:t>
+            </a:r>
+            <a:endParaRPr lang="en-US" sz="1400" dirty="0"/>
+          </a:p>
+          <a:p>
+            <a:pPr marL="342900" indent="-342900">
+              <a:lnSpc>
+                <a:spcPts val="1900"/>
+              </a:lnSpc>
+              <a:spcAft>
+                <a:spcPts val="1200"/>
+              </a:spcAft>
+              <a:buSzPct val="100000"/>
+              <a:buChar char="•"/>
+            </a:pPr>
+            <a:r>
+              <a:rPr lang="en-US" sz="1400" dirty="0">
+                <a:solidFill>
+                  <a:srgbClr val="ECEAF6"/>
+                </a:solidFill>
+                <a:latin typeface="Arial" pitchFamily="34" charset="0"/>
+                <a:ea typeface="Arial" pitchFamily="34" charset="-122"/>
+                <a:cs typeface="Arial" pitchFamily="34" charset="-120"/>
+              </a:rPr>
+              <a:t>ML model trained on a simulated history</a:t>
+            </a:r>
+            <a:endParaRPr lang="en-US" sz="1400" dirty="0"/>
+          </a:p>
+          <a:p>
+            <a:pPr marL="342900" indent="-342900">
+              <a:lnSpc>
+                <a:spcPts val="1900"/>
+              </a:lnSpc>
+              <a:spcAft>
+                <a:spcPts val="1200"/>
+              </a:spcAft>
+              <a:buSzPct val="100000"/>
+              <a:buChar char="•"/>
+            </a:pPr>
+            <a:r>
+              <a:rPr lang="en-US" sz="1400" dirty="0">
+                <a:solidFill>
+                  <a:srgbClr val="ECEAF6"/>
+                </a:solidFill>
+                <a:latin typeface="Arial" pitchFamily="34" charset="0"/>
+                <a:ea typeface="Arial" pitchFamily="34" charset="-122"/>
+                <a:cs typeface="Arial" pitchFamily="34" charset="-120"/>
+              </a:rPr>
+              <a:t>No paid APIs used</a:t>
+            </a:r>
+            <a:endParaRPr lang="en-US" sz="1400" dirty="0"/>
+          </a:p>
+        </p:txBody>
+      </p:sp>
+      <p:sp>
+        <p:nvSpPr>
+          <p:cNvPr id="9" name="Shape 7"/>
+          <p:cNvSpPr/>
+          <p:nvPr/>
+        </p:nvSpPr>
+        <p:spPr>
+          <a:xfrm>
+            <a:off x="6217920" y="1828800"/>
+            <a:ext cx="5394960" cy="3657600"/>
+          </a:xfrm>
+          <a:prstGeom prst="roundRect">
+            <a:avLst>
+              <a:gd name="adj" fmla="val 2250"/>
+            </a:avLst>
+          </a:prstGeom>
+          <a:solidFill>
+            <a:srgbClr val="131A26"/>
+          </a:solidFill>
+          <a:ln w="12700">
+            <a:solidFill>
+              <a:srgbClr val="2A3547"/>
+            </a:solidFill>
+            <a:prstDash val="solid"/>
+          </a:ln>
+          <a:effectLst>
+            <a:outerShdw sx="100000" sy="100000" kx="0" ky="0" algn="bl" rotWithShape="0" blurRad="114300" dist="38100" dir="5400000">
+              <a:srgbClr val="000000">
+                <a:alpha val="35000"/>
+              </a:srgbClr>
+            </a:outerShdw>
+          </a:effectLst>
+        </p:spPr>
+      </p:sp>
+      <p:sp>
+        <p:nvSpPr>
+          <p:cNvPr id="10" name="Shape 8"/>
+          <p:cNvSpPr/>
+          <p:nvPr/>
+        </p:nvSpPr>
+        <p:spPr>
+          <a:xfrm>
+            <a:off x="6217920" y="1828800"/>
+            <a:ext cx="109728" cy="3657600"/>
+          </a:xfrm>
+          <a:prstGeom prst="rect">
+            <a:avLst/>
+          </a:prstGeom>
+          <a:solidFill>
+            <a:srgbClr val="5BE08C"/>
+          </a:solidFill>
+          <a:ln/>
+        </p:spPr>
+      </p:sp>
+      <p:sp>
+        <p:nvSpPr>
+          <p:cNvPr id="11" name="Text 9"/>
+          <p:cNvSpPr/>
+          <p:nvPr/>
+        </p:nvSpPr>
+        <p:spPr>
+          <a:xfrm>
+            <a:off x="6583680" y="2057400"/>
+            <a:ext cx="4846320" cy="365760"/>
+          </a:xfrm>
+          <a:prstGeom prst="rect">
+            <a:avLst/>
+          </a:prstGeom>
+          <a:noFill/>
+          <a:ln/>
+        </p:spPr>
+        <p:txBody>
+          <a:bodyPr wrap="square" rtlCol="0" anchor="ctr"/>
+          <a:lstStyle/>
+          <a:p>
+            <a:pPr indent="0" marL="0">
+              <a:buNone/>
+            </a:pPr>
+            <a:r>
+              <a:rPr lang="en-US" sz="1600" b="1" dirty="0">
+                <a:solidFill>
+                  <a:srgbClr val="5BE08C"/>
+                </a:solidFill>
+                <a:latin typeface="Trebuchet MS" pitchFamily="34" charset="0"/>
+                <a:ea typeface="Trebuchet MS" pitchFamily="34" charset="-122"/>
+                <a:cs typeface="Trebuchet MS" pitchFamily="34" charset="-120"/>
+              </a:rPr>
+              <a:t>Real &amp; production-ready</a:t>
+            </a:r>
+            <a:endParaRPr lang="en-US" sz="1600" dirty="0"/>
+          </a:p>
+        </p:txBody>
+      </p:sp>
+      <p:sp>
+        <p:nvSpPr>
+          <p:cNvPr id="12" name="Text 10"/>
+          <p:cNvSpPr/>
+          <p:nvPr/>
+        </p:nvSpPr>
+        <p:spPr>
+          <a:xfrm>
+            <a:off x="6583680" y="2606040"/>
+            <a:ext cx="4846320" cy="2743200"/>
+          </a:xfrm>
+          <a:prstGeom prst="rect">
+            <a:avLst/>
+          </a:prstGeom>
+          <a:noFill/>
+          <a:ln/>
+        </p:spPr>
+        <p:txBody>
+          <a:bodyPr wrap="square" rtlCol="0" anchor="t"/>
+          <a:lstStyle/>
+          <a:p>
+            <a:pPr marL="342900" indent="-342900">
+              <a:lnSpc>
+                <a:spcPts val="1900"/>
+              </a:lnSpc>
+              <a:spcAft>
+                <a:spcPts val="1200"/>
+              </a:spcAft>
+              <a:buSzPct val="100000"/>
+              <a:buChar char="•"/>
+            </a:pPr>
+            <a:r>
+              <a:rPr lang="en-US" sz="1400" dirty="0">
+                <a:solidFill>
+                  <a:srgbClr val="ECEAF6"/>
+                </a:solidFill>
+                <a:latin typeface="Arial" pitchFamily="34" charset="0"/>
+                <a:ea typeface="Arial" pitchFamily="34" charset="-122"/>
+                <a:cs typeface="Arial" pitchFamily="34" charset="-120"/>
+              </a:rPr>
+              <a:t>The full app, pipeline &amp; multi-agent crew</a:t>
+            </a:r>
+            <a:endParaRPr lang="en-US" sz="1400" dirty="0"/>
+          </a:p>
+          <a:p>
+            <a:pPr marL="342900" indent="-342900">
+              <a:lnSpc>
+                <a:spcPts val="1900"/>
+              </a:lnSpc>
+              <a:spcAft>
+                <a:spcPts val="1200"/>
+              </a:spcAft>
+              <a:buSzPct val="100000"/>
+              <a:buChar char="•"/>
+            </a:pPr>
+            <a:r>
+              <a:rPr lang="en-US" sz="1400" dirty="0">
+                <a:solidFill>
+                  <a:srgbClr val="ECEAF6"/>
+                </a:solidFill>
+                <a:latin typeface="Arial" pitchFamily="34" charset="0"/>
+                <a:ea typeface="Arial" pitchFamily="34" charset="-122"/>
+                <a:cs typeface="Arial" pitchFamily="34" charset="-120"/>
+              </a:rPr>
+              <a:t>The connector code (point env at a real system)</a:t>
+            </a:r>
+            <a:endParaRPr lang="en-US" sz="1400" dirty="0"/>
+          </a:p>
+          <a:p>
+            <a:pPr marL="342900" indent="-342900">
+              <a:lnSpc>
+                <a:spcPts val="1900"/>
+              </a:lnSpc>
+              <a:spcAft>
+                <a:spcPts val="1200"/>
+              </a:spcAft>
+              <a:buSzPct val="100000"/>
+              <a:buChar char="•"/>
+            </a:pPr>
+            <a:r>
+              <a:rPr lang="en-US" sz="1400" dirty="0">
+                <a:solidFill>
+                  <a:srgbClr val="ECEAF6"/>
+                </a:solidFill>
+                <a:latin typeface="Arial" pitchFamily="34" charset="0"/>
+                <a:ea typeface="Arial" pitchFamily="34" charset="-122"/>
+                <a:cs typeface="Arial" pitchFamily="34" charset="-120"/>
+              </a:rPr>
+              <a:t>The ML pipeline (features → train → predict → explain)</a:t>
+            </a:r>
+            <a:endParaRPr lang="en-US" sz="1400" dirty="0"/>
+          </a:p>
+          <a:p>
+            <a:pPr marL="342900" indent="-342900">
+              <a:lnSpc>
+                <a:spcPts val="1900"/>
+              </a:lnSpc>
+              <a:spcAft>
+                <a:spcPts val="1200"/>
+              </a:spcAft>
+              <a:buSzPct val="100000"/>
+              <a:buChar char="•"/>
+            </a:pPr>
+            <a:r>
+              <a:rPr lang="en-US" sz="1400" dirty="0">
+                <a:solidFill>
+                  <a:srgbClr val="ECEAF6"/>
+                </a:solidFill>
+                <a:latin typeface="Arial" pitchFamily="34" charset="0"/>
+                <a:ea typeface="Arial" pitchFamily="34" charset="-122"/>
+                <a:cs typeface="Arial" pitchFamily="34" charset="-120"/>
+              </a:rPr>
+              <a:t>Deployed, autonomous &amp; secured on a live VPS</a:t>
+            </a:r>
+            <a:endParaRPr lang="en-US" sz="1400" dirty="0"/>
+          </a:p>
+        </p:txBody>
+      </p:sp>
+      <p:sp>
+        <p:nvSpPr>
+          <p:cNvPr id="13" name="Text 11"/>
+          <p:cNvSpPr/>
+          <p:nvPr/>
+        </p:nvSpPr>
+        <p:spPr>
+          <a:xfrm>
+            <a:off x="11274552" y="6400800"/>
+            <a:ext cx="548640" cy="274320"/>
+          </a:xfrm>
+          <a:prstGeom prst="rect">
+            <a:avLst/>
+          </a:prstGeom>
+          <a:noFill/>
+          <a:ln/>
+        </p:spPr>
+        <p:txBody>
+          <a:bodyPr wrap="square" rtlCol="0" anchor="ctr"/>
+          <a:lstStyle/>
+          <a:p>
+            <a:pPr algn="r" indent="0" marL="0">
+              <a:buNone/>
+            </a:pPr>
+            <a:r>
+              <a:rPr lang="en-US" sz="900" dirty="0">
+                <a:solidFill>
+                  <a:srgbClr val="8694A8"/>
+                </a:solidFill>
+                <a:latin typeface="Arial" pitchFamily="34" charset="0"/>
+                <a:ea typeface="Arial" pitchFamily="34" charset="-122"/>
+                <a:cs typeface="Arial" pitchFamily="34" charset="-120"/>
+              </a:rPr>
+              <a:t>12</a:t>
+            </a:r>
+            <a:endParaRPr lang="en-US" sz="900" dirty="0"/>
+          </a:p>
+        </p:txBody>
+      </p:sp>
+      <p:sp>
+        <p:nvSpPr>
+          <p:cNvPr id="14" name="Text 12"/>
+          <p:cNvSpPr/>
+          <p:nvPr/>
+        </p:nvSpPr>
+        <p:spPr>
+          <a:xfrm>
+            <a:off x="548640" y="6400800"/>
+            <a:ext cx="6400800" cy="274320"/>
+          </a:xfrm>
+          <a:prstGeom prst="rect">
+            <a:avLst/>
+          </a:prstGeom>
+          <a:noFill/>
+          <a:ln/>
+        </p:spPr>
+        <p:txBody>
+          <a:bodyPr wrap="square" rtlCol="0" anchor="ctr"/>
+          <a:lstStyle/>
+          <a:p>
+            <a:pPr indent="0" marL="0">
+              <a:buNone/>
+            </a:pPr>
+            <a:r>
+              <a:rPr lang="en-US" sz="900" dirty="0">
+                <a:solidFill>
+                  <a:srgbClr val="8694A8"/>
+                </a:solidFill>
+                <a:latin typeface="Arial" pitchFamily="34" charset="0"/>
+                <a:ea typeface="Arial" pitchFamily="34" charset="-122"/>
+                <a:cs typeface="Arial" pitchFamily="34" charset="-120"/>
+              </a:rPr>
+              <a:t>Supply Chain Risk Console · Agentic AI</a:t>
+            </a:r>
+            <a:endParaRPr lang="en-US" sz="900" dirty="0"/>
+          </a:p>
+        </p:txBody>
+      </p:sp>
+    </p:spTree>
+  </p:cSld>
+  <p:clrMapOvr>
+    <a:masterClrMapping/>
+  </p:clrMapOvr>
+</p:sld>
+</file>
+
+<file path=ppt/slides/slide15.xml><?xml version="1.0" encoding="utf-8"?>
+<p:sld xmlns:a="http://schemas.openxmlformats.org/drawingml/2006/main" xmlns:r="http://schemas.openxmlformats.org/officeDocument/2006/relationships" xmlns:p="http://schemas.openxmlformats.org/presentationml/2006/main">
+  <p:cSld name="Slide 15">
+    <p:bg>
+      <p:bgPr>
+        <a:solidFill>
+          <a:srgbClr val="0A0E16"/>
+        </a:solidFill>
+      </p:bgPr>
+    </p:bg>
+    <p:spTree>
+      <p:nvGrpSpPr>
+        <p:cNvPr id="1" name=""/>
+        <p:cNvGrpSpPr/>
+        <p:nvPr/>
+      </p:nvGrpSpPr>
+      <p:grpSpPr>
+        <a:xfrm>
+          <a:off x="0" y="0"/>
+          <a:ext cx="0" cy="0"/>
+          <a:chOff x="0" y="0"/>
+          <a:chExt cx="0" cy="0"/>
+        </a:xfrm>
+      </p:grpSpPr>
+      <p:sp>
+        <p:nvSpPr>
+          <p:cNvPr id="2" name="Shape 0"/>
+          <p:cNvSpPr/>
+          <p:nvPr/>
+        </p:nvSpPr>
+        <p:spPr>
+          <a:xfrm>
             <a:off x="0" y="0"/>
             <a:ext cx="12188952" cy="201168"/>
           </a:xfrm>
@@ -10714,7 +11451,7 @@
                 <a:ea typeface="Arial" pitchFamily="34" charset="-122"/>
                 <a:cs typeface="Arial" pitchFamily="34" charset="-120"/>
               </a:rPr>
-              <a:t>Primary: Ollama kimi-k2.7-code (on the VPS, fast, uncapped)</a:t>
+              <a:t>Primary: Ollama on the VPS — kimi-k2.7-code (fast) + glm-5.1 (tool-calling). No quota wall.</a:t>
             </a:r>
             <a:endParaRPr lang="en-US" sz="1250" dirty="0"/>
           </a:p>
@@ -10738,7 +11475,7 @@
                 <a:ea typeface="Arial" pitchFamily="34" charset="-122"/>
                 <a:cs typeface="Arial" pitchFamily="34" charset="-120"/>
               </a:rPr>
-              <a:t>Automatic fallback: Google Gemini 2.5 Flash-Lite</a:t>
+              <a:t>Automatic fallback: Google Gemini (2 free keys)</a:t>
             </a:r>
             <a:endParaRPr lang="en-US" sz="1250" dirty="0"/>
           </a:p>
@@ -10881,7 +11618,7 @@
                 <a:ea typeface="Arial" pitchFamily="34" charset="-122"/>
                 <a:cs typeface="Arial" pitchFamily="34" charset="-120"/>
               </a:rPr>
-              <a:t>Agents have no tools/secrets — injection can’t take actions</a:t>
+              <a:t>Agents' tools are read-only &amp; no secrets — injection can’t take real-world actions</a:t>
             </a:r>
             <a:endParaRPr lang="en-US" sz="1250" dirty="0"/>
           </a:p>
@@ -11050,7 +11787,7 @@
                 <a:ea typeface="Arial" pitchFamily="34" charset="-122"/>
                 <a:cs typeface="Arial" pitchFamily="34" charset="-120"/>
               </a:rPr>
-              <a:t>INTEGRATIONS</a:t>
+              <a:t>TRUE AGENTIC TOOL-USE</a:t>
             </a:r>
             <a:endParaRPr lang="en-US" sz="1100" dirty="0"/>
           </a:p>
@@ -11089,7 +11826,7 @@
                 <a:ea typeface="Trebuchet MS" pitchFamily="34" charset="-122"/>
                 <a:cs typeface="Trebuchet MS" pitchFamily="34" charset="-120"/>
               </a:rPr>
-              <a:t>Plug in any supply-chain data source</a:t>
+              <a:t>Control Tower — a 4-agent crew that calls tools</a:t>
             </a:r>
             <a:endParaRPr lang="en-US" sz="3000" dirty="0"/>
           </a:p>
@@ -11103,16 +11840,484 @@
         </p:nvSpPr>
         <p:spPr>
           <a:xfrm>
-            <a:off x="548640" y="1828800"/>
-            <a:ext cx="3529584" cy="1417320"/>
+            <a:off x="548640" y="1783080"/>
+            <a:ext cx="2487168" cy="868680"/>
           </a:xfrm>
           <a:prstGeom prst="roundRect">
             <a:avLst>
-              <a:gd name="adj" fmla="val 5806"/>
+              <a:gd name="adj" fmla="val 10526"/>
             </a:avLst>
           </a:prstGeom>
           <a:solidFill>
-            <a:srgbClr val="1B2433"/>
+            <a:srgbClr val="131A26"/>
+          </a:solidFill>
+          <a:ln w="12700">
+            <a:solidFill>
+              <a:srgbClr val="8B8DFF"/>
+            </a:solidFill>
+            <a:prstDash val="solid"/>
+          </a:ln>
+          <a:effectLst>
+            <a:outerShdw sx="100000" sy="100000" kx="0" ky="0" algn="bl" rotWithShape="0" blurRad="114300" dist="38100" dir="5400000">
+              <a:srgbClr val="000000">
+                <a:alpha val="35000"/>
+              </a:srgbClr>
+            </a:outerShdw>
+          </a:effectLst>
+        </p:spPr>
+      </p:sp>
+      <p:sp>
+        <p:nvSpPr>
+          <p:cNvPr id="6" name="Text 4"/>
+          <p:cNvSpPr/>
+          <p:nvPr/>
+        </p:nvSpPr>
+        <p:spPr>
+          <a:xfrm>
+            <a:off x="621792" y="1783080"/>
+            <a:ext cx="2340864" cy="868680"/>
+          </a:xfrm>
+          <a:prstGeom prst="rect">
+            <a:avLst/>
+          </a:prstGeom>
+          <a:noFill/>
+          <a:ln/>
+        </p:spPr>
+        <p:txBody>
+          <a:bodyPr wrap="square" rtlCol="0" anchor="ctr"/>
+          <a:lstStyle/>
+          <a:p>
+            <a:pPr algn="ctr" indent="0" marL="0">
+              <a:buNone/>
+            </a:pPr>
+            <a:r>
+              <a:rPr lang="en-US" sz="1400" b="1" dirty="0">
+                <a:solidFill>
+                  <a:srgbClr val="C0C1FF"/>
+                </a:solidFill>
+                <a:latin typeface="Trebuchet MS" pitchFamily="34" charset="0"/>
+                <a:ea typeface="Trebuchet MS" pitchFamily="34" charset="-122"/>
+                <a:cs typeface="Trebuchet MS" pitchFamily="34" charset="-120"/>
+              </a:rPr>
+              <a:t>1 · Aggregator</a:t>
+            </a:r>
+            <a:endParaRPr lang="en-US" sz="1400" dirty="0"/>
+          </a:p>
+        </p:txBody>
+      </p:sp>
+      <p:sp>
+        <p:nvSpPr>
+          <p:cNvPr id="7" name="Text 5"/>
+          <p:cNvSpPr/>
+          <p:nvPr/>
+        </p:nvSpPr>
+        <p:spPr>
+          <a:xfrm>
+            <a:off x="3044952" y="1783080"/>
+            <a:ext cx="310896" cy="868680"/>
+          </a:xfrm>
+          <a:prstGeom prst="rect">
+            <a:avLst/>
+          </a:prstGeom>
+          <a:noFill/>
+          <a:ln/>
+        </p:spPr>
+        <p:txBody>
+          <a:bodyPr wrap="square" rtlCol="0" anchor="ctr"/>
+          <a:lstStyle/>
+          <a:p>
+            <a:pPr algn="ctr" indent="0" marL="0">
+              <a:buNone/>
+            </a:pPr>
+            <a:r>
+              <a:rPr lang="en-US" sz="2000" dirty="0">
+                <a:solidFill>
+                  <a:srgbClr val="8B8DFF"/>
+                </a:solidFill>
+                <a:latin typeface="Trebuchet MS" pitchFamily="34" charset="0"/>
+                <a:ea typeface="Trebuchet MS" pitchFamily="34" charset="-122"/>
+                <a:cs typeface="Trebuchet MS" pitchFamily="34" charset="-120"/>
+              </a:rPr>
+              <a:t>→</a:t>
+            </a:r>
+            <a:endParaRPr lang="en-US" sz="2000" dirty="0"/>
+          </a:p>
+        </p:txBody>
+      </p:sp>
+      <p:sp>
+        <p:nvSpPr>
+          <p:cNvPr id="8" name="Shape 6"/>
+          <p:cNvSpPr/>
+          <p:nvPr/>
+        </p:nvSpPr>
+        <p:spPr>
+          <a:xfrm>
+            <a:off x="3364992" y="1783080"/>
+            <a:ext cx="2487168" cy="868680"/>
+          </a:xfrm>
+          <a:prstGeom prst="roundRect">
+            <a:avLst>
+              <a:gd name="adj" fmla="val 10526"/>
+            </a:avLst>
+          </a:prstGeom>
+          <a:solidFill>
+            <a:srgbClr val="131A26"/>
+          </a:solidFill>
+          <a:ln w="12700">
+            <a:solidFill>
+              <a:srgbClr val="8B8DFF"/>
+            </a:solidFill>
+            <a:prstDash val="solid"/>
+          </a:ln>
+          <a:effectLst>
+            <a:outerShdw sx="100000" sy="100000" kx="0" ky="0" algn="bl" rotWithShape="0" blurRad="114300" dist="38100" dir="5400000">
+              <a:srgbClr val="000000">
+                <a:alpha val="35000"/>
+              </a:srgbClr>
+            </a:outerShdw>
+          </a:effectLst>
+        </p:spPr>
+      </p:sp>
+      <p:sp>
+        <p:nvSpPr>
+          <p:cNvPr id="9" name="Text 7"/>
+          <p:cNvSpPr/>
+          <p:nvPr/>
+        </p:nvSpPr>
+        <p:spPr>
+          <a:xfrm>
+            <a:off x="3438144" y="1783080"/>
+            <a:ext cx="2340864" cy="868680"/>
+          </a:xfrm>
+          <a:prstGeom prst="rect">
+            <a:avLst/>
+          </a:prstGeom>
+          <a:noFill/>
+          <a:ln/>
+        </p:spPr>
+        <p:txBody>
+          <a:bodyPr wrap="square" rtlCol="0" anchor="ctr"/>
+          <a:lstStyle/>
+          <a:p>
+            <a:pPr algn="ctr" indent="0" marL="0">
+              <a:buNone/>
+            </a:pPr>
+            <a:r>
+              <a:rPr lang="en-US" sz="1400" b="1" dirty="0">
+                <a:solidFill>
+                  <a:srgbClr val="C0C1FF"/>
+                </a:solidFill>
+                <a:latin typeface="Trebuchet MS" pitchFamily="34" charset="0"/>
+                <a:ea typeface="Trebuchet MS" pitchFamily="34" charset="-122"/>
+                <a:cs typeface="Trebuchet MS" pitchFamily="34" charset="-120"/>
+              </a:rPr>
+              <a:t>2 · Tier-2 Analyst</a:t>
+            </a:r>
+            <a:endParaRPr lang="en-US" sz="1400" dirty="0"/>
+          </a:p>
+        </p:txBody>
+      </p:sp>
+      <p:sp>
+        <p:nvSpPr>
+          <p:cNvPr id="10" name="Text 8"/>
+          <p:cNvSpPr/>
+          <p:nvPr/>
+        </p:nvSpPr>
+        <p:spPr>
+          <a:xfrm>
+            <a:off x="5861304" y="1783080"/>
+            <a:ext cx="310896" cy="868680"/>
+          </a:xfrm>
+          <a:prstGeom prst="rect">
+            <a:avLst/>
+          </a:prstGeom>
+          <a:noFill/>
+          <a:ln/>
+        </p:spPr>
+        <p:txBody>
+          <a:bodyPr wrap="square" rtlCol="0" anchor="ctr"/>
+          <a:lstStyle/>
+          <a:p>
+            <a:pPr algn="ctr" indent="0" marL="0">
+              <a:buNone/>
+            </a:pPr>
+            <a:r>
+              <a:rPr lang="en-US" sz="2000" dirty="0">
+                <a:solidFill>
+                  <a:srgbClr val="8B8DFF"/>
+                </a:solidFill>
+                <a:latin typeface="Trebuchet MS" pitchFamily="34" charset="0"/>
+                <a:ea typeface="Trebuchet MS" pitchFamily="34" charset="-122"/>
+                <a:cs typeface="Trebuchet MS" pitchFamily="34" charset="-120"/>
+              </a:rPr>
+              <a:t>→</a:t>
+            </a:r>
+            <a:endParaRPr lang="en-US" sz="2000" dirty="0"/>
+          </a:p>
+        </p:txBody>
+      </p:sp>
+      <p:sp>
+        <p:nvSpPr>
+          <p:cNvPr id="11" name="Shape 9"/>
+          <p:cNvSpPr/>
+          <p:nvPr/>
+        </p:nvSpPr>
+        <p:spPr>
+          <a:xfrm>
+            <a:off x="6181344" y="1783080"/>
+            <a:ext cx="2487168" cy="868680"/>
+          </a:xfrm>
+          <a:prstGeom prst="roundRect">
+            <a:avLst>
+              <a:gd name="adj" fmla="val 10526"/>
+            </a:avLst>
+          </a:prstGeom>
+          <a:solidFill>
+            <a:srgbClr val="131A26"/>
+          </a:solidFill>
+          <a:ln w="12700">
+            <a:solidFill>
+              <a:srgbClr val="8B8DFF"/>
+            </a:solidFill>
+            <a:prstDash val="solid"/>
+          </a:ln>
+          <a:effectLst>
+            <a:outerShdw sx="100000" sy="100000" kx="0" ky="0" algn="bl" rotWithShape="0" blurRad="114300" dist="38100" dir="5400000">
+              <a:srgbClr val="000000">
+                <a:alpha val="35000"/>
+              </a:srgbClr>
+            </a:outerShdw>
+          </a:effectLst>
+        </p:spPr>
+      </p:sp>
+      <p:sp>
+        <p:nvSpPr>
+          <p:cNvPr id="12" name="Text 10"/>
+          <p:cNvSpPr/>
+          <p:nvPr/>
+        </p:nvSpPr>
+        <p:spPr>
+          <a:xfrm>
+            <a:off x="6254496" y="1783080"/>
+            <a:ext cx="2340864" cy="868680"/>
+          </a:xfrm>
+          <a:prstGeom prst="rect">
+            <a:avLst/>
+          </a:prstGeom>
+          <a:noFill/>
+          <a:ln/>
+        </p:spPr>
+        <p:txBody>
+          <a:bodyPr wrap="square" rtlCol="0" anchor="ctr"/>
+          <a:lstStyle/>
+          <a:p>
+            <a:pPr algn="ctr" indent="0" marL="0">
+              <a:buNone/>
+            </a:pPr>
+            <a:r>
+              <a:rPr lang="en-US" sz="1400" b="1" dirty="0">
+                <a:solidFill>
+                  <a:srgbClr val="C0C1FF"/>
+                </a:solidFill>
+                <a:latin typeface="Trebuchet MS" pitchFamily="34" charset="0"/>
+                <a:ea typeface="Trebuchet MS" pitchFamily="34" charset="-122"/>
+                <a:cs typeface="Trebuchet MS" pitchFamily="34" charset="-120"/>
+              </a:rPr>
+              <a:t>3 · Forecaster</a:t>
+            </a:r>
+            <a:endParaRPr lang="en-US" sz="1400" dirty="0"/>
+          </a:p>
+        </p:txBody>
+      </p:sp>
+      <p:sp>
+        <p:nvSpPr>
+          <p:cNvPr id="13" name="Text 11"/>
+          <p:cNvSpPr/>
+          <p:nvPr/>
+        </p:nvSpPr>
+        <p:spPr>
+          <a:xfrm>
+            <a:off x="8677656" y="1783080"/>
+            <a:ext cx="310896" cy="868680"/>
+          </a:xfrm>
+          <a:prstGeom prst="rect">
+            <a:avLst/>
+          </a:prstGeom>
+          <a:noFill/>
+          <a:ln/>
+        </p:spPr>
+        <p:txBody>
+          <a:bodyPr wrap="square" rtlCol="0" anchor="ctr"/>
+          <a:lstStyle/>
+          <a:p>
+            <a:pPr algn="ctr" indent="0" marL="0">
+              <a:buNone/>
+            </a:pPr>
+            <a:r>
+              <a:rPr lang="en-US" sz="2000" dirty="0">
+                <a:solidFill>
+                  <a:srgbClr val="8B8DFF"/>
+                </a:solidFill>
+                <a:latin typeface="Trebuchet MS" pitchFamily="34" charset="0"/>
+                <a:ea typeface="Trebuchet MS" pitchFamily="34" charset="-122"/>
+                <a:cs typeface="Trebuchet MS" pitchFamily="34" charset="-120"/>
+              </a:rPr>
+              <a:t>→</a:t>
+            </a:r>
+            <a:endParaRPr lang="en-US" sz="2000" dirty="0"/>
+          </a:p>
+        </p:txBody>
+      </p:sp>
+      <p:sp>
+        <p:nvSpPr>
+          <p:cNvPr id="14" name="Shape 12"/>
+          <p:cNvSpPr/>
+          <p:nvPr/>
+        </p:nvSpPr>
+        <p:spPr>
+          <a:xfrm>
+            <a:off x="8997696" y="1783080"/>
+            <a:ext cx="2487168" cy="868680"/>
+          </a:xfrm>
+          <a:prstGeom prst="roundRect">
+            <a:avLst>
+              <a:gd name="adj" fmla="val 10526"/>
+            </a:avLst>
+          </a:prstGeom>
+          <a:solidFill>
+            <a:srgbClr val="131A26"/>
+          </a:solidFill>
+          <a:ln w="12700">
+            <a:solidFill>
+              <a:srgbClr val="8B8DFF"/>
+            </a:solidFill>
+            <a:prstDash val="solid"/>
+          </a:ln>
+          <a:effectLst>
+            <a:outerShdw sx="100000" sy="100000" kx="0" ky="0" algn="bl" rotWithShape="0" blurRad="114300" dist="38100" dir="5400000">
+              <a:srgbClr val="000000">
+                <a:alpha val="35000"/>
+              </a:srgbClr>
+            </a:outerShdw>
+          </a:effectLst>
+        </p:spPr>
+      </p:sp>
+      <p:sp>
+        <p:nvSpPr>
+          <p:cNvPr id="15" name="Text 13"/>
+          <p:cNvSpPr/>
+          <p:nvPr/>
+        </p:nvSpPr>
+        <p:spPr>
+          <a:xfrm>
+            <a:off x="9070848" y="1783080"/>
+            <a:ext cx="2340864" cy="868680"/>
+          </a:xfrm>
+          <a:prstGeom prst="rect">
+            <a:avLst/>
+          </a:prstGeom>
+          <a:noFill/>
+          <a:ln/>
+        </p:spPr>
+        <p:txBody>
+          <a:bodyPr wrap="square" rtlCol="0" anchor="ctr"/>
+          <a:lstStyle/>
+          <a:p>
+            <a:pPr algn="ctr" indent="0" marL="0">
+              <a:buNone/>
+            </a:pPr>
+            <a:r>
+              <a:rPr lang="en-US" sz="1400" b="1" dirty="0">
+                <a:solidFill>
+                  <a:srgbClr val="C0C1FF"/>
+                </a:solidFill>
+                <a:latin typeface="Trebuchet MS" pitchFamily="34" charset="0"/>
+                <a:ea typeface="Trebuchet MS" pitchFamily="34" charset="-122"/>
+                <a:cs typeface="Trebuchet MS" pitchFamily="34" charset="-120"/>
+              </a:rPr>
+              <a:t>4 · Mitigation Planner</a:t>
+            </a:r>
+            <a:endParaRPr lang="en-US" sz="1400" dirty="0"/>
+          </a:p>
+        </p:txBody>
+      </p:sp>
+      <p:sp>
+        <p:nvSpPr>
+          <p:cNvPr id="16" name="Text 14"/>
+          <p:cNvSpPr/>
+          <p:nvPr/>
+        </p:nvSpPr>
+        <p:spPr>
+          <a:xfrm>
+            <a:off x="548640" y="2926080"/>
+            <a:ext cx="11064240" cy="548640"/>
+          </a:xfrm>
+          <a:prstGeom prst="rect">
+            <a:avLst/>
+          </a:prstGeom>
+          <a:noFill/>
+          <a:ln/>
+        </p:spPr>
+        <p:txBody>
+          <a:bodyPr wrap="square" rtlCol="0" anchor="t"/>
+          <a:lstStyle/>
+          <a:p>
+            <a:pPr indent="0" marL="0">
+              <a:lnSpc>
+                <a:spcPts val="2000"/>
+              </a:lnSpc>
+              <a:buNone/>
+            </a:pPr>
+            <a:r>
+              <a:rPr lang="en-US" sz="1450" b="1" dirty="0">
+                <a:solidFill>
+                  <a:srgbClr val="ECEAF6"/>
+                </a:solidFill>
+                <a:latin typeface="Arial" pitchFamily="34" charset="0"/>
+                <a:ea typeface="Arial" pitchFamily="34" charset="-122"/>
+                <a:cs typeface="Arial" pitchFamily="34" charset="-120"/>
+              </a:rPr>
+              <a:t>Each agent autonomously CALLS TOOLS</a:t>
+            </a:r>
+            <a:pPr indent="0" marL="0">
+              <a:lnSpc>
+                <a:spcPts val="2000"/>
+              </a:lnSpc>
+              <a:buNone/>
+            </a:pPr>
+            <a:r>
+              <a:rPr lang="en-US" sz="1450" dirty="0">
+                <a:solidFill>
+                  <a:srgbClr val="AAB4C8"/>
+                </a:solidFill>
+                <a:latin typeface="Arial" pitchFamily="34" charset="0"/>
+                <a:ea typeface="Arial" pitchFamily="34" charset="-122"/>
+                <a:cs typeface="Arial" pitchFamily="34" charset="-120"/>
+              </a:rPr>
+              <a:t> to read fragmented sources — EDI feed · supplier emails · spreadsheet — exactly how CrewAI agents are meant to work.</a:t>
+            </a:r>
+            <a:endParaRPr lang="en-US" sz="1450" dirty="0"/>
+          </a:p>
+        </p:txBody>
+      </p:sp>
+      <p:sp>
+        <p:nvSpPr>
+          <p:cNvPr id="17" name="Shape 15"/>
+          <p:cNvSpPr/>
+          <p:nvPr/>
+        </p:nvSpPr>
+        <p:spPr>
+          <a:xfrm>
+            <a:off x="548640" y="3703320"/>
+            <a:ext cx="11064240" cy="1874520"/>
+          </a:xfrm>
+          <a:prstGeom prst="roundRect">
+            <a:avLst>
+              <a:gd name="adj" fmla="val 4390"/>
+            </a:avLst>
+          </a:prstGeom>
+          <a:solidFill>
+            <a:srgbClr val="131A26"/>
           </a:solidFill>
           <a:ln w="12700">
             <a:solidFill>
@@ -11131,34 +12336,34 @@
       </p:sp>
       <p:sp>
         <p:nvSpPr>
-          <p:cNvPr id="6" name="Shape 4"/>
-          <p:cNvSpPr/>
-          <p:nvPr/>
-        </p:nvSpPr>
-        <p:spPr>
-          <a:xfrm>
-            <a:off x="548640" y="2057400"/>
-            <a:ext cx="91440" cy="960120"/>
+          <p:cNvPr id="18" name="Shape 16"/>
+          <p:cNvSpPr/>
+          <p:nvPr/>
+        </p:nvSpPr>
+        <p:spPr>
+          <a:xfrm>
+            <a:off x="548640" y="3703320"/>
+            <a:ext cx="128016" cy="1874520"/>
           </a:xfrm>
           <a:prstGeom prst="rect">
             <a:avLst/>
           </a:prstGeom>
           <a:solidFill>
-            <a:srgbClr val="8B8DFF"/>
+            <a:srgbClr val="FFB783"/>
           </a:solidFill>
           <a:ln/>
         </p:spPr>
       </p:sp>
       <p:sp>
         <p:nvSpPr>
-          <p:cNvPr id="7" name="Text 5"/>
-          <p:cNvSpPr/>
-          <p:nvPr/>
-        </p:nvSpPr>
-        <p:spPr>
-          <a:xfrm>
-            <a:off x="822960" y="2029968"/>
-            <a:ext cx="3072384" cy="365760"/>
+          <p:cNvPr id="19" name="Text 17"/>
+          <p:cNvSpPr/>
+          <p:nvPr/>
+        </p:nvSpPr>
+        <p:spPr>
+          <a:xfrm>
+            <a:off x="914400" y="3886200"/>
+            <a:ext cx="10424160" cy="365760"/>
           </a:xfrm>
           <a:prstGeom prst="rect">
             <a:avLst/>
@@ -11174,184 +12379,66 @@
               <a:buNone/>
             </a:pPr>
             <a:r>
-              <a:rPr lang="en-US" sz="1500" b="1" dirty="0">
-                <a:solidFill>
-                  <a:srgbClr val="ECEAF6"/>
+              <a:rPr lang="en-US" sz="1600" b="1" dirty="0">
+                <a:solidFill>
+                  <a:srgbClr val="FFB783"/>
                 </a:solidFill>
                 <a:latin typeface="Trebuchet MS" pitchFamily="34" charset="0"/>
                 <a:ea typeface="Trebuchet MS" pitchFamily="34" charset="-122"/>
                 <a:cs typeface="Trebuchet MS" pitchFamily="34" charset="-120"/>
               </a:rPr>
-              <a:t>Upload CSV / XLSX</a:t>
-            </a:r>
-            <a:endParaRPr lang="en-US" sz="1500" dirty="0"/>
-          </a:p>
-        </p:txBody>
-      </p:sp>
-      <p:sp>
-        <p:nvSpPr>
-          <p:cNvPr id="8" name="Text 6"/>
-          <p:cNvSpPr/>
-          <p:nvPr/>
-        </p:nvSpPr>
-        <p:spPr>
-          <a:xfrm>
-            <a:off x="822960" y="2432304"/>
-            <a:ext cx="3072384" cy="731520"/>
-          </a:xfrm>
-          <a:prstGeom prst="rect">
-            <a:avLst/>
-          </a:prstGeom>
-          <a:noFill/>
-          <a:ln/>
-        </p:spPr>
-        <p:txBody>
-          <a:bodyPr wrap="square" rtlCol="0" anchor="ctr"/>
+              <a:t>Hidden risk the agents surfaced — invisible in any single source</a:t>
+            </a:r>
+            <a:endParaRPr lang="en-US" sz="1600" dirty="0"/>
+          </a:p>
+        </p:txBody>
+      </p:sp>
+      <p:sp>
+        <p:nvSpPr>
+          <p:cNvPr id="20" name="Text 18"/>
+          <p:cNvSpPr/>
+          <p:nvPr/>
+        </p:nvSpPr>
+        <p:spPr>
+          <a:xfrm>
+            <a:off x="914400" y="4370832"/>
+            <a:ext cx="10424160" cy="1097280"/>
+          </a:xfrm>
+          <a:prstGeom prst="rect">
+            <a:avLst/>
+          </a:prstGeom>
+          <a:noFill/>
+          <a:ln/>
+        </p:spPr>
+        <p:txBody>
+          <a:bodyPr wrap="square" rtlCol="0" anchor="t"/>
           <a:lstStyle/>
           <a:p>
             <a:pPr indent="0" marL="0">
               <a:lnSpc>
-                <a:spcPts val="1500"/>
+                <a:spcPts val="2200"/>
               </a:lnSpc>
               <a:buNone/>
             </a:pPr>
             <a:r>
-              <a:rPr lang="en-US" sz="1200" dirty="0">
-                <a:solidFill>
-                  <a:srgbClr val="AAB4C8"/>
+              <a:rPr lang="en-US" sz="1500" b="1" dirty="0">
+                <a:solidFill>
+                  <a:srgbClr val="ECEAF6"/>
                 </a:solidFill>
                 <a:latin typeface="Arial" pitchFamily="34" charset="0"/>
                 <a:ea typeface="Arial" pitchFamily="34" charset="-122"/>
                 <a:cs typeface="Arial" pitchFamily="34" charset="-120"/>
               </a:rPr>
-              <a:t>Arbitrary files auto-profiled (50+ columns, 50k rows).</a:t>
-            </a:r>
-            <a:endParaRPr lang="en-US" sz="1200" dirty="0"/>
-          </a:p>
-        </p:txBody>
-      </p:sp>
-      <p:sp>
-        <p:nvSpPr>
-          <p:cNvPr id="9" name="Shape 7"/>
-          <p:cNvSpPr/>
-          <p:nvPr/>
-        </p:nvSpPr>
-        <p:spPr>
-          <a:xfrm>
-            <a:off x="4352544" y="1828800"/>
-            <a:ext cx="3529584" cy="1417320"/>
-          </a:xfrm>
-          <a:prstGeom prst="roundRect">
-            <a:avLst>
-              <a:gd name="adj" fmla="val 5806"/>
-            </a:avLst>
-          </a:prstGeom>
-          <a:solidFill>
-            <a:srgbClr val="1B2433"/>
-          </a:solidFill>
-          <a:ln w="12700">
-            <a:solidFill>
-              <a:srgbClr val="2A3547"/>
-            </a:solidFill>
-            <a:prstDash val="solid"/>
-          </a:ln>
-          <a:effectLst>
-            <a:outerShdw sx="100000" sy="100000" kx="0" ky="0" algn="bl" rotWithShape="0" blurRad="114300" dist="38100" dir="5400000">
-              <a:srgbClr val="000000">
-                <a:alpha val="35000"/>
-              </a:srgbClr>
-            </a:outerShdw>
-          </a:effectLst>
-        </p:spPr>
-      </p:sp>
-      <p:sp>
-        <p:nvSpPr>
-          <p:cNvPr id="10" name="Shape 8"/>
-          <p:cNvSpPr/>
-          <p:nvPr/>
-        </p:nvSpPr>
-        <p:spPr>
-          <a:xfrm>
-            <a:off x="4352544" y="2057400"/>
-            <a:ext cx="91440" cy="960120"/>
-          </a:xfrm>
-          <a:prstGeom prst="rect">
-            <a:avLst/>
-          </a:prstGeom>
-          <a:solidFill>
-            <a:srgbClr val="8B8DFF"/>
-          </a:solidFill>
-          <a:ln/>
-        </p:spPr>
-      </p:sp>
-      <p:sp>
-        <p:nvSpPr>
-          <p:cNvPr id="11" name="Text 9"/>
-          <p:cNvSpPr/>
-          <p:nvPr/>
-        </p:nvSpPr>
-        <p:spPr>
-          <a:xfrm>
-            <a:off x="4626864" y="2029968"/>
-            <a:ext cx="3072384" cy="365760"/>
-          </a:xfrm>
-          <a:prstGeom prst="rect">
-            <a:avLst/>
-          </a:prstGeom>
-          <a:noFill/>
-          <a:ln/>
-        </p:spPr>
-        <p:txBody>
-          <a:bodyPr wrap="square" rtlCol="0" anchor="ctr"/>
-          <a:lstStyle/>
-          <a:p>
-            <a:pPr indent="0" marL="0">
-              <a:buNone/>
-            </a:pPr>
-            <a:r>
-              <a:rPr lang="en-US" sz="1500" b="1" dirty="0">
-                <a:solidFill>
-                  <a:srgbClr val="ECEAF6"/>
-                </a:solidFill>
-                <a:latin typeface="Trebuchet MS" pitchFamily="34" charset="0"/>
-                <a:ea typeface="Trebuchet MS" pitchFamily="34" charset="-122"/>
-                <a:cs typeface="Trebuchet MS" pitchFamily="34" charset="-120"/>
-              </a:rPr>
-              <a:t>SAP S/4HANA</a:t>
-            </a:r>
-            <a:endParaRPr lang="en-US" sz="1500" dirty="0"/>
-          </a:p>
-        </p:txBody>
-      </p:sp>
-      <p:sp>
-        <p:nvSpPr>
-          <p:cNvPr id="12" name="Text 10"/>
-          <p:cNvSpPr/>
-          <p:nvPr/>
-        </p:nvSpPr>
-        <p:spPr>
-          <a:xfrm>
-            <a:off x="4626864" y="2432304"/>
-            <a:ext cx="3072384" cy="731520"/>
-          </a:xfrm>
-          <a:prstGeom prst="rect">
-            <a:avLst/>
-          </a:prstGeom>
-          <a:noFill/>
-          <a:ln/>
-        </p:spPr>
-        <p:txBody>
-          <a:bodyPr wrap="square" rtlCol="0" anchor="ctr"/>
-          <a:lstStyle/>
-          <a:p>
+              <a:t>Nippon Steel Alloys</a:t>
+            </a:r>
             <a:pPr indent="0" marL="0">
               <a:lnSpc>
-                <a:spcPts val="1500"/>
+                <a:spcPts val="2200"/>
               </a:lnSpc>
               <a:buNone/>
             </a:pPr>
             <a:r>
-              <a:rPr lang="en-US" sz="1200" dirty="0">
+              <a:rPr lang="en-US" sz="1500" dirty="0">
                 <a:solidFill>
                   <a:srgbClr val="AAB4C8"/>
                 </a:solidFill>
@@ -11359,269 +12446,33 @@
                 <a:ea typeface="Arial" pitchFamily="34" charset="-122"/>
                 <a:cs typeface="Arial" pitchFamily="34" charset="-120"/>
               </a:rPr>
-              <a:t>Simulated OData feed — LIFNR / EBELN / MATNR fields.</a:t>
-            </a:r>
-            <a:endParaRPr lang="en-US" sz="1200" dirty="0"/>
-          </a:p>
-        </p:txBody>
-      </p:sp>
-      <p:sp>
-        <p:nvSpPr>
-          <p:cNvPr id="13" name="Shape 11"/>
-          <p:cNvSpPr/>
-          <p:nvPr/>
-        </p:nvSpPr>
-        <p:spPr>
-          <a:xfrm>
-            <a:off x="8156448" y="1828800"/>
-            <a:ext cx="3529584" cy="1417320"/>
-          </a:xfrm>
-          <a:prstGeom prst="roundRect">
-            <a:avLst>
-              <a:gd name="adj" fmla="val 5806"/>
-            </a:avLst>
-          </a:prstGeom>
-          <a:solidFill>
-            <a:srgbClr val="1B2433"/>
-          </a:solidFill>
-          <a:ln w="12700">
-            <a:solidFill>
-              <a:srgbClr val="2A3547"/>
-            </a:solidFill>
-            <a:prstDash val="solid"/>
-          </a:ln>
-          <a:effectLst>
-            <a:outerShdw sx="100000" sy="100000" kx="0" ky="0" algn="bl" rotWithShape="0" blurRad="114300" dist="38100" dir="5400000">
-              <a:srgbClr val="000000">
-                <a:alpha val="35000"/>
-              </a:srgbClr>
-            </a:outerShdw>
-          </a:effectLst>
-        </p:spPr>
-      </p:sp>
-      <p:sp>
-        <p:nvSpPr>
-          <p:cNvPr id="14" name="Shape 12"/>
-          <p:cNvSpPr/>
-          <p:nvPr/>
-        </p:nvSpPr>
-        <p:spPr>
-          <a:xfrm>
-            <a:off x="8156448" y="2057400"/>
-            <a:ext cx="91440" cy="960120"/>
-          </a:xfrm>
-          <a:prstGeom prst="rect">
-            <a:avLst/>
-          </a:prstGeom>
-          <a:solidFill>
-            <a:srgbClr val="8B8DFF"/>
-          </a:solidFill>
-          <a:ln/>
-        </p:spPr>
-      </p:sp>
-      <p:sp>
-        <p:nvSpPr>
-          <p:cNvPr id="15" name="Text 13"/>
-          <p:cNvSpPr/>
-          <p:nvPr/>
-        </p:nvSpPr>
-        <p:spPr>
-          <a:xfrm>
-            <a:off x="8430768" y="2029968"/>
-            <a:ext cx="3072384" cy="365760"/>
-          </a:xfrm>
-          <a:prstGeom prst="rect">
-            <a:avLst/>
-          </a:prstGeom>
-          <a:noFill/>
-          <a:ln/>
-        </p:spPr>
-        <p:txBody>
-          <a:bodyPr wrap="square" rtlCol="0" anchor="ctr"/>
-          <a:lstStyle/>
-          <a:p>
-            <a:pPr indent="0" marL="0">
-              <a:buNone/>
-            </a:pPr>
-            <a:r>
-              <a:rPr lang="en-US" sz="1500" b="1" dirty="0">
-                <a:solidFill>
-                  <a:srgbClr val="ECEAF6"/>
-                </a:solidFill>
-                <a:latin typeface="Trebuchet MS" pitchFamily="34" charset="0"/>
-                <a:ea typeface="Trebuchet MS" pitchFamily="34" charset="-122"/>
-                <a:cs typeface="Trebuchet MS" pitchFamily="34" charset="-120"/>
-              </a:rPr>
-              <a:t>Odoo</a:t>
-            </a:r>
-            <a:endParaRPr lang="en-US" sz="1500" dirty="0"/>
-          </a:p>
-        </p:txBody>
-      </p:sp>
-      <p:sp>
-        <p:nvSpPr>
-          <p:cNvPr id="16" name="Text 14"/>
-          <p:cNvSpPr/>
-          <p:nvPr/>
-        </p:nvSpPr>
-        <p:spPr>
-          <a:xfrm>
-            <a:off x="8430768" y="2432304"/>
-            <a:ext cx="3072384" cy="731520"/>
-          </a:xfrm>
-          <a:prstGeom prst="rect">
-            <a:avLst/>
-          </a:prstGeom>
-          <a:noFill/>
-          <a:ln/>
-        </p:spPr>
-        <p:txBody>
-          <a:bodyPr wrap="square" rtlCol="0" anchor="ctr"/>
-          <a:lstStyle/>
-          <a:p>
+              <a:t> is one Tier-2 alloy mill secretly feeding </a:t>
+            </a:r>
             <a:pPr indent="0" marL="0">
               <a:lnSpc>
-                <a:spcPts val="1500"/>
+                <a:spcPts val="2200"/>
               </a:lnSpc>
               <a:buNone/>
             </a:pPr>
             <a:r>
-              <a:rPr lang="en-US" sz="1200" dirty="0">
-                <a:solidFill>
-                  <a:srgbClr val="AAB4C8"/>
+              <a:rPr lang="en-US" sz="1500" b="1" dirty="0">
+                <a:solidFill>
+                  <a:srgbClr val="ECEAF6"/>
                 </a:solidFill>
                 <a:latin typeface="Arial" pitchFamily="34" charset="0"/>
                 <a:ea typeface="Arial" pitchFamily="34" charset="-122"/>
                 <a:cs typeface="Arial" pitchFamily="34" charset="-120"/>
               </a:rPr>
-              <a:t>Simulated JSON-RPC — res.partner / purchase.order.</a:t>
-            </a:r>
-            <a:endParaRPr lang="en-US" sz="1200" dirty="0"/>
-          </a:p>
-        </p:txBody>
-      </p:sp>
-      <p:sp>
-        <p:nvSpPr>
-          <p:cNvPr id="17" name="Shape 15"/>
-          <p:cNvSpPr/>
-          <p:nvPr/>
-        </p:nvSpPr>
-        <p:spPr>
-          <a:xfrm>
-            <a:off x="548640" y="3520440"/>
-            <a:ext cx="3529584" cy="1417320"/>
-          </a:xfrm>
-          <a:prstGeom prst="roundRect">
-            <a:avLst>
-              <a:gd name="adj" fmla="val 5806"/>
-            </a:avLst>
-          </a:prstGeom>
-          <a:solidFill>
-            <a:srgbClr val="1B2433"/>
-          </a:solidFill>
-          <a:ln w="12700">
-            <a:solidFill>
-              <a:srgbClr val="2A3547"/>
-            </a:solidFill>
-            <a:prstDash val="solid"/>
-          </a:ln>
-          <a:effectLst>
-            <a:outerShdw sx="100000" sy="100000" kx="0" ky="0" algn="bl" rotWithShape="0" blurRad="114300" dist="38100" dir="5400000">
-              <a:srgbClr val="000000">
-                <a:alpha val="35000"/>
-              </a:srgbClr>
-            </a:outerShdw>
-          </a:effectLst>
-        </p:spPr>
-      </p:sp>
-      <p:sp>
-        <p:nvSpPr>
-          <p:cNvPr id="18" name="Shape 16"/>
-          <p:cNvSpPr/>
-          <p:nvPr/>
-        </p:nvSpPr>
-        <p:spPr>
-          <a:xfrm>
-            <a:off x="548640" y="3749040"/>
-            <a:ext cx="91440" cy="960120"/>
-          </a:xfrm>
-          <a:prstGeom prst="rect">
-            <a:avLst/>
-          </a:prstGeom>
-          <a:solidFill>
-            <a:srgbClr val="8B8DFF"/>
-          </a:solidFill>
-          <a:ln/>
-        </p:spPr>
-      </p:sp>
-      <p:sp>
-        <p:nvSpPr>
-          <p:cNvPr id="19" name="Text 17"/>
-          <p:cNvSpPr/>
-          <p:nvPr/>
-        </p:nvSpPr>
-        <p:spPr>
-          <a:xfrm>
-            <a:off x="822960" y="3721608"/>
-            <a:ext cx="3072384" cy="365760"/>
-          </a:xfrm>
-          <a:prstGeom prst="rect">
-            <a:avLst/>
-          </a:prstGeom>
-          <a:noFill/>
-          <a:ln/>
-        </p:spPr>
-        <p:txBody>
-          <a:bodyPr wrap="square" rtlCol="0" anchor="ctr"/>
-          <a:lstStyle/>
-          <a:p>
-            <a:pPr indent="0" marL="0">
-              <a:buNone/>
-            </a:pPr>
-            <a:r>
-              <a:rPr lang="en-US" sz="1500" b="1" dirty="0">
-                <a:solidFill>
-                  <a:srgbClr val="ECEAF6"/>
-                </a:solidFill>
-                <a:latin typeface="Trebuchet MS" pitchFamily="34" charset="0"/>
-                <a:ea typeface="Trebuchet MS" pitchFamily="34" charset="-122"/>
-                <a:cs typeface="Trebuchet MS" pitchFamily="34" charset="-120"/>
-              </a:rPr>
-              <a:t>MS Dynamics 365</a:t>
-            </a:r>
-            <a:endParaRPr lang="en-US" sz="1500" dirty="0"/>
-          </a:p>
-        </p:txBody>
-      </p:sp>
-      <p:sp>
-        <p:nvSpPr>
-          <p:cNvPr id="20" name="Text 18"/>
-          <p:cNvSpPr/>
-          <p:nvPr/>
-        </p:nvSpPr>
-        <p:spPr>
-          <a:xfrm>
-            <a:off x="822960" y="4123944"/>
-            <a:ext cx="3072384" cy="731520"/>
-          </a:xfrm>
-          <a:prstGeom prst="rect">
-            <a:avLst/>
-          </a:prstGeom>
-          <a:noFill/>
-          <a:ln/>
-        </p:spPr>
-        <p:txBody>
-          <a:bodyPr wrap="square" rtlCol="0" anchor="ctr"/>
-          <a:lstStyle/>
-          <a:p>
+              <a:t>both ACME Bearings and Pacific Hydraulics</a:t>
+            </a:r>
             <a:pPr indent="0" marL="0">
               <a:lnSpc>
-                <a:spcPts val="1500"/>
+                <a:spcPts val="2200"/>
               </a:lnSpc>
               <a:buNone/>
             </a:pPr>
             <a:r>
-              <a:rPr lang="en-US" sz="1200" dirty="0">
+              <a:rPr lang="en-US" sz="1500" dirty="0">
                 <a:solidFill>
                   <a:srgbClr val="AAB4C8"/>
                 </a:solidFill>
@@ -11629,269 +12480,33 @@
                 <a:ea typeface="Arial" pitchFamily="34" charset="-122"/>
                 <a:cs typeface="Arial" pitchFamily="34" charset="-120"/>
               </a:rPr>
-              <a:t>Simulated OData v4 — VendorAccount / PurchId.</a:t>
-            </a:r>
-            <a:endParaRPr lang="en-US" sz="1200" dirty="0"/>
-          </a:p>
-        </p:txBody>
-      </p:sp>
-      <p:sp>
-        <p:nvSpPr>
-          <p:cNvPr id="21" name="Shape 19"/>
-          <p:cNvSpPr/>
-          <p:nvPr/>
-        </p:nvSpPr>
-        <p:spPr>
-          <a:xfrm>
-            <a:off x="4352544" y="3520440"/>
-            <a:ext cx="3529584" cy="1417320"/>
-          </a:xfrm>
-          <a:prstGeom prst="roundRect">
-            <a:avLst>
-              <a:gd name="adj" fmla="val 5806"/>
-            </a:avLst>
-          </a:prstGeom>
-          <a:solidFill>
-            <a:srgbClr val="1B2433"/>
-          </a:solidFill>
-          <a:ln w="12700">
-            <a:solidFill>
-              <a:srgbClr val="2A3547"/>
-            </a:solidFill>
-            <a:prstDash val="solid"/>
-          </a:ln>
-          <a:effectLst>
-            <a:outerShdw sx="100000" sy="100000" kx="0" ky="0" algn="bl" rotWithShape="0" blurRad="114300" dist="38100" dir="5400000">
-              <a:srgbClr val="000000">
-                <a:alpha val="35000"/>
-              </a:srgbClr>
-            </a:outerShdw>
-          </a:effectLst>
-        </p:spPr>
-      </p:sp>
-      <p:sp>
-        <p:nvSpPr>
-          <p:cNvPr id="22" name="Shape 20"/>
-          <p:cNvSpPr/>
-          <p:nvPr/>
-        </p:nvSpPr>
-        <p:spPr>
-          <a:xfrm>
-            <a:off x="4352544" y="3749040"/>
-            <a:ext cx="91440" cy="960120"/>
-          </a:xfrm>
-          <a:prstGeom prst="rect">
-            <a:avLst/>
-          </a:prstGeom>
-          <a:solidFill>
-            <a:srgbClr val="8B8DFF"/>
-          </a:solidFill>
-          <a:ln/>
-        </p:spPr>
-      </p:sp>
-      <p:sp>
-        <p:nvSpPr>
-          <p:cNvPr id="23" name="Text 21"/>
-          <p:cNvSpPr/>
-          <p:nvPr/>
-        </p:nvSpPr>
-        <p:spPr>
-          <a:xfrm>
-            <a:off x="4626864" y="3721608"/>
-            <a:ext cx="3072384" cy="365760"/>
-          </a:xfrm>
-          <a:prstGeom prst="rect">
-            <a:avLst/>
-          </a:prstGeom>
-          <a:noFill/>
-          <a:ln/>
-        </p:spPr>
-        <p:txBody>
-          <a:bodyPr wrap="square" rtlCol="0" anchor="ctr"/>
-          <a:lstStyle/>
-          <a:p>
-            <a:pPr indent="0" marL="0">
-              <a:buNone/>
-            </a:pPr>
-            <a:r>
-              <a:rPr lang="en-US" sz="1500" b="1" dirty="0">
-                <a:solidFill>
-                  <a:srgbClr val="ECEAF6"/>
-                </a:solidFill>
-                <a:latin typeface="Trebuchet MS" pitchFamily="34" charset="0"/>
-                <a:ea typeface="Trebuchet MS" pitchFamily="34" charset="-122"/>
-                <a:cs typeface="Trebuchet MS" pitchFamily="34" charset="-120"/>
-              </a:rPr>
-              <a:t>Public dataset (USAID)</a:t>
-            </a:r>
-            <a:endParaRPr lang="en-US" sz="1500" dirty="0"/>
-          </a:p>
-        </p:txBody>
-      </p:sp>
-      <p:sp>
-        <p:nvSpPr>
-          <p:cNvPr id="24" name="Text 22"/>
-          <p:cNvSpPr/>
-          <p:nvPr/>
-        </p:nvSpPr>
-        <p:spPr>
-          <a:xfrm>
-            <a:off x="4626864" y="4123944"/>
-            <a:ext cx="3072384" cy="731520"/>
-          </a:xfrm>
-          <a:prstGeom prst="rect">
-            <a:avLst/>
-          </a:prstGeom>
-          <a:noFill/>
-          <a:ln/>
-        </p:spPr>
-        <p:txBody>
-          <a:bodyPr wrap="square" rtlCol="0" anchor="ctr"/>
-          <a:lstStyle/>
-          <a:p>
+              <a:t>. A single outage there halts two production lines at a combined </a:t>
+            </a:r>
             <a:pPr indent="0" marL="0">
               <a:lnSpc>
-                <a:spcPts val="1500"/>
+                <a:spcPts val="2200"/>
               </a:lnSpc>
               <a:buNone/>
             </a:pPr>
             <a:r>
-              <a:rPr lang="en-US" sz="1200" dirty="0">
-                <a:solidFill>
-                  <a:srgbClr val="AAB4C8"/>
+              <a:rPr lang="en-US" sz="1500" b="1" dirty="0">
+                <a:solidFill>
+                  <a:srgbClr val="5BE08C"/>
                 </a:solidFill>
                 <a:latin typeface="Arial" pitchFamily="34" charset="0"/>
                 <a:ea typeface="Arial" pitchFamily="34" charset="-122"/>
                 <a:cs typeface="Arial" pitchFamily="34" charset="-120"/>
               </a:rPr>
-              <a:t>Real, login-free shipment-pricing CSV.</a:t>
-            </a:r>
-            <a:endParaRPr lang="en-US" sz="1200" dirty="0"/>
-          </a:p>
-        </p:txBody>
-      </p:sp>
-      <p:sp>
-        <p:nvSpPr>
-          <p:cNvPr id="25" name="Shape 23"/>
-          <p:cNvSpPr/>
-          <p:nvPr/>
-        </p:nvSpPr>
-        <p:spPr>
-          <a:xfrm>
-            <a:off x="8156448" y="3520440"/>
-            <a:ext cx="3529584" cy="1417320"/>
-          </a:xfrm>
-          <a:prstGeom prst="roundRect">
-            <a:avLst>
-              <a:gd name="adj" fmla="val 5806"/>
-            </a:avLst>
-          </a:prstGeom>
-          <a:solidFill>
-            <a:srgbClr val="1B2433"/>
-          </a:solidFill>
-          <a:ln w="12700">
-            <a:solidFill>
-              <a:srgbClr val="2A3547"/>
-            </a:solidFill>
-            <a:prstDash val="solid"/>
-          </a:ln>
-          <a:effectLst>
-            <a:outerShdw sx="100000" sy="100000" kx="0" ky="0" algn="bl" rotWithShape="0" blurRad="114300" dist="38100" dir="5400000">
-              <a:srgbClr val="000000">
-                <a:alpha val="35000"/>
-              </a:srgbClr>
-            </a:outerShdw>
-          </a:effectLst>
-        </p:spPr>
-      </p:sp>
-      <p:sp>
-        <p:nvSpPr>
-          <p:cNvPr id="26" name="Shape 24"/>
-          <p:cNvSpPr/>
-          <p:nvPr/>
-        </p:nvSpPr>
-        <p:spPr>
-          <a:xfrm>
-            <a:off x="8156448" y="3749040"/>
-            <a:ext cx="91440" cy="960120"/>
-          </a:xfrm>
-          <a:prstGeom prst="rect">
-            <a:avLst/>
-          </a:prstGeom>
-          <a:solidFill>
-            <a:srgbClr val="8B8DFF"/>
-          </a:solidFill>
-          <a:ln/>
-        </p:spPr>
-      </p:sp>
-      <p:sp>
-        <p:nvSpPr>
-          <p:cNvPr id="27" name="Text 25"/>
-          <p:cNvSpPr/>
-          <p:nvPr/>
-        </p:nvSpPr>
-        <p:spPr>
-          <a:xfrm>
-            <a:off x="8430768" y="3721608"/>
-            <a:ext cx="3072384" cy="365760"/>
-          </a:xfrm>
-          <a:prstGeom prst="rect">
-            <a:avLst/>
-          </a:prstGeom>
-          <a:noFill/>
-          <a:ln/>
-        </p:spPr>
-        <p:txBody>
-          <a:bodyPr wrap="square" rtlCol="0" anchor="ctr"/>
-          <a:lstStyle/>
-          <a:p>
-            <a:pPr indent="0" marL="0">
-              <a:buNone/>
-            </a:pPr>
-            <a:r>
-              <a:rPr lang="en-US" sz="1500" b="1" dirty="0">
-                <a:solidFill>
-                  <a:srgbClr val="ECEAF6"/>
-                </a:solidFill>
-                <a:latin typeface="Trebuchet MS" pitchFamily="34" charset="0"/>
-                <a:ea typeface="Trebuchet MS" pitchFamily="34" charset="-122"/>
-                <a:cs typeface="Trebuchet MS" pitchFamily="34" charset="-120"/>
-              </a:rPr>
-              <a:t>Synthetic generator</a:t>
-            </a:r>
-            <a:endParaRPr lang="en-US" sz="1500" dirty="0"/>
-          </a:p>
-        </p:txBody>
-      </p:sp>
-      <p:sp>
-        <p:nvSpPr>
-          <p:cNvPr id="28" name="Text 26"/>
-          <p:cNvSpPr/>
-          <p:nvPr/>
-        </p:nvSpPr>
-        <p:spPr>
-          <a:xfrm>
-            <a:off x="8430768" y="4123944"/>
-            <a:ext cx="3072384" cy="731520"/>
-          </a:xfrm>
-          <a:prstGeom prst="rect">
-            <a:avLst/>
-          </a:prstGeom>
-          <a:noFill/>
-          <a:ln/>
-        </p:spPr>
-        <p:txBody>
-          <a:bodyPr wrap="square" rtlCol="0" anchor="ctr"/>
-          <a:lstStyle/>
-          <a:p>
+              <a:t>$225,000/day</a:t>
+            </a:r>
             <a:pPr indent="0" marL="0">
               <a:lnSpc>
-                <a:spcPts val="1500"/>
+                <a:spcPts val="2200"/>
               </a:lnSpc>
               <a:buNone/>
             </a:pPr>
             <a:r>
-              <a:rPr lang="en-US" sz="1200" dirty="0">
+              <a:rPr lang="en-US" sz="1500" dirty="0">
                 <a:solidFill>
                   <a:srgbClr val="AAB4C8"/>
                 </a:solidFill>
@@ -11899,38 +12514,38 @@
                 <a:ea typeface="Arial" pitchFamily="34" charset="-122"/>
                 <a:cs typeface="Arial" pitchFamily="34" charset="-120"/>
               </a:rPr>
-              <a:t>Seeded, reproducible — risk patterns baked in.</a:t>
-            </a:r>
-            <a:endParaRPr lang="en-US" sz="1200" dirty="0"/>
-          </a:p>
-        </p:txBody>
-      </p:sp>
-      <p:sp>
-        <p:nvSpPr>
-          <p:cNvPr id="29" name="Text 27"/>
-          <p:cNvSpPr/>
-          <p:nvPr/>
-        </p:nvSpPr>
-        <p:spPr>
-          <a:xfrm>
-            <a:off x="548640" y="5806440"/>
-            <a:ext cx="10972800" cy="457200"/>
-          </a:xfrm>
-          <a:prstGeom prst="rect">
-            <a:avLst/>
-          </a:prstGeom>
-          <a:noFill/>
-          <a:ln/>
-        </p:spPr>
-        <p:txBody>
-          <a:bodyPr wrap="square" rtlCol="0" anchor="ctr"/>
-          <a:lstStyle/>
-          <a:p>
-            <a:pPr indent="0" marL="0">
-              <a:buNone/>
-            </a:pPr>
-            <a:r>
-              <a:rPr lang="en-US" sz="1200" i="1" dirty="0">
+              <a:t> — a concentration risk no one spotted across the silos.</a:t>
+            </a:r>
+            <a:endParaRPr lang="en-US" sz="1500" dirty="0"/>
+          </a:p>
+        </p:txBody>
+      </p:sp>
+      <p:sp>
+        <p:nvSpPr>
+          <p:cNvPr id="21" name="Text 19"/>
+          <p:cNvSpPr/>
+          <p:nvPr/>
+        </p:nvSpPr>
+        <p:spPr>
+          <a:xfrm>
+            <a:off x="11274552" y="6400800"/>
+            <a:ext cx="548640" cy="274320"/>
+          </a:xfrm>
+          <a:prstGeom prst="rect">
+            <a:avLst/>
+          </a:prstGeom>
+          <a:noFill/>
+          <a:ln/>
+        </p:spPr>
+        <p:txBody>
+          <a:bodyPr wrap="square" rtlCol="0" anchor="ctr"/>
+          <a:lstStyle/>
+          <a:p>
+            <a:pPr algn="r" indent="0" marL="0">
+              <a:buNone/>
+            </a:pPr>
+            <a:r>
+              <a:rPr lang="en-US" sz="900" dirty="0">
                 <a:solidFill>
                   <a:srgbClr val="8694A8"/>
                 </a:solidFill>
@@ -11938,45 +12553,6 @@
                 <a:ea typeface="Arial" pitchFamily="34" charset="-122"/>
                 <a:cs typeface="Arial" pitchFamily="34" charset="-120"/>
               </a:rPr>
-              <a:t>Connectors + logistics signals are simulated and clearly labelled; production points the same connector at a real system via env config.</a:t>
-            </a:r>
-            <a:endParaRPr lang="en-US" sz="1200" dirty="0"/>
-          </a:p>
-        </p:txBody>
-      </p:sp>
-      <p:sp>
-        <p:nvSpPr>
-          <p:cNvPr id="30" name="Text 28"/>
-          <p:cNvSpPr/>
-          <p:nvPr/>
-        </p:nvSpPr>
-        <p:spPr>
-          <a:xfrm>
-            <a:off x="11274552" y="6400800"/>
-            <a:ext cx="548640" cy="274320"/>
-          </a:xfrm>
-          <a:prstGeom prst="rect">
-            <a:avLst/>
-          </a:prstGeom>
-          <a:noFill/>
-          <a:ln/>
-        </p:spPr>
-        <p:txBody>
-          <a:bodyPr wrap="square" rtlCol="0" anchor="ctr"/>
-          <a:lstStyle/>
-          <a:p>
-            <a:pPr algn="r" indent="0" marL="0">
-              <a:buNone/>
-            </a:pPr>
-            <a:r>
-              <a:rPr lang="en-US" sz="900" dirty="0">
-                <a:solidFill>
-                  <a:srgbClr val="8694A8"/>
-                </a:solidFill>
-                <a:latin typeface="Arial" pitchFamily="34" charset="0"/>
-                <a:ea typeface="Arial" pitchFamily="34" charset="-122"/>
-                <a:cs typeface="Arial" pitchFamily="34" charset="-120"/>
-              </a:rPr>
               <a:t>07</a:t>
             </a:r>
             <a:endParaRPr lang="en-US" sz="900" dirty="0"/>
@@ -11985,7 +12561,7 @@
       </p:sp>
       <p:sp>
         <p:nvSpPr>
-          <p:cNvPr id="31" name="Text 29"/>
+          <p:cNvPr id="22" name="Text 20"/>
           <p:cNvSpPr/>
           <p:nvPr/>
         </p:nvSpPr>
@@ -12107,7 +12683,7 @@
                 <a:ea typeface="Arial" pitchFamily="34" charset="-122"/>
                 <a:cs typeface="Arial" pitchFamily="34" charset="-120"/>
               </a:rPr>
-              <a:t>RISK ENGINE</a:t>
+              <a:t>INTEGRATIONS</a:t>
             </a:r>
             <a:endParaRPr lang="en-US" sz="1100" dirty="0"/>
           </a:p>
@@ -12146,7 +12722,7 @@
                 <a:ea typeface="Trebuchet MS" pitchFamily="34" charset="-122"/>
                 <a:cs typeface="Trebuchet MS" pitchFamily="34" charset="-120"/>
               </a:rPr>
-              <a:t>Logistics risk + a LightGBM late-delivery model</a:t>
+              <a:t>Plug in any supply-chain data source</a:t>
             </a:r>
             <a:endParaRPr lang="en-US" sz="3000" dirty="0"/>
           </a:p>
@@ -12160,16 +12736,16 @@
         </p:nvSpPr>
         <p:spPr>
           <a:xfrm>
-            <a:off x="548640" y="1783080"/>
-            <a:ext cx="4572000" cy="3886200"/>
+            <a:off x="548640" y="1828800"/>
+            <a:ext cx="3529584" cy="1417320"/>
           </a:xfrm>
           <a:prstGeom prst="roundRect">
             <a:avLst>
-              <a:gd name="adj" fmla="val 2118"/>
+              <a:gd name="adj" fmla="val 5806"/>
             </a:avLst>
           </a:prstGeom>
           <a:solidFill>
-            <a:srgbClr val="131A26"/>
+            <a:srgbClr val="1B2433"/>
           </a:solidFill>
           <a:ln w="12700">
             <a:solidFill>
@@ -12188,14 +12764,34 @@
       </p:sp>
       <p:sp>
         <p:nvSpPr>
-          <p:cNvPr id="6" name="Text 4"/>
-          <p:cNvSpPr/>
-          <p:nvPr/>
-        </p:nvSpPr>
-        <p:spPr>
-          <a:xfrm>
-            <a:off x="822960" y="1965960"/>
-            <a:ext cx="4114800" cy="365760"/>
+          <p:cNvPr id="6" name="Shape 4"/>
+          <p:cNvSpPr/>
+          <p:nvPr/>
+        </p:nvSpPr>
+        <p:spPr>
+          <a:xfrm>
+            <a:off x="548640" y="2057400"/>
+            <a:ext cx="91440" cy="960120"/>
+          </a:xfrm>
+          <a:prstGeom prst="rect">
+            <a:avLst/>
+          </a:prstGeom>
+          <a:solidFill>
+            <a:srgbClr val="8B8DFF"/>
+          </a:solidFill>
+          <a:ln/>
+        </p:spPr>
+      </p:sp>
+      <p:sp>
+        <p:nvSpPr>
+          <p:cNvPr id="7" name="Text 5"/>
+          <p:cNvSpPr/>
+          <p:nvPr/>
+        </p:nvSpPr>
+        <p:spPr>
+          <a:xfrm>
+            <a:off x="822960" y="2029968"/>
+            <a:ext cx="3072384" cy="365760"/>
           </a:xfrm>
           <a:prstGeom prst="rect">
             <a:avLst/>
@@ -12213,13 +12809,13 @@
             <a:r>
               <a:rPr lang="en-US" sz="1500" b="1" dirty="0">
                 <a:solidFill>
-                  <a:srgbClr val="C0C1FF"/>
+                  <a:srgbClr val="ECEAF6"/>
                 </a:solidFill>
                 <a:latin typeface="Trebuchet MS" pitchFamily="34" charset="0"/>
                 <a:ea typeface="Trebuchet MS" pitchFamily="34" charset="-122"/>
                 <a:cs typeface="Trebuchet MS" pitchFamily="34" charset="-120"/>
               </a:rPr>
-              <a:t>Simulated in-transit shipments</a:t>
+              <a:t>Upload CSV / XLSX</a:t>
             </a:r>
             <a:endParaRPr lang="en-US" sz="1500" dirty="0"/>
           </a:p>
@@ -12227,14 +12823,14 @@
       </p:sp>
       <p:sp>
         <p:nvSpPr>
-          <p:cNvPr id="7" name="Text 5"/>
-          <p:cNvSpPr/>
-          <p:nvPr/>
-        </p:nvSpPr>
-        <p:spPr>
-          <a:xfrm>
-            <a:off x="822960" y="2423160"/>
-            <a:ext cx="1828800" cy="640080"/>
+          <p:cNvPr id="8" name="Text 6"/>
+          <p:cNvSpPr/>
+          <p:nvPr/>
+        </p:nvSpPr>
+        <p:spPr>
+          <a:xfrm>
+            <a:off x="822960" y="2432304"/>
+            <a:ext cx="3072384" cy="731520"/>
           </a:xfrm>
           <a:prstGeom prst="rect">
             <a:avLst/>
@@ -12247,33 +12843,129 @@
           <a:lstStyle/>
           <a:p>
             <a:pPr indent="0" marL="0">
-              <a:buNone/>
-            </a:pPr>
-            <a:r>
-              <a:rPr lang="en-US" sz="3000" b="1" dirty="0">
-                <a:solidFill>
-                  <a:srgbClr val="FFB783"/>
+              <a:lnSpc>
+                <a:spcPts val="1500"/>
+              </a:lnSpc>
+              <a:buNone/>
+            </a:pPr>
+            <a:r>
+              <a:rPr lang="en-US" sz="1200" dirty="0">
+                <a:solidFill>
+                  <a:srgbClr val="AAB4C8"/>
+                </a:solidFill>
+                <a:latin typeface="Arial" pitchFamily="34" charset="0"/>
+                <a:ea typeface="Arial" pitchFamily="34" charset="-122"/>
+                <a:cs typeface="Arial" pitchFamily="34" charset="-120"/>
+              </a:rPr>
+              <a:t>Arbitrary files auto-profiled (50+ columns, 50k rows).</a:t>
+            </a:r>
+            <a:endParaRPr lang="en-US" sz="1200" dirty="0"/>
+          </a:p>
+        </p:txBody>
+      </p:sp>
+      <p:sp>
+        <p:nvSpPr>
+          <p:cNvPr id="9" name="Shape 7"/>
+          <p:cNvSpPr/>
+          <p:nvPr/>
+        </p:nvSpPr>
+        <p:spPr>
+          <a:xfrm>
+            <a:off x="4352544" y="1828800"/>
+            <a:ext cx="3529584" cy="1417320"/>
+          </a:xfrm>
+          <a:prstGeom prst="roundRect">
+            <a:avLst>
+              <a:gd name="adj" fmla="val 5806"/>
+            </a:avLst>
+          </a:prstGeom>
+          <a:solidFill>
+            <a:srgbClr val="1B2433"/>
+          </a:solidFill>
+          <a:ln w="12700">
+            <a:solidFill>
+              <a:srgbClr val="2A3547"/>
+            </a:solidFill>
+            <a:prstDash val="solid"/>
+          </a:ln>
+          <a:effectLst>
+            <a:outerShdw sx="100000" sy="100000" kx="0" ky="0" algn="bl" rotWithShape="0" blurRad="114300" dist="38100" dir="5400000">
+              <a:srgbClr val="000000">
+                <a:alpha val="35000"/>
+              </a:srgbClr>
+            </a:outerShdw>
+          </a:effectLst>
+        </p:spPr>
+      </p:sp>
+      <p:sp>
+        <p:nvSpPr>
+          <p:cNvPr id="10" name="Shape 8"/>
+          <p:cNvSpPr/>
+          <p:nvPr/>
+        </p:nvSpPr>
+        <p:spPr>
+          <a:xfrm>
+            <a:off x="4352544" y="2057400"/>
+            <a:ext cx="91440" cy="960120"/>
+          </a:xfrm>
+          <a:prstGeom prst="rect">
+            <a:avLst/>
+          </a:prstGeom>
+          <a:solidFill>
+            <a:srgbClr val="8B8DFF"/>
+          </a:solidFill>
+          <a:ln/>
+        </p:spPr>
+      </p:sp>
+      <p:sp>
+        <p:nvSpPr>
+          <p:cNvPr id="11" name="Text 9"/>
+          <p:cNvSpPr/>
+          <p:nvPr/>
+        </p:nvSpPr>
+        <p:spPr>
+          <a:xfrm>
+            <a:off x="4626864" y="2029968"/>
+            <a:ext cx="3072384" cy="365760"/>
+          </a:xfrm>
+          <a:prstGeom prst="rect">
+            <a:avLst/>
+          </a:prstGeom>
+          <a:noFill/>
+          <a:ln/>
+        </p:spPr>
+        <p:txBody>
+          <a:bodyPr wrap="square" rtlCol="0" anchor="ctr"/>
+          <a:lstStyle/>
+          <a:p>
+            <a:pPr indent="0" marL="0">
+              <a:buNone/>
+            </a:pPr>
+            <a:r>
+              <a:rPr lang="en-US" sz="1500" b="1" dirty="0">
+                <a:solidFill>
+                  <a:srgbClr val="ECEAF6"/>
                 </a:solidFill>
                 <a:latin typeface="Trebuchet MS" pitchFamily="34" charset="0"/>
                 <a:ea typeface="Trebuchet MS" pitchFamily="34" charset="-122"/>
                 <a:cs typeface="Trebuchet MS" pitchFamily="34" charset="-120"/>
               </a:rPr>
-              <a:t>$240K</a:t>
-            </a:r>
-            <a:endParaRPr lang="en-US" sz="3000" dirty="0"/>
-          </a:p>
-        </p:txBody>
-      </p:sp>
-      <p:sp>
-        <p:nvSpPr>
-          <p:cNvPr id="8" name="Text 6"/>
-          <p:cNvSpPr/>
-          <p:nvPr/>
-        </p:nvSpPr>
-        <p:spPr>
-          <a:xfrm>
-            <a:off x="2697480" y="2532888"/>
-            <a:ext cx="2286000" cy="640080"/>
+              <a:t>SAP S/4HANA</a:t>
+            </a:r>
+            <a:endParaRPr lang="en-US" sz="1500" dirty="0"/>
+          </a:p>
+        </p:txBody>
+      </p:sp>
+      <p:sp>
+        <p:nvSpPr>
+          <p:cNvPr id="12" name="Text 10"/>
+          <p:cNvSpPr/>
+          <p:nvPr/>
+        </p:nvSpPr>
+        <p:spPr>
+          <a:xfrm>
+            <a:off x="4626864" y="2432304"/>
+            <a:ext cx="3072384" cy="731520"/>
           </a:xfrm>
           <a:prstGeom prst="rect">
             <a:avLst/>
@@ -12286,10 +12978,13 @@
           <a:lstStyle/>
           <a:p>
             <a:pPr indent="0" marL="0">
-              <a:buNone/>
-            </a:pPr>
-            <a:r>
-              <a:rPr lang="en-US" sz="1250" dirty="0">
+              <a:lnSpc>
+                <a:spcPts val="1500"/>
+              </a:lnSpc>
+              <a:buNone/>
+            </a:pPr>
+            <a:r>
+              <a:rPr lang="en-US" sz="1200" dirty="0">
                 <a:solidFill>
                   <a:srgbClr val="AAB4C8"/>
                 </a:solidFill>
@@ -12297,22 +12992,76 @@
                 <a:ea typeface="Arial" pitchFamily="34" charset="-122"/>
                 <a:cs typeface="Arial" pitchFamily="34" charset="-120"/>
               </a:rPr>
-              <a:t>expected delay cost</a:t>
-            </a:r>
-            <a:endParaRPr lang="en-US" sz="1250" dirty="0"/>
-          </a:p>
-        </p:txBody>
-      </p:sp>
-      <p:sp>
-        <p:nvSpPr>
-          <p:cNvPr id="9" name="Text 7"/>
-          <p:cNvSpPr/>
-          <p:nvPr/>
-        </p:nvSpPr>
-        <p:spPr>
-          <a:xfrm>
-            <a:off x="822960" y="3447288"/>
-            <a:ext cx="1828800" cy="640080"/>
+              <a:t>Simulated OData feed — LIFNR / EBELN / MATNR fields.</a:t>
+            </a:r>
+            <a:endParaRPr lang="en-US" sz="1200" dirty="0"/>
+          </a:p>
+        </p:txBody>
+      </p:sp>
+      <p:sp>
+        <p:nvSpPr>
+          <p:cNvPr id="13" name="Shape 11"/>
+          <p:cNvSpPr/>
+          <p:nvPr/>
+        </p:nvSpPr>
+        <p:spPr>
+          <a:xfrm>
+            <a:off x="8156448" y="1828800"/>
+            <a:ext cx="3529584" cy="1417320"/>
+          </a:xfrm>
+          <a:prstGeom prst="roundRect">
+            <a:avLst>
+              <a:gd name="adj" fmla="val 5806"/>
+            </a:avLst>
+          </a:prstGeom>
+          <a:solidFill>
+            <a:srgbClr val="1B2433"/>
+          </a:solidFill>
+          <a:ln w="12700">
+            <a:solidFill>
+              <a:srgbClr val="2A3547"/>
+            </a:solidFill>
+            <a:prstDash val="solid"/>
+          </a:ln>
+          <a:effectLst>
+            <a:outerShdw sx="100000" sy="100000" kx="0" ky="0" algn="bl" rotWithShape="0" blurRad="114300" dist="38100" dir="5400000">
+              <a:srgbClr val="000000">
+                <a:alpha val="35000"/>
+              </a:srgbClr>
+            </a:outerShdw>
+          </a:effectLst>
+        </p:spPr>
+      </p:sp>
+      <p:sp>
+        <p:nvSpPr>
+          <p:cNvPr id="14" name="Shape 12"/>
+          <p:cNvSpPr/>
+          <p:nvPr/>
+        </p:nvSpPr>
+        <p:spPr>
+          <a:xfrm>
+            <a:off x="8156448" y="2057400"/>
+            <a:ext cx="91440" cy="960120"/>
+          </a:xfrm>
+          <a:prstGeom prst="rect">
+            <a:avLst/>
+          </a:prstGeom>
+          <a:solidFill>
+            <a:srgbClr val="8B8DFF"/>
+          </a:solidFill>
+          <a:ln/>
+        </p:spPr>
+      </p:sp>
+      <p:sp>
+        <p:nvSpPr>
+          <p:cNvPr id="15" name="Text 13"/>
+          <p:cNvSpPr/>
+          <p:nvPr/>
+        </p:nvSpPr>
+        <p:spPr>
+          <a:xfrm>
+            <a:off x="8430768" y="2029968"/>
+            <a:ext cx="3072384" cy="365760"/>
           </a:xfrm>
           <a:prstGeom prst="rect">
             <a:avLst/>
@@ -12328,7 +13077,7 @@
               <a:buNone/>
             </a:pPr>
             <a:r>
-              <a:rPr lang="en-US" sz="3000" b="1" dirty="0">
+              <a:rPr lang="en-US" sz="1500" b="1" dirty="0">
                 <a:solidFill>
                   <a:srgbClr val="ECEAF6"/>
                 </a:solidFill>
@@ -12336,22 +13085,22 @@
                 <a:ea typeface="Trebuchet MS" pitchFamily="34" charset="-122"/>
                 <a:cs typeface="Trebuchet MS" pitchFamily="34" charset="-120"/>
               </a:rPr>
-              <a:t>$4.8M</a:t>
-            </a:r>
-            <a:endParaRPr lang="en-US" sz="3000" dirty="0"/>
-          </a:p>
-        </p:txBody>
-      </p:sp>
-      <p:sp>
-        <p:nvSpPr>
-          <p:cNvPr id="10" name="Text 8"/>
-          <p:cNvSpPr/>
-          <p:nvPr/>
-        </p:nvSpPr>
-        <p:spPr>
-          <a:xfrm>
-            <a:off x="2697480" y="3557016"/>
-            <a:ext cx="2286000" cy="640080"/>
+              <a:t>Odoo</a:t>
+            </a:r>
+            <a:endParaRPr lang="en-US" sz="1500" dirty="0"/>
+          </a:p>
+        </p:txBody>
+      </p:sp>
+      <p:sp>
+        <p:nvSpPr>
+          <p:cNvPr id="16" name="Text 14"/>
+          <p:cNvSpPr/>
+          <p:nvPr/>
+        </p:nvSpPr>
+        <p:spPr>
+          <a:xfrm>
+            <a:off x="8430768" y="2432304"/>
+            <a:ext cx="3072384" cy="731520"/>
           </a:xfrm>
           <a:prstGeom prst="rect">
             <a:avLst/>
@@ -12364,10 +13113,13 @@
           <a:lstStyle/>
           <a:p>
             <a:pPr indent="0" marL="0">
-              <a:buNone/>
-            </a:pPr>
-            <a:r>
-              <a:rPr lang="en-US" sz="1250" dirty="0">
+              <a:lnSpc>
+                <a:spcPts val="1500"/>
+              </a:lnSpc>
+              <a:buNone/>
+            </a:pPr>
+            <a:r>
+              <a:rPr lang="en-US" sz="1200" dirty="0">
                 <a:solidFill>
                   <a:srgbClr val="AAB4C8"/>
                 </a:solidFill>
@@ -12375,22 +13127,76 @@
                 <a:ea typeface="Arial" pitchFamily="34" charset="-122"/>
                 <a:cs typeface="Arial" pitchFamily="34" charset="-120"/>
               </a:rPr>
-              <a:t>value in transit</a:t>
-            </a:r>
-            <a:endParaRPr lang="en-US" sz="1250" dirty="0"/>
-          </a:p>
-        </p:txBody>
-      </p:sp>
-      <p:sp>
-        <p:nvSpPr>
-          <p:cNvPr id="11" name="Text 9"/>
-          <p:cNvSpPr/>
-          <p:nvPr/>
-        </p:nvSpPr>
-        <p:spPr>
-          <a:xfrm>
-            <a:off x="822960" y="4471416"/>
-            <a:ext cx="1828800" cy="640080"/>
+              <a:t>Simulated JSON-RPC — res.partner / purchase.order.</a:t>
+            </a:r>
+            <a:endParaRPr lang="en-US" sz="1200" dirty="0"/>
+          </a:p>
+        </p:txBody>
+      </p:sp>
+      <p:sp>
+        <p:nvSpPr>
+          <p:cNvPr id="17" name="Shape 15"/>
+          <p:cNvSpPr/>
+          <p:nvPr/>
+        </p:nvSpPr>
+        <p:spPr>
+          <a:xfrm>
+            <a:off x="548640" y="3520440"/>
+            <a:ext cx="3529584" cy="1417320"/>
+          </a:xfrm>
+          <a:prstGeom prst="roundRect">
+            <a:avLst>
+              <a:gd name="adj" fmla="val 5806"/>
+            </a:avLst>
+          </a:prstGeom>
+          <a:solidFill>
+            <a:srgbClr val="1B2433"/>
+          </a:solidFill>
+          <a:ln w="12700">
+            <a:solidFill>
+              <a:srgbClr val="2A3547"/>
+            </a:solidFill>
+            <a:prstDash val="solid"/>
+          </a:ln>
+          <a:effectLst>
+            <a:outerShdw sx="100000" sy="100000" kx="0" ky="0" algn="bl" rotWithShape="0" blurRad="114300" dist="38100" dir="5400000">
+              <a:srgbClr val="000000">
+                <a:alpha val="35000"/>
+              </a:srgbClr>
+            </a:outerShdw>
+          </a:effectLst>
+        </p:spPr>
+      </p:sp>
+      <p:sp>
+        <p:nvSpPr>
+          <p:cNvPr id="18" name="Shape 16"/>
+          <p:cNvSpPr/>
+          <p:nvPr/>
+        </p:nvSpPr>
+        <p:spPr>
+          <a:xfrm>
+            <a:off x="548640" y="3749040"/>
+            <a:ext cx="91440" cy="960120"/>
+          </a:xfrm>
+          <a:prstGeom prst="rect">
+            <a:avLst/>
+          </a:prstGeom>
+          <a:solidFill>
+            <a:srgbClr val="8B8DFF"/>
+          </a:solidFill>
+          <a:ln/>
+        </p:spPr>
+      </p:sp>
+      <p:sp>
+        <p:nvSpPr>
+          <p:cNvPr id="19" name="Text 17"/>
+          <p:cNvSpPr/>
+          <p:nvPr/>
+        </p:nvSpPr>
+        <p:spPr>
+          <a:xfrm>
+            <a:off x="822960" y="3721608"/>
+            <a:ext cx="3072384" cy="365760"/>
           </a:xfrm>
           <a:prstGeom prst="rect">
             <a:avLst/>
@@ -12406,30 +13212,30 @@
               <a:buNone/>
             </a:pPr>
             <a:r>
-              <a:rPr lang="en-US" sz="3000" b="1" dirty="0">
-                <a:solidFill>
-                  <a:srgbClr val="FF8A93"/>
+              <a:rPr lang="en-US" sz="1500" b="1" dirty="0">
+                <a:solidFill>
+                  <a:srgbClr val="ECEAF6"/>
                 </a:solidFill>
                 <a:latin typeface="Trebuchet MS" pitchFamily="34" charset="0"/>
                 <a:ea typeface="Trebuchet MS" pitchFamily="34" charset="-122"/>
                 <a:cs typeface="Trebuchet MS" pitchFamily="34" charset="-120"/>
               </a:rPr>
-              <a:t>3 / 14</a:t>
-            </a:r>
-            <a:endParaRPr lang="en-US" sz="3000" dirty="0"/>
-          </a:p>
-        </p:txBody>
-      </p:sp>
-      <p:sp>
-        <p:nvSpPr>
-          <p:cNvPr id="12" name="Text 10"/>
-          <p:cNvSpPr/>
-          <p:nvPr/>
-        </p:nvSpPr>
-        <p:spPr>
-          <a:xfrm>
-            <a:off x="2697480" y="4581144"/>
-            <a:ext cx="2286000" cy="640080"/>
+              <a:t>MS Dynamics 365</a:t>
+            </a:r>
+            <a:endParaRPr lang="en-US" sz="1500" dirty="0"/>
+          </a:p>
+        </p:txBody>
+      </p:sp>
+      <p:sp>
+        <p:nvSpPr>
+          <p:cNvPr id="20" name="Text 18"/>
+          <p:cNvSpPr/>
+          <p:nvPr/>
+        </p:nvSpPr>
+        <p:spPr>
+          <a:xfrm>
+            <a:off x="822960" y="4123944"/>
+            <a:ext cx="3072384" cy="731520"/>
           </a:xfrm>
           <a:prstGeom prst="rect">
             <a:avLst/>
@@ -12442,10 +13248,13 @@
           <a:lstStyle/>
           <a:p>
             <a:pPr indent="0" marL="0">
-              <a:buNone/>
-            </a:pPr>
-            <a:r>
-              <a:rPr lang="en-US" sz="1250" dirty="0">
+              <a:lnSpc>
+                <a:spcPts val="1500"/>
+              </a:lnSpc>
+              <a:buNone/>
+            </a:pPr>
+            <a:r>
+              <a:rPr lang="en-US" sz="1200" dirty="0">
                 <a:solidFill>
                   <a:srgbClr val="AAB4C8"/>
                 </a:solidFill>
@@ -12453,22 +13262,76 @@
                 <a:ea typeface="Arial" pitchFamily="34" charset="-122"/>
                 <a:cs typeface="Arial" pitchFamily="34" charset="-120"/>
               </a:rPr>
-              <a:t>shipments ≥50% delay risk</a:t>
-            </a:r>
-            <a:endParaRPr lang="en-US" sz="1250" dirty="0"/>
-          </a:p>
-        </p:txBody>
-      </p:sp>
-      <p:sp>
-        <p:nvSpPr>
-          <p:cNvPr id="13" name="Text 11"/>
-          <p:cNvSpPr/>
-          <p:nvPr/>
-        </p:nvSpPr>
-        <p:spPr>
-          <a:xfrm>
-            <a:off x="822960" y="5120640"/>
-            <a:ext cx="4114800" cy="457200"/>
+              <a:t>Simulated OData v4 — VendorAccount / PurchId.</a:t>
+            </a:r>
+            <a:endParaRPr lang="en-US" sz="1200" dirty="0"/>
+          </a:p>
+        </p:txBody>
+      </p:sp>
+      <p:sp>
+        <p:nvSpPr>
+          <p:cNvPr id="21" name="Shape 19"/>
+          <p:cNvSpPr/>
+          <p:nvPr/>
+        </p:nvSpPr>
+        <p:spPr>
+          <a:xfrm>
+            <a:off x="4352544" y="3520440"/>
+            <a:ext cx="3529584" cy="1417320"/>
+          </a:xfrm>
+          <a:prstGeom prst="roundRect">
+            <a:avLst>
+              <a:gd name="adj" fmla="val 5806"/>
+            </a:avLst>
+          </a:prstGeom>
+          <a:solidFill>
+            <a:srgbClr val="1B2433"/>
+          </a:solidFill>
+          <a:ln w="12700">
+            <a:solidFill>
+              <a:srgbClr val="2A3547"/>
+            </a:solidFill>
+            <a:prstDash val="solid"/>
+          </a:ln>
+          <a:effectLst>
+            <a:outerShdw sx="100000" sy="100000" kx="0" ky="0" algn="bl" rotWithShape="0" blurRad="114300" dist="38100" dir="5400000">
+              <a:srgbClr val="000000">
+                <a:alpha val="35000"/>
+              </a:srgbClr>
+            </a:outerShdw>
+          </a:effectLst>
+        </p:spPr>
+      </p:sp>
+      <p:sp>
+        <p:nvSpPr>
+          <p:cNvPr id="22" name="Shape 20"/>
+          <p:cNvSpPr/>
+          <p:nvPr/>
+        </p:nvSpPr>
+        <p:spPr>
+          <a:xfrm>
+            <a:off x="4352544" y="3749040"/>
+            <a:ext cx="91440" cy="960120"/>
+          </a:xfrm>
+          <a:prstGeom prst="rect">
+            <a:avLst/>
+          </a:prstGeom>
+          <a:solidFill>
+            <a:srgbClr val="8B8DFF"/>
+          </a:solidFill>
+          <a:ln/>
+        </p:spPr>
+      </p:sp>
+      <p:sp>
+        <p:nvSpPr>
+          <p:cNvPr id="23" name="Text 21"/>
+          <p:cNvSpPr/>
+          <p:nvPr/>
+        </p:nvSpPr>
+        <p:spPr>
+          <a:xfrm>
+            <a:off x="4626864" y="3721608"/>
+            <a:ext cx="3072384" cy="365760"/>
           </a:xfrm>
           <a:prstGeom prst="rect">
             <a:avLst/>
@@ -12484,30 +13347,126 @@
               <a:buNone/>
             </a:pPr>
             <a:r>
-              <a:rPr lang="en-US" sz="1150" i="1" dirty="0">
-                <a:solidFill>
-                  <a:srgbClr val="8694A8"/>
+              <a:rPr lang="en-US" sz="1500" b="1" dirty="0">
+                <a:solidFill>
+                  <a:srgbClr val="ECEAF6"/>
+                </a:solidFill>
+                <a:latin typeface="Trebuchet MS" pitchFamily="34" charset="0"/>
+                <a:ea typeface="Trebuchet MS" pitchFamily="34" charset="-122"/>
+                <a:cs typeface="Trebuchet MS" pitchFamily="34" charset="-120"/>
+              </a:rPr>
+              <a:t>Public dataset (USAID)</a:t>
+            </a:r>
+            <a:endParaRPr lang="en-US" sz="1500" dirty="0"/>
+          </a:p>
+        </p:txBody>
+      </p:sp>
+      <p:sp>
+        <p:nvSpPr>
+          <p:cNvPr id="24" name="Text 22"/>
+          <p:cNvSpPr/>
+          <p:nvPr/>
+        </p:nvSpPr>
+        <p:spPr>
+          <a:xfrm>
+            <a:off x="4626864" y="4123944"/>
+            <a:ext cx="3072384" cy="731520"/>
+          </a:xfrm>
+          <a:prstGeom prst="rect">
+            <a:avLst/>
+          </a:prstGeom>
+          <a:noFill/>
+          <a:ln/>
+        </p:spPr>
+        <p:txBody>
+          <a:bodyPr wrap="square" rtlCol="0" anchor="ctr"/>
+          <a:lstStyle/>
+          <a:p>
+            <a:pPr indent="0" marL="0">
+              <a:lnSpc>
+                <a:spcPts val="1500"/>
+              </a:lnSpc>
+              <a:buNone/>
+            </a:pPr>
+            <a:r>
+              <a:rPr lang="en-US" sz="1200" dirty="0">
+                <a:solidFill>
+                  <a:srgbClr val="AAB4C8"/>
                 </a:solidFill>
                 <a:latin typeface="Arial" pitchFamily="34" charset="0"/>
                 <a:ea typeface="Arial" pitchFamily="34" charset="-122"/>
                 <a:cs typeface="Arial" pitchFamily="34" charset="-120"/>
               </a:rPr>
-              <a:t>Sea · Air · Road · Rail — each scored on weather, port congestion &amp; lane risk.</a:t>
-            </a:r>
-            <a:endParaRPr lang="en-US" sz="1150" dirty="0"/>
-          </a:p>
-        </p:txBody>
-      </p:sp>
-      <p:sp>
-        <p:nvSpPr>
-          <p:cNvPr id="14" name="Text 12"/>
-          <p:cNvSpPr/>
-          <p:nvPr/>
-        </p:nvSpPr>
-        <p:spPr>
-          <a:xfrm>
-            <a:off x="5577840" y="1783080"/>
-            <a:ext cx="5943600" cy="365760"/>
+              <a:t>Real, login-free shipment-pricing CSV.</a:t>
+            </a:r>
+            <a:endParaRPr lang="en-US" sz="1200" dirty="0"/>
+          </a:p>
+        </p:txBody>
+      </p:sp>
+      <p:sp>
+        <p:nvSpPr>
+          <p:cNvPr id="25" name="Shape 23"/>
+          <p:cNvSpPr/>
+          <p:nvPr/>
+        </p:nvSpPr>
+        <p:spPr>
+          <a:xfrm>
+            <a:off x="8156448" y="3520440"/>
+            <a:ext cx="3529584" cy="1417320"/>
+          </a:xfrm>
+          <a:prstGeom prst="roundRect">
+            <a:avLst>
+              <a:gd name="adj" fmla="val 5806"/>
+            </a:avLst>
+          </a:prstGeom>
+          <a:solidFill>
+            <a:srgbClr val="1B2433"/>
+          </a:solidFill>
+          <a:ln w="12700">
+            <a:solidFill>
+              <a:srgbClr val="2A3547"/>
+            </a:solidFill>
+            <a:prstDash val="solid"/>
+          </a:ln>
+          <a:effectLst>
+            <a:outerShdw sx="100000" sy="100000" kx="0" ky="0" algn="bl" rotWithShape="0" blurRad="114300" dist="38100" dir="5400000">
+              <a:srgbClr val="000000">
+                <a:alpha val="35000"/>
+              </a:srgbClr>
+            </a:outerShdw>
+          </a:effectLst>
+        </p:spPr>
+      </p:sp>
+      <p:sp>
+        <p:nvSpPr>
+          <p:cNvPr id="26" name="Shape 24"/>
+          <p:cNvSpPr/>
+          <p:nvPr/>
+        </p:nvSpPr>
+        <p:spPr>
+          <a:xfrm>
+            <a:off x="8156448" y="3749040"/>
+            <a:ext cx="91440" cy="960120"/>
+          </a:xfrm>
+          <a:prstGeom prst="rect">
+            <a:avLst/>
+          </a:prstGeom>
+          <a:solidFill>
+            <a:srgbClr val="8B8DFF"/>
+          </a:solidFill>
+          <a:ln/>
+        </p:spPr>
+      </p:sp>
+      <p:sp>
+        <p:nvSpPr>
+          <p:cNvPr id="27" name="Text 25"/>
+          <p:cNvSpPr/>
+          <p:nvPr/>
+        </p:nvSpPr>
+        <p:spPr>
+          <a:xfrm>
+            <a:off x="8430768" y="3721608"/>
+            <a:ext cx="3072384" cy="365760"/>
           </a:xfrm>
           <a:prstGeom prst="rect">
             <a:avLst/>
@@ -12525,44 +13484,28 @@
             <a:r>
               <a:rPr lang="en-US" sz="1500" b="1" dirty="0">
                 <a:solidFill>
-                  <a:srgbClr val="C0C1FF"/>
+                  <a:srgbClr val="ECEAF6"/>
                 </a:solidFill>
                 <a:latin typeface="Trebuchet MS" pitchFamily="34" charset="0"/>
                 <a:ea typeface="Trebuchet MS" pitchFamily="34" charset="-122"/>
                 <a:cs typeface="Trebuchet MS" pitchFamily="34" charset="-120"/>
               </a:rPr>
-              <a:t>Feature importance — what drives late delivery</a:t>
+              <a:t>Synthetic generator</a:t>
             </a:r>
             <a:endParaRPr lang="en-US" sz="1500" dirty="0"/>
           </a:p>
         </p:txBody>
       </p:sp>
-      <p:graphicFrame>
-        <p:nvGraphicFramePr>
-          <p:cNvPr id="15" name="Chart 0" descr=""/>
-          <p:cNvGraphicFramePr/>
-          <p:nvPr/>
-        </p:nvGraphicFramePr>
-        <p:xfrm>
-          <a:off x="5486400" y="2286000"/>
-          <a:ext cx="6126480" cy="3200400"/>
-        </p:xfrm>
-        <a:graphic xmlns:a="http://schemas.openxmlformats.org/drawingml/2006/main">
-          <a:graphicData uri="http://schemas.openxmlformats.org/drawingml/2006/chart">
-            <c:chart xmlns:c="http://schemas.openxmlformats.org/drawingml/2006/chart" r:id="rId1"/>
-          </a:graphicData>
-        </a:graphic>
-      </p:graphicFrame>
-      <p:sp>
-        <p:nvSpPr>
-          <p:cNvPr id="16" name="Text 13"/>
-          <p:cNvSpPr/>
-          <p:nvPr/>
-        </p:nvSpPr>
-        <p:spPr>
-          <a:xfrm>
-            <a:off x="5486400" y="5577840"/>
-            <a:ext cx="6217920" cy="457200"/>
+      <p:sp>
+        <p:nvSpPr>
+          <p:cNvPr id="28" name="Text 26"/>
+          <p:cNvSpPr/>
+          <p:nvPr/>
+        </p:nvSpPr>
+        <p:spPr>
+          <a:xfrm>
+            <a:off x="8430768" y="4123944"/>
+            <a:ext cx="3072384" cy="731520"/>
           </a:xfrm>
           <a:prstGeom prst="rect">
             <a:avLst/>
@@ -12575,49 +13518,52 @@
           <a:lstStyle/>
           <a:p>
             <a:pPr indent="0" marL="0">
-              <a:buNone/>
-            </a:pPr>
-            <a:r>
-              <a:rPr lang="en-US" sz="1100" i="1" dirty="0">
-                <a:solidFill>
-                  <a:srgbClr val="8694A8"/>
+              <a:lnSpc>
+                <a:spcPts val="1500"/>
+              </a:lnSpc>
+              <a:buNone/>
+            </a:pPr>
+            <a:r>
+              <a:rPr lang="en-US" sz="1200" dirty="0">
+                <a:solidFill>
+                  <a:srgbClr val="AAB4C8"/>
                 </a:solidFill>
                 <a:latin typeface="Arial" pitchFamily="34" charset="0"/>
                 <a:ea typeface="Arial" pitchFamily="34" charset="-122"/>
                 <a:cs typeface="Arial" pitchFamily="34" charset="-120"/>
               </a:rPr>
-              <a:t>Trained on a simulated history — holdout AUC ≈ 0.7. The pipeline (features → train → predict → explain) is real.</a:t>
-            </a:r>
-            <a:endParaRPr lang="en-US" sz="1100" dirty="0"/>
-          </a:p>
-        </p:txBody>
-      </p:sp>
-      <p:sp>
-        <p:nvSpPr>
-          <p:cNvPr id="17" name="Text 14"/>
-          <p:cNvSpPr/>
-          <p:nvPr/>
-        </p:nvSpPr>
-        <p:spPr>
-          <a:xfrm>
-            <a:off x="11274552" y="6400800"/>
-            <a:ext cx="548640" cy="274320"/>
-          </a:xfrm>
-          <a:prstGeom prst="rect">
-            <a:avLst/>
-          </a:prstGeom>
-          <a:noFill/>
-          <a:ln/>
-        </p:spPr>
-        <p:txBody>
-          <a:bodyPr wrap="square" rtlCol="0" anchor="ctr"/>
-          <a:lstStyle/>
-          <a:p>
-            <a:pPr algn="r" indent="0" marL="0">
-              <a:buNone/>
-            </a:pPr>
-            <a:r>
-              <a:rPr lang="en-US" sz="900" dirty="0">
+              <a:t>Seeded, reproducible — risk patterns baked in.</a:t>
+            </a:r>
+            <a:endParaRPr lang="en-US" sz="1200" dirty="0"/>
+          </a:p>
+        </p:txBody>
+      </p:sp>
+      <p:sp>
+        <p:nvSpPr>
+          <p:cNvPr id="29" name="Text 27"/>
+          <p:cNvSpPr/>
+          <p:nvPr/>
+        </p:nvSpPr>
+        <p:spPr>
+          <a:xfrm>
+            <a:off x="548640" y="5806440"/>
+            <a:ext cx="10972800" cy="457200"/>
+          </a:xfrm>
+          <a:prstGeom prst="rect">
+            <a:avLst/>
+          </a:prstGeom>
+          <a:noFill/>
+          <a:ln/>
+        </p:spPr>
+        <p:txBody>
+          <a:bodyPr wrap="square" rtlCol="0" anchor="ctr"/>
+          <a:lstStyle/>
+          <a:p>
+            <a:pPr indent="0" marL="0">
+              <a:buNone/>
+            </a:pPr>
+            <a:r>
+              <a:rPr lang="en-US" sz="1200" i="1" dirty="0">
                 <a:solidFill>
                   <a:srgbClr val="8694A8"/>
                 </a:solidFill>
@@ -12625,6 +13571,45 @@
                 <a:ea typeface="Arial" pitchFamily="34" charset="-122"/>
                 <a:cs typeface="Arial" pitchFamily="34" charset="-120"/>
               </a:rPr>
+              <a:t>Connectors + logistics signals are simulated and clearly labelled; production points the same connector at a real system via env config.</a:t>
+            </a:r>
+            <a:endParaRPr lang="en-US" sz="1200" dirty="0"/>
+          </a:p>
+        </p:txBody>
+      </p:sp>
+      <p:sp>
+        <p:nvSpPr>
+          <p:cNvPr id="30" name="Text 28"/>
+          <p:cNvSpPr/>
+          <p:nvPr/>
+        </p:nvSpPr>
+        <p:spPr>
+          <a:xfrm>
+            <a:off x="11274552" y="6400800"/>
+            <a:ext cx="548640" cy="274320"/>
+          </a:xfrm>
+          <a:prstGeom prst="rect">
+            <a:avLst/>
+          </a:prstGeom>
+          <a:noFill/>
+          <a:ln/>
+        </p:spPr>
+        <p:txBody>
+          <a:bodyPr wrap="square" rtlCol="0" anchor="ctr"/>
+          <a:lstStyle/>
+          <a:p>
+            <a:pPr algn="r" indent="0" marL="0">
+              <a:buNone/>
+            </a:pPr>
+            <a:r>
+              <a:rPr lang="en-US" sz="900" dirty="0">
+                <a:solidFill>
+                  <a:srgbClr val="8694A8"/>
+                </a:solidFill>
+                <a:latin typeface="Arial" pitchFamily="34" charset="0"/>
+                <a:ea typeface="Arial" pitchFamily="34" charset="-122"/>
+                <a:cs typeface="Arial" pitchFamily="34" charset="-120"/>
+              </a:rPr>
               <a:t>08</a:t>
             </a:r>
             <a:endParaRPr lang="en-US" sz="900" dirty="0"/>
@@ -12633,7 +13618,7 @@
       </p:sp>
       <p:sp>
         <p:nvSpPr>
-          <p:cNvPr id="18" name="Text 15"/>
+          <p:cNvPr id="31" name="Text 29"/>
           <p:cNvSpPr/>
           <p:nvPr/>
         </p:nvSpPr>
